--- a/docs/apresentacoes/04-apps-fiori-elements.pptx
+++ b/docs/apresentacoes/04-apps-fiori-elements.pptx
@@ -117,37 +117,37 @@
   <p:extLst>
     <p:ext uri="{521415D9-36F7-43E2-AB2F-B90AF26B5E84}">
       <p14:sectionLst xmlns:p14="http://schemas.microsoft.com/office/powerpoint/2010/main">
-        <p14:section name="Abertura" id="{43e3bafd-75c5-3fa8-3d9b-b931edcb5eea}">
+        <p14:section name="Abertura" id="{d92d512d-bbf1-fa7e-a1fb-e1ba5d8860bf}">
           <p14:sldIdLst>
             <p14:sldId id="256"/>
           </p14:sldIdLst>
         </p14:section>
-        <p14:section name="Contexto" id="{44f5d237-4192-b99a-88ee-a166d8c3b09f}">
+        <p14:section name="Contexto" id="{6e3b7e41-c324-96af-a7ee-06790161a772}">
           <p14:sldIdLst>
             <p14:sldId id="257"/>
           </p14:sldIdLst>
         </p14:section>
-        <p14:section name="Visão geral" id="{aa6b11cf-eead-337a-430e-de7696feb8a6}">
+        <p14:section name="Visão geral" id="{4264e36c-295f-8fd3-b7a7-4bac0acefd4c}">
           <p14:sldIdLst>
             <p14:sldId id="258"/>
             <p14:sldId id="259"/>
           </p14:sldIdLst>
         </p14:section>
-        <p14:section name="Anotações" id="{13582097-e7ed-80bb-592a-8991bac5b398}">
+        <p14:section name="Anotações" id="{6c0a4282-8d67-d12c-d738-c6d0ffa1e66d}">
           <p14:sldIdLst>
             <p14:sldId id="260"/>
             <p14:sldId id="261"/>
             <p14:sldId id="262"/>
           </p14:sldIdLst>
         </p14:section>
-        <p14:section name="Extensões" id="{05451c38-275a-2e0d-8fd6-d604b6c050cc}">
+        <p14:section name="Extensões" id="{934e99cc-c43e-ce8a-6e1c-4502139c03e4}">
           <p14:sldIdLst>
             <p14:sldId id="263"/>
             <p14:sldId id="264"/>
             <p14:sldId id="265"/>
           </p14:sldIdLst>
         </p14:section>
-        <p14:section name="Encerramento" id="{68e6fdd1-032a-b665-2c59-bcda49fa4d6a}">
+        <p14:section name="Encerramento" id="{f6738b71-6f23-ee07-2c6b-659499d74393}">
           <p14:sldIdLst>
             <p14:sldId id="266"/>
           </p14:sldIdLst>
@@ -2890,17 +2890,22 @@
         <p:spPr>
           <a:xfrm>
             <a:off x="8001000" y="1600200"/>
-            <a:ext cx="3639312" cy="1874520"/>
+            <a:ext cx="3639312" cy="1508760"/>
           </a:xfrm>
           <a:prstGeom prst="roundRect">
             <a:avLst>
-              <a:gd name="adj" fmla="val 5854"/>
+              <a:gd name="adj" fmla="val 7273"/>
             </a:avLst>
           </a:prstGeom>
           <a:solidFill>
-            <a:srgbClr val="1D2D3E"/>
+            <a:srgbClr val="1F1F1F"/>
           </a:solidFill>
-          <a:ln/>
+          <a:ln w="9525">
+            <a:solidFill>
+              <a:srgbClr val="2B2B2B"/>
+            </a:solidFill>
+            <a:prstDash val="solid"/>
+          </a:ln>
           <a:effectLst>
             <a:outerShdw sx="100000" sy="100000" kx="0" ky="0" algn="bl" rotWithShape="0" blurRad="101600" dist="25400" dir="5400000">
               <a:srgbClr val="223649">
@@ -2919,7 +2924,7 @@
         <p:spPr>
           <a:xfrm>
             <a:off x="8229600" y="1783080"/>
-            <a:ext cx="3182112" cy="1508760"/>
+            <a:ext cx="3182112" cy="1143000"/>
           </a:xfrm>
           <a:prstGeom prst="rect">
             <a:avLst/>
@@ -2937,13 +2942,41 @@
             <a:r>
               <a:rPr lang="en-US" sz="1200" dirty="0">
                 <a:solidFill>
-                  <a:srgbClr val="EAECEE"/>
-                </a:solidFill>
-                <a:latin typeface="Courier New" pitchFamily="34" charset="0"/>
-                <a:ea typeface="Courier New" pitchFamily="34" charset="-122"/>
-                <a:cs typeface="Courier New" pitchFamily="34" charset="-120"/>
-              </a:rPr>
-              <a:t>"ItemEstoque-manage": {</a:t>
+                  <a:srgbClr val="CE9178"/>
+                </a:solidFill>
+                <a:latin typeface="Courier New" pitchFamily="34" charset="0"/>
+                <a:ea typeface="Courier New" pitchFamily="34" charset="-122"/>
+                <a:cs typeface="Courier New" pitchFamily="34" charset="-120"/>
+              </a:rPr>
+              <a:t>"ItemEstoque-manage"</a:t>
+            </a:r>
+            <a:pPr indent="0" marL="0">
+              <a:buNone/>
+            </a:pPr>
+            <a:r>
+              <a:rPr lang="en-US" sz="1200" dirty="0">
+                <a:solidFill>
+                  <a:srgbClr val="CCCCCC"/>
+                </a:solidFill>
+                <a:latin typeface="Courier New" pitchFamily="34" charset="0"/>
+                <a:ea typeface="Courier New" pitchFamily="34" charset="-122"/>
+                <a:cs typeface="Courier New" pitchFamily="34" charset="-120"/>
+              </a:rPr>
+              <a:t>: </a:t>
+            </a:r>
+            <a:pPr indent="0" marL="0">
+              <a:buNone/>
+            </a:pPr>
+            <a:r>
+              <a:rPr lang="en-US" sz="1200" dirty="0">
+                <a:solidFill>
+                  <a:srgbClr val="FFD700"/>
+                </a:solidFill>
+                <a:latin typeface="Courier New" pitchFamily="34" charset="0"/>
+                <a:ea typeface="Courier New" pitchFamily="34" charset="-122"/>
+                <a:cs typeface="Courier New" pitchFamily="34" charset="-120"/>
+              </a:rPr>
+              <a:t>{</a:t>
             </a:r>
             <a:endParaRPr lang="en-US" sz="1200" dirty="0"/>
           </a:p>
@@ -2954,13 +2987,69 @@
             <a:r>
               <a:rPr lang="en-US" sz="1200" dirty="0">
                 <a:solidFill>
-                  <a:srgbClr val="EAECEE"/>
-                </a:solidFill>
-                <a:latin typeface="Courier New" pitchFamily="34" charset="0"/>
-                <a:ea typeface="Courier New" pitchFamily="34" charset="-122"/>
-                <a:cs typeface="Courier New" pitchFamily="34" charset="-120"/>
-              </a:rPr>
-              <a:t>  title: "Gestão de Estoque",</a:t>
+                  <a:srgbClr val="CCCCCC"/>
+                </a:solidFill>
+                <a:latin typeface="Courier New" pitchFamily="34" charset="0"/>
+                <a:ea typeface="Courier New" pitchFamily="34" charset="-122"/>
+                <a:cs typeface="Courier New" pitchFamily="34" charset="-120"/>
+              </a:rPr>
+              <a:t>  </a:t>
+            </a:r>
+            <a:pPr indent="0" marL="0">
+              <a:buNone/>
+            </a:pPr>
+            <a:r>
+              <a:rPr lang="en-US" sz="1200" dirty="0">
+                <a:solidFill>
+                  <a:srgbClr val="9CDCFE"/>
+                </a:solidFill>
+                <a:latin typeface="Courier New" pitchFamily="34" charset="0"/>
+                <a:ea typeface="Courier New" pitchFamily="34" charset="-122"/>
+                <a:cs typeface="Courier New" pitchFamily="34" charset="-120"/>
+              </a:rPr>
+              <a:t>title</a:t>
+            </a:r>
+            <a:pPr indent="0" marL="0">
+              <a:buNone/>
+            </a:pPr>
+            <a:r>
+              <a:rPr lang="en-US" sz="1200" dirty="0">
+                <a:solidFill>
+                  <a:srgbClr val="CCCCCC"/>
+                </a:solidFill>
+                <a:latin typeface="Courier New" pitchFamily="34" charset="0"/>
+                <a:ea typeface="Courier New" pitchFamily="34" charset="-122"/>
+                <a:cs typeface="Courier New" pitchFamily="34" charset="-120"/>
+              </a:rPr>
+              <a:t>: </a:t>
+            </a:r>
+            <a:pPr indent="0" marL="0">
+              <a:buNone/>
+            </a:pPr>
+            <a:r>
+              <a:rPr lang="en-US" sz="1200" dirty="0">
+                <a:solidFill>
+                  <a:srgbClr val="CE9178"/>
+                </a:solidFill>
+                <a:latin typeface="Courier New" pitchFamily="34" charset="0"/>
+                <a:ea typeface="Courier New" pitchFamily="34" charset="-122"/>
+                <a:cs typeface="Courier New" pitchFamily="34" charset="-120"/>
+              </a:rPr>
+              <a:t>"Gestão de Estoque"</a:t>
+            </a:r>
+            <a:pPr indent="0" marL="0">
+              <a:buNone/>
+            </a:pPr>
+            <a:r>
+              <a:rPr lang="en-US" sz="1200" dirty="0">
+                <a:solidFill>
+                  <a:srgbClr val="CCCCCC"/>
+                </a:solidFill>
+                <a:latin typeface="Courier New" pitchFamily="34" charset="0"/>
+                <a:ea typeface="Courier New" pitchFamily="34" charset="-122"/>
+                <a:cs typeface="Courier New" pitchFamily="34" charset="-120"/>
+              </a:rPr>
+              <a:t>,</a:t>
             </a:r>
             <a:endParaRPr lang="en-US" sz="1200" dirty="0"/>
           </a:p>
@@ -2971,13 +3060,69 @@
             <a:r>
               <a:rPr lang="en-US" sz="1200" dirty="0">
                 <a:solidFill>
-                  <a:srgbClr val="EAECEE"/>
-                </a:solidFill>
-                <a:latin typeface="Courier New" pitchFamily="34" charset="0"/>
-                <a:ea typeface="Courier New" pitchFamily="34" charset="-122"/>
-                <a:cs typeface="Courier New" pitchFamily="34" charset="-120"/>
-              </a:rPr>
-              <a:t>  icon: "sap-icon://product",</a:t>
+                  <a:srgbClr val="CCCCCC"/>
+                </a:solidFill>
+                <a:latin typeface="Courier New" pitchFamily="34" charset="0"/>
+                <a:ea typeface="Courier New" pitchFamily="34" charset="-122"/>
+                <a:cs typeface="Courier New" pitchFamily="34" charset="-120"/>
+              </a:rPr>
+              <a:t>  </a:t>
+            </a:r>
+            <a:pPr indent="0" marL="0">
+              <a:buNone/>
+            </a:pPr>
+            <a:r>
+              <a:rPr lang="en-US" sz="1200" dirty="0">
+                <a:solidFill>
+                  <a:srgbClr val="9CDCFE"/>
+                </a:solidFill>
+                <a:latin typeface="Courier New" pitchFamily="34" charset="0"/>
+                <a:ea typeface="Courier New" pitchFamily="34" charset="-122"/>
+                <a:cs typeface="Courier New" pitchFamily="34" charset="-120"/>
+              </a:rPr>
+              <a:t>icon</a:t>
+            </a:r>
+            <a:pPr indent="0" marL="0">
+              <a:buNone/>
+            </a:pPr>
+            <a:r>
+              <a:rPr lang="en-US" sz="1200" dirty="0">
+                <a:solidFill>
+                  <a:srgbClr val="CCCCCC"/>
+                </a:solidFill>
+                <a:latin typeface="Courier New" pitchFamily="34" charset="0"/>
+                <a:ea typeface="Courier New" pitchFamily="34" charset="-122"/>
+                <a:cs typeface="Courier New" pitchFamily="34" charset="-120"/>
+              </a:rPr>
+              <a:t>: </a:t>
+            </a:r>
+            <a:pPr indent="0" marL="0">
+              <a:buNone/>
+            </a:pPr>
+            <a:r>
+              <a:rPr lang="en-US" sz="1200" dirty="0">
+                <a:solidFill>
+                  <a:srgbClr val="CE9178"/>
+                </a:solidFill>
+                <a:latin typeface="Courier New" pitchFamily="34" charset="0"/>
+                <a:ea typeface="Courier New" pitchFamily="34" charset="-122"/>
+                <a:cs typeface="Courier New" pitchFamily="34" charset="-120"/>
+              </a:rPr>
+              <a:t>"sap-icon://product"</a:t>
+            </a:r>
+            <a:pPr indent="0" marL="0">
+              <a:buNone/>
+            </a:pPr>
+            <a:r>
+              <a:rPr lang="en-US" sz="1200" dirty="0">
+                <a:solidFill>
+                  <a:srgbClr val="CCCCCC"/>
+                </a:solidFill>
+                <a:latin typeface="Courier New" pitchFamily="34" charset="0"/>
+                <a:ea typeface="Courier New" pitchFamily="34" charset="-122"/>
+                <a:cs typeface="Courier New" pitchFamily="34" charset="-120"/>
+              </a:rPr>
+              <a:t>,</a:t>
             </a:r>
             <a:endParaRPr lang="en-US" sz="1200" dirty="0"/>
           </a:p>
@@ -2988,13 +3133,69 @@
             <a:r>
               <a:rPr lang="en-US" sz="1200" dirty="0">
                 <a:solidFill>
-                  <a:srgbClr val="EAECEE"/>
-                </a:solidFill>
-                <a:latin typeface="Courier New" pitchFamily="34" charset="0"/>
-                <a:ea typeface="Courier New" pitchFamily="34" charset="-122"/>
-                <a:cs typeface="Courier New" pitchFamily="34" charset="-120"/>
-              </a:rPr>
-              <a:t>  additionalInformation:</a:t>
+                  <a:srgbClr val="CCCCCC"/>
+                </a:solidFill>
+                <a:latin typeface="Courier New" pitchFamily="34" charset="0"/>
+                <a:ea typeface="Courier New" pitchFamily="34" charset="-122"/>
+                <a:cs typeface="Courier New" pitchFamily="34" charset="-120"/>
+              </a:rPr>
+              <a:t>  </a:t>
+            </a:r>
+            <a:pPr indent="0" marL="0">
+              <a:buNone/>
+            </a:pPr>
+            <a:r>
+              <a:rPr lang="en-US" sz="1200" dirty="0">
+                <a:solidFill>
+                  <a:srgbClr val="9CDCFE"/>
+                </a:solidFill>
+                <a:latin typeface="Courier New" pitchFamily="34" charset="0"/>
+                <a:ea typeface="Courier New" pitchFamily="34" charset="-122"/>
+                <a:cs typeface="Courier New" pitchFamily="34" charset="-120"/>
+              </a:rPr>
+              <a:t>applicationType</a:t>
+            </a:r>
+            <a:pPr indent="0" marL="0">
+              <a:buNone/>
+            </a:pPr>
+            <a:r>
+              <a:rPr lang="en-US" sz="1200" dirty="0">
+                <a:solidFill>
+                  <a:srgbClr val="CCCCCC"/>
+                </a:solidFill>
+                <a:latin typeface="Courier New" pitchFamily="34" charset="0"/>
+                <a:ea typeface="Courier New" pitchFamily="34" charset="-122"/>
+                <a:cs typeface="Courier New" pitchFamily="34" charset="-120"/>
+              </a:rPr>
+              <a:t>: </a:t>
+            </a:r>
+            <a:pPr indent="0" marL="0">
+              <a:buNone/>
+            </a:pPr>
+            <a:r>
+              <a:rPr lang="en-US" sz="1200" dirty="0">
+                <a:solidFill>
+                  <a:srgbClr val="CE9178"/>
+                </a:solidFill>
+                <a:latin typeface="Courier New" pitchFamily="34" charset="0"/>
+                <a:ea typeface="Courier New" pitchFamily="34" charset="-122"/>
+                <a:cs typeface="Courier New" pitchFamily="34" charset="-120"/>
+              </a:rPr>
+              <a:t>"URL"</a:t>
+            </a:r>
+            <a:pPr indent="0" marL="0">
+              <a:buNone/>
+            </a:pPr>
+            <a:r>
+              <a:rPr lang="en-US" sz="1200" dirty="0">
+                <a:solidFill>
+                  <a:srgbClr val="CCCCCC"/>
+                </a:solidFill>
+                <a:latin typeface="Courier New" pitchFamily="34" charset="0"/>
+                <a:ea typeface="Courier New" pitchFamily="34" charset="-122"/>
+                <a:cs typeface="Courier New" pitchFamily="34" charset="-120"/>
+              </a:rPr>
+              <a:t>,</a:t>
             </a:r>
             <a:endParaRPr lang="en-US" sz="1200" dirty="0"/>
           </a:p>
@@ -3005,13 +3206,55 @@
             <a:r>
               <a:rPr lang="en-US" sz="1200" dirty="0">
                 <a:solidFill>
-                  <a:srgbClr val="EAECEE"/>
-                </a:solidFill>
-                <a:latin typeface="Courier New" pitchFamily="34" charset="0"/>
-                <a:ea typeface="Courier New" pitchFamily="34" charset="-122"/>
-                <a:cs typeface="Courier New" pitchFamily="34" charset="-120"/>
-              </a:rPr>
-              <a:t>    "SAPUI5.Component=</a:t>
+                  <a:srgbClr val="CCCCCC"/>
+                </a:solidFill>
+                <a:latin typeface="Courier New" pitchFamily="34" charset="0"/>
+                <a:ea typeface="Courier New" pitchFamily="34" charset="-122"/>
+                <a:cs typeface="Courier New" pitchFamily="34" charset="-120"/>
+              </a:rPr>
+              <a:t>  </a:t>
+            </a:r>
+            <a:pPr indent="0" marL="0">
+              <a:buNone/>
+            </a:pPr>
+            <a:r>
+              <a:rPr lang="en-US" sz="1200" dirty="0">
+                <a:solidFill>
+                  <a:srgbClr val="9CDCFE"/>
+                </a:solidFill>
+                <a:latin typeface="Courier New" pitchFamily="34" charset="0"/>
+                <a:ea typeface="Courier New" pitchFamily="34" charset="-122"/>
+                <a:cs typeface="Courier New" pitchFamily="34" charset="-120"/>
+              </a:rPr>
+              <a:t>url</a:t>
+            </a:r>
+            <a:pPr indent="0" marL="0">
+              <a:buNone/>
+            </a:pPr>
+            <a:r>
+              <a:rPr lang="en-US" sz="1200" dirty="0">
+                <a:solidFill>
+                  <a:srgbClr val="CCCCCC"/>
+                </a:solidFill>
+                <a:latin typeface="Courier New" pitchFamily="34" charset="0"/>
+                <a:ea typeface="Courier New" pitchFamily="34" charset="-122"/>
+                <a:cs typeface="Courier New" pitchFamily="34" charset="-120"/>
+              </a:rPr>
+              <a:t>: </a:t>
+            </a:r>
+            <a:pPr indent="0" marL="0">
+              <a:buNone/>
+            </a:pPr>
+            <a:r>
+              <a:rPr lang="en-US" sz="1200" dirty="0">
+                <a:solidFill>
+                  <a:srgbClr val="CE9178"/>
+                </a:solidFill>
+                <a:latin typeface="Courier New" pitchFamily="34" charset="0"/>
+                <a:ea typeface="Courier New" pitchFamily="34" charset="-122"/>
+                <a:cs typeface="Courier New" pitchFamily="34" charset="-120"/>
+              </a:rPr>
+              <a:t>"/gestaoestoque"</a:t>
             </a:r>
             <a:endParaRPr lang="en-US" sz="1200" dirty="0"/>
           </a:p>
@@ -3022,41 +3265,7 @@
             <a:r>
               <a:rPr lang="en-US" sz="1200" dirty="0">
                 <a:solidFill>
-                  <a:srgbClr val="EAECEE"/>
-                </a:solidFill>
-                <a:latin typeface="Courier New" pitchFamily="34" charset="0"/>
-                <a:ea typeface="Courier New" pitchFamily="34" charset="-122"/>
-                <a:cs typeface="Courier New" pitchFamily="34" charset="-120"/>
-              </a:rPr>
-              <a:t>     gestaoestoque",</a:t>
-            </a:r>
-            <a:endParaRPr lang="en-US" sz="1200" dirty="0"/>
-          </a:p>
-          <a:p>
-            <a:pPr indent="0" marL="0">
-              <a:buNone/>
-            </a:pPr>
-            <a:r>
-              <a:rPr lang="en-US" sz="1200" dirty="0">
-                <a:solidFill>
-                  <a:srgbClr val="EAECEE"/>
-                </a:solidFill>
-                <a:latin typeface="Courier New" pitchFamily="34" charset="0"/>
-                <a:ea typeface="Courier New" pitchFamily="34" charset="-122"/>
-                <a:cs typeface="Courier New" pitchFamily="34" charset="-120"/>
-              </a:rPr>
-              <a:t>  url: "/gestaoestoque"</a:t>
-            </a:r>
-            <a:endParaRPr lang="en-US" sz="1200" dirty="0"/>
-          </a:p>
-          <a:p>
-            <a:pPr indent="0" marL="0">
-              <a:buNone/>
-            </a:pPr>
-            <a:r>
-              <a:rPr lang="en-US" sz="1200" dirty="0">
-                <a:solidFill>
-                  <a:srgbClr val="EAECEE"/>
+                  <a:srgbClr val="FFD700"/>
                 </a:solidFill>
                 <a:latin typeface="Courier New" pitchFamily="34" charset="0"/>
                 <a:ea typeface="Courier New" pitchFamily="34" charset="-122"/>
@@ -7883,9 +8092,14 @@
             </a:avLst>
           </a:prstGeom>
           <a:solidFill>
-            <a:srgbClr val="1D2D3E"/>
+            <a:srgbClr val="1F1F1F"/>
           </a:solidFill>
-          <a:ln/>
+          <a:ln w="9525">
+            <a:solidFill>
+              <a:srgbClr val="2B2B2B"/>
+            </a:solidFill>
+            <a:prstDash val="solid"/>
+          </a:ln>
           <a:effectLst>
             <a:outerShdw sx="100000" sy="100000" kx="0" ky="0" algn="bl" rotWithShape="0" blurRad="101600" dist="25400" dir="5400000">
               <a:srgbClr val="223649">
@@ -7922,7 +8136,7 @@
             <a:r>
               <a:rPr lang="en-US" sz="1300" dirty="0">
                 <a:solidFill>
-                  <a:srgbClr val="A9B4BE"/>
+                  <a:srgbClr val="6A9955"/>
                 </a:solidFill>
                 <a:latin typeface="Courier New" pitchFamily="34" charset="0"/>
                 <a:ea typeface="Courier New" pitchFamily="34" charset="-122"/>
@@ -7939,13 +8153,55 @@
             <a:r>
               <a:rPr lang="en-US" sz="1300" dirty="0">
                 <a:solidFill>
-                  <a:srgbClr val="EAECEE"/>
-                </a:solidFill>
-                <a:latin typeface="Courier New" pitchFamily="34" charset="0"/>
-                <a:ea typeface="Courier New" pitchFamily="34" charset="-122"/>
-                <a:cs typeface="Courier New" pitchFamily="34" charset="-120"/>
-              </a:rPr>
-              <a:t>"serviceType": "Local CAP",</a:t>
+                  <a:srgbClr val="9CDCFE"/>
+                </a:solidFill>
+                <a:latin typeface="Courier New" pitchFamily="34" charset="0"/>
+                <a:ea typeface="Courier New" pitchFamily="34" charset="-122"/>
+                <a:cs typeface="Courier New" pitchFamily="34" charset="-120"/>
+              </a:rPr>
+              <a:t>"serviceType"</a:t>
+            </a:r>
+            <a:pPr indent="0" marL="0">
+              <a:buNone/>
+            </a:pPr>
+            <a:r>
+              <a:rPr lang="en-US" sz="1300" dirty="0">
+                <a:solidFill>
+                  <a:srgbClr val="CCCCCC"/>
+                </a:solidFill>
+                <a:latin typeface="Courier New" pitchFamily="34" charset="0"/>
+                <a:ea typeface="Courier New" pitchFamily="34" charset="-122"/>
+                <a:cs typeface="Courier New" pitchFamily="34" charset="-120"/>
+              </a:rPr>
+              <a:t>: </a:t>
+            </a:r>
+            <a:pPr indent="0" marL="0">
+              <a:buNone/>
+            </a:pPr>
+            <a:r>
+              <a:rPr lang="en-US" sz="1300" dirty="0">
+                <a:solidFill>
+                  <a:srgbClr val="CE9178"/>
+                </a:solidFill>
+                <a:latin typeface="Courier New" pitchFamily="34" charset="0"/>
+                <a:ea typeface="Courier New" pitchFamily="34" charset="-122"/>
+                <a:cs typeface="Courier New" pitchFamily="34" charset="-120"/>
+              </a:rPr>
+              <a:t>"Local CAP"</a:t>
+            </a:r>
+            <a:pPr indent="0" marL="0">
+              <a:buNone/>
+            </a:pPr>
+            <a:r>
+              <a:rPr lang="en-US" sz="1300" dirty="0">
+                <a:solidFill>
+                  <a:srgbClr val="CCCCCC"/>
+                </a:solidFill>
+                <a:latin typeface="Courier New" pitchFamily="34" charset="0"/>
+                <a:ea typeface="Courier New" pitchFamily="34" charset="-122"/>
+                <a:cs typeface="Courier New" pitchFamily="34" charset="-120"/>
+              </a:rPr>
+              <a:t>,</a:t>
             </a:r>
             <a:endParaRPr lang="en-US" sz="1300" dirty="0"/>
           </a:p>
@@ -7956,13 +8212,55 @@
             <a:r>
               <a:rPr lang="en-US" sz="1300" dirty="0">
                 <a:solidFill>
-                  <a:srgbClr val="EAECEE"/>
-                </a:solidFill>
-                <a:latin typeface="Courier New" pitchFamily="34" charset="0"/>
-                <a:ea typeface="Courier New" pitchFamily="34" charset="-122"/>
-                <a:cs typeface="Courier New" pitchFamily="34" charset="-120"/>
-              </a:rPr>
-              <a:t>"serviceUrl": ".../odata/v4/estoque/",</a:t>
+                  <a:srgbClr val="9CDCFE"/>
+                </a:solidFill>
+                <a:latin typeface="Courier New" pitchFamily="34" charset="0"/>
+                <a:ea typeface="Courier New" pitchFamily="34" charset="-122"/>
+                <a:cs typeface="Courier New" pitchFamily="34" charset="-120"/>
+              </a:rPr>
+              <a:t>"serviceUrl"</a:t>
+            </a:r>
+            <a:pPr indent="0" marL="0">
+              <a:buNone/>
+            </a:pPr>
+            <a:r>
+              <a:rPr lang="en-US" sz="1300" dirty="0">
+                <a:solidFill>
+                  <a:srgbClr val="CCCCCC"/>
+                </a:solidFill>
+                <a:latin typeface="Courier New" pitchFamily="34" charset="0"/>
+                <a:ea typeface="Courier New" pitchFamily="34" charset="-122"/>
+                <a:cs typeface="Courier New" pitchFamily="34" charset="-120"/>
+              </a:rPr>
+              <a:t>: </a:t>
+            </a:r>
+            <a:pPr indent="0" marL="0">
+              <a:buNone/>
+            </a:pPr>
+            <a:r>
+              <a:rPr lang="en-US" sz="1300" dirty="0">
+                <a:solidFill>
+                  <a:srgbClr val="CE9178"/>
+                </a:solidFill>
+                <a:latin typeface="Courier New" pitchFamily="34" charset="0"/>
+                <a:ea typeface="Courier New" pitchFamily="34" charset="-122"/>
+                <a:cs typeface="Courier New" pitchFamily="34" charset="-120"/>
+              </a:rPr>
+              <a:t>".../odata/v4/estoque/"</a:t>
+            </a:r>
+            <a:pPr indent="0" marL="0">
+              <a:buNone/>
+            </a:pPr>
+            <a:r>
+              <a:rPr lang="en-US" sz="1300" dirty="0">
+                <a:solidFill>
+                  <a:srgbClr val="CCCCCC"/>
+                </a:solidFill>
+                <a:latin typeface="Courier New" pitchFamily="34" charset="0"/>
+                <a:ea typeface="Courier New" pitchFamily="34" charset="-122"/>
+                <a:cs typeface="Courier New" pitchFamily="34" charset="-120"/>
+              </a:rPr>
+              <a:t>,</a:t>
             </a:r>
             <a:endParaRPr lang="en-US" sz="1300" dirty="0"/>
           </a:p>
@@ -7973,13 +8271,55 @@
             <a:r>
               <a:rPr lang="en-US" sz="1300" dirty="0">
                 <a:solidFill>
-                  <a:srgbClr val="EAECEE"/>
-                </a:solidFill>
-                <a:latin typeface="Courier New" pitchFamily="34" charset="0"/>
-                <a:ea typeface="Courier New" pitchFamily="34" charset="-122"/>
-                <a:cs typeface="Courier New" pitchFamily="34" charset="-120"/>
-              </a:rPr>
-              <a:t>"template": "List Report Page V4",</a:t>
+                  <a:srgbClr val="9CDCFE"/>
+                </a:solidFill>
+                <a:latin typeface="Courier New" pitchFamily="34" charset="0"/>
+                <a:ea typeface="Courier New" pitchFamily="34" charset="-122"/>
+                <a:cs typeface="Courier New" pitchFamily="34" charset="-120"/>
+              </a:rPr>
+              <a:t>"template"</a:t>
+            </a:r>
+            <a:pPr indent="0" marL="0">
+              <a:buNone/>
+            </a:pPr>
+            <a:r>
+              <a:rPr lang="en-US" sz="1300" dirty="0">
+                <a:solidFill>
+                  <a:srgbClr val="CCCCCC"/>
+                </a:solidFill>
+                <a:latin typeface="Courier New" pitchFamily="34" charset="0"/>
+                <a:ea typeface="Courier New" pitchFamily="34" charset="-122"/>
+                <a:cs typeface="Courier New" pitchFamily="34" charset="-120"/>
+              </a:rPr>
+              <a:t>: </a:t>
+            </a:r>
+            <a:pPr indent="0" marL="0">
+              <a:buNone/>
+            </a:pPr>
+            <a:r>
+              <a:rPr lang="en-US" sz="1300" dirty="0">
+                <a:solidFill>
+                  <a:srgbClr val="CE9178"/>
+                </a:solidFill>
+                <a:latin typeface="Courier New" pitchFamily="34" charset="0"/>
+                <a:ea typeface="Courier New" pitchFamily="34" charset="-122"/>
+                <a:cs typeface="Courier New" pitchFamily="34" charset="-120"/>
+              </a:rPr>
+              <a:t>"List Report Page V4"</a:t>
+            </a:r>
+            <a:pPr indent="0" marL="0">
+              <a:buNone/>
+            </a:pPr>
+            <a:r>
+              <a:rPr lang="en-US" sz="1300" dirty="0">
+                <a:solidFill>
+                  <a:srgbClr val="CCCCCC"/>
+                </a:solidFill>
+                <a:latin typeface="Courier New" pitchFamily="34" charset="0"/>
+                <a:ea typeface="Courier New" pitchFamily="34" charset="-122"/>
+                <a:cs typeface="Courier New" pitchFamily="34" charset="-120"/>
+              </a:rPr>
+              <a:t>,</a:t>
             </a:r>
             <a:endParaRPr lang="en-US" sz="1300" dirty="0"/>
           </a:p>
@@ -7990,13 +8330,55 @@
             <a:r>
               <a:rPr lang="en-US" sz="1300" dirty="0">
                 <a:solidFill>
-                  <a:srgbClr val="EAECEE"/>
-                </a:solidFill>
-                <a:latin typeface="Courier New" pitchFamily="34" charset="0"/>
-                <a:ea typeface="Courier New" pitchFamily="34" charset="-122"/>
-                <a:cs typeface="Courier New" pitchFamily="34" charset="-120"/>
-              </a:rPr>
-              <a:t>"ui5Theme": "sap_horizon",</a:t>
+                  <a:srgbClr val="9CDCFE"/>
+                </a:solidFill>
+                <a:latin typeface="Courier New" pitchFamily="34" charset="0"/>
+                <a:ea typeface="Courier New" pitchFamily="34" charset="-122"/>
+                <a:cs typeface="Courier New" pitchFamily="34" charset="-120"/>
+              </a:rPr>
+              <a:t>"ui5Theme"</a:t>
+            </a:r>
+            <a:pPr indent="0" marL="0">
+              <a:buNone/>
+            </a:pPr>
+            <a:r>
+              <a:rPr lang="en-US" sz="1300" dirty="0">
+                <a:solidFill>
+                  <a:srgbClr val="CCCCCC"/>
+                </a:solidFill>
+                <a:latin typeface="Courier New" pitchFamily="34" charset="0"/>
+                <a:ea typeface="Courier New" pitchFamily="34" charset="-122"/>
+                <a:cs typeface="Courier New" pitchFamily="34" charset="-120"/>
+              </a:rPr>
+              <a:t>: </a:t>
+            </a:r>
+            <a:pPr indent="0" marL="0">
+              <a:buNone/>
+            </a:pPr>
+            <a:r>
+              <a:rPr lang="en-US" sz="1300" dirty="0">
+                <a:solidFill>
+                  <a:srgbClr val="CE9178"/>
+                </a:solidFill>
+                <a:latin typeface="Courier New" pitchFamily="34" charset="0"/>
+                <a:ea typeface="Courier New" pitchFamily="34" charset="-122"/>
+                <a:cs typeface="Courier New" pitchFamily="34" charset="-120"/>
+              </a:rPr>
+              <a:t>"sap_horizon"</a:t>
+            </a:r>
+            <a:pPr indent="0" marL="0">
+              <a:buNone/>
+            </a:pPr>
+            <a:r>
+              <a:rPr lang="en-US" sz="1300" dirty="0">
+                <a:solidFill>
+                  <a:srgbClr val="CCCCCC"/>
+                </a:solidFill>
+                <a:latin typeface="Courier New" pitchFamily="34" charset="0"/>
+                <a:ea typeface="Courier New" pitchFamily="34" charset="-122"/>
+                <a:cs typeface="Courier New" pitchFamily="34" charset="-120"/>
+              </a:rPr>
+              <a:t>,</a:t>
             </a:r>
             <a:endParaRPr lang="en-US" sz="1300" dirty="0"/>
           </a:p>
@@ -8007,13 +8389,55 @@
             <a:r>
               <a:rPr lang="en-US" sz="1300" dirty="0">
                 <a:solidFill>
-                  <a:srgbClr val="EAECEE"/>
-                </a:solidFill>
-                <a:latin typeface="Courier New" pitchFamily="34" charset="0"/>
-                <a:ea typeface="Courier New" pitchFamily="34" charset="-122"/>
-                <a:cs typeface="Courier New" pitchFamily="34" charset="-120"/>
-              </a:rPr>
-              <a:t>"ui5Version": "1.148.12",</a:t>
+                  <a:srgbClr val="9CDCFE"/>
+                </a:solidFill>
+                <a:latin typeface="Courier New" pitchFamily="34" charset="0"/>
+                <a:ea typeface="Courier New" pitchFamily="34" charset="-122"/>
+                <a:cs typeface="Courier New" pitchFamily="34" charset="-120"/>
+              </a:rPr>
+              <a:t>"ui5Version"</a:t>
+            </a:r>
+            <a:pPr indent="0" marL="0">
+              <a:buNone/>
+            </a:pPr>
+            <a:r>
+              <a:rPr lang="en-US" sz="1300" dirty="0">
+                <a:solidFill>
+                  <a:srgbClr val="CCCCCC"/>
+                </a:solidFill>
+                <a:latin typeface="Courier New" pitchFamily="34" charset="0"/>
+                <a:ea typeface="Courier New" pitchFamily="34" charset="-122"/>
+                <a:cs typeface="Courier New" pitchFamily="34" charset="-120"/>
+              </a:rPr>
+              <a:t>: </a:t>
+            </a:r>
+            <a:pPr indent="0" marL="0">
+              <a:buNone/>
+            </a:pPr>
+            <a:r>
+              <a:rPr lang="en-US" sz="1300" dirty="0">
+                <a:solidFill>
+                  <a:srgbClr val="CE9178"/>
+                </a:solidFill>
+                <a:latin typeface="Courier New" pitchFamily="34" charset="0"/>
+                <a:ea typeface="Courier New" pitchFamily="34" charset="-122"/>
+                <a:cs typeface="Courier New" pitchFamily="34" charset="-120"/>
+              </a:rPr>
+              <a:t>"1.148.12"</a:t>
+            </a:r>
+            <a:pPr indent="0" marL="0">
+              <a:buNone/>
+            </a:pPr>
+            <a:r>
+              <a:rPr lang="en-US" sz="1300" dirty="0">
+                <a:solidFill>
+                  <a:srgbClr val="CCCCCC"/>
+                </a:solidFill>
+                <a:latin typeface="Courier New" pitchFamily="34" charset="0"/>
+                <a:ea typeface="Courier New" pitchFamily="34" charset="-122"/>
+                <a:cs typeface="Courier New" pitchFamily="34" charset="-120"/>
+              </a:rPr>
+              <a:t>,</a:t>
             </a:r>
             <a:endParaRPr lang="en-US" sz="1300" dirty="0"/>
           </a:p>
@@ -8024,13 +8448,153 @@
             <a:r>
               <a:rPr lang="en-US" sz="1300" dirty="0">
                 <a:solidFill>
-                  <a:srgbClr val="EAECEE"/>
-                </a:solidFill>
-                <a:latin typeface="Courier New" pitchFamily="34" charset="0"/>
-                <a:ea typeface="Courier New" pitchFamily="34" charset="-122"/>
-                <a:cs typeface="Courier New" pitchFamily="34" charset="-120"/>
-              </a:rPr>
-              <a:t>"entityRelatedConfig": [{ "value": "Itens" }]</a:t>
+                  <a:srgbClr val="9CDCFE"/>
+                </a:solidFill>
+                <a:latin typeface="Courier New" pitchFamily="34" charset="0"/>
+                <a:ea typeface="Courier New" pitchFamily="34" charset="-122"/>
+                <a:cs typeface="Courier New" pitchFamily="34" charset="-120"/>
+              </a:rPr>
+              <a:t>"entityRelatedConfig"</a:t>
+            </a:r>
+            <a:pPr indent="0" marL="0">
+              <a:buNone/>
+            </a:pPr>
+            <a:r>
+              <a:rPr lang="en-US" sz="1300" dirty="0">
+                <a:solidFill>
+                  <a:srgbClr val="CCCCCC"/>
+                </a:solidFill>
+                <a:latin typeface="Courier New" pitchFamily="34" charset="0"/>
+                <a:ea typeface="Courier New" pitchFamily="34" charset="-122"/>
+                <a:cs typeface="Courier New" pitchFamily="34" charset="-120"/>
+              </a:rPr>
+              <a:t>: </a:t>
+            </a:r>
+            <a:pPr indent="0" marL="0">
+              <a:buNone/>
+            </a:pPr>
+            <a:r>
+              <a:rPr lang="en-US" sz="1300" dirty="0">
+                <a:solidFill>
+                  <a:srgbClr val="FFD700"/>
+                </a:solidFill>
+                <a:latin typeface="Courier New" pitchFamily="34" charset="0"/>
+                <a:ea typeface="Courier New" pitchFamily="34" charset="-122"/>
+                <a:cs typeface="Courier New" pitchFamily="34" charset="-120"/>
+              </a:rPr>
+              <a:t>[</a:t>
+            </a:r>
+            <a:pPr indent="0" marL="0">
+              <a:buNone/>
+            </a:pPr>
+            <a:r>
+              <a:rPr lang="en-US" sz="1300" dirty="0">
+                <a:solidFill>
+                  <a:srgbClr val="DA70D6"/>
+                </a:solidFill>
+                <a:latin typeface="Courier New" pitchFamily="34" charset="0"/>
+                <a:ea typeface="Courier New" pitchFamily="34" charset="-122"/>
+                <a:cs typeface="Courier New" pitchFamily="34" charset="-120"/>
+              </a:rPr>
+              <a:t>{</a:t>
+            </a:r>
+            <a:pPr indent="0" marL="0">
+              <a:buNone/>
+            </a:pPr>
+            <a:r>
+              <a:rPr lang="en-US" sz="1300" dirty="0">
+                <a:solidFill>
+                  <a:srgbClr val="CCCCCC"/>
+                </a:solidFill>
+                <a:latin typeface="Courier New" pitchFamily="34" charset="0"/>
+                <a:ea typeface="Courier New" pitchFamily="34" charset="-122"/>
+                <a:cs typeface="Courier New" pitchFamily="34" charset="-120"/>
+              </a:rPr>
+              <a:t> </a:t>
+            </a:r>
+            <a:pPr indent="0" marL="0">
+              <a:buNone/>
+            </a:pPr>
+            <a:r>
+              <a:rPr lang="en-US" sz="1300" dirty="0">
+                <a:solidFill>
+                  <a:srgbClr val="9CDCFE"/>
+                </a:solidFill>
+                <a:latin typeface="Courier New" pitchFamily="34" charset="0"/>
+                <a:ea typeface="Courier New" pitchFamily="34" charset="-122"/>
+                <a:cs typeface="Courier New" pitchFamily="34" charset="-120"/>
+              </a:rPr>
+              <a:t>"value"</a:t>
+            </a:r>
+            <a:pPr indent="0" marL="0">
+              <a:buNone/>
+            </a:pPr>
+            <a:r>
+              <a:rPr lang="en-US" sz="1300" dirty="0">
+                <a:solidFill>
+                  <a:srgbClr val="CCCCCC"/>
+                </a:solidFill>
+                <a:latin typeface="Courier New" pitchFamily="34" charset="0"/>
+                <a:ea typeface="Courier New" pitchFamily="34" charset="-122"/>
+                <a:cs typeface="Courier New" pitchFamily="34" charset="-120"/>
+              </a:rPr>
+              <a:t>: </a:t>
+            </a:r>
+            <a:pPr indent="0" marL="0">
+              <a:buNone/>
+            </a:pPr>
+            <a:r>
+              <a:rPr lang="en-US" sz="1300" dirty="0">
+                <a:solidFill>
+                  <a:srgbClr val="CE9178"/>
+                </a:solidFill>
+                <a:latin typeface="Courier New" pitchFamily="34" charset="0"/>
+                <a:ea typeface="Courier New" pitchFamily="34" charset="-122"/>
+                <a:cs typeface="Courier New" pitchFamily="34" charset="-120"/>
+              </a:rPr>
+              <a:t>"Itens"</a:t>
+            </a:r>
+            <a:pPr indent="0" marL="0">
+              <a:buNone/>
+            </a:pPr>
+            <a:r>
+              <a:rPr lang="en-US" sz="1300" dirty="0">
+                <a:solidFill>
+                  <a:srgbClr val="CCCCCC"/>
+                </a:solidFill>
+                <a:latin typeface="Courier New" pitchFamily="34" charset="0"/>
+                <a:ea typeface="Courier New" pitchFamily="34" charset="-122"/>
+                <a:cs typeface="Courier New" pitchFamily="34" charset="-120"/>
+              </a:rPr>
+              <a:t> </a:t>
+            </a:r>
+            <a:pPr indent="0" marL="0">
+              <a:buNone/>
+            </a:pPr>
+            <a:r>
+              <a:rPr lang="en-US" sz="1300" dirty="0">
+                <a:solidFill>
+                  <a:srgbClr val="DA70D6"/>
+                </a:solidFill>
+                <a:latin typeface="Courier New" pitchFamily="34" charset="0"/>
+                <a:ea typeface="Courier New" pitchFamily="34" charset="-122"/>
+                <a:cs typeface="Courier New" pitchFamily="34" charset="-120"/>
+              </a:rPr>
+              <a:t>}</a:t>
+            </a:r>
+            <a:pPr indent="0" marL="0">
+              <a:buNone/>
+            </a:pPr>
+            <a:r>
+              <a:rPr lang="en-US" sz="1300" dirty="0">
+                <a:solidFill>
+                  <a:srgbClr val="FFD700"/>
+                </a:solidFill>
+                <a:latin typeface="Courier New" pitchFamily="34" charset="0"/>
+                <a:ea typeface="Courier New" pitchFamily="34" charset="-122"/>
+                <a:cs typeface="Courier New" pitchFamily="34" charset="-120"/>
+              </a:rPr>
+              <a:t>]</a:t>
             </a:r>
             <a:endParaRPr lang="en-US" sz="1300" dirty="0"/>
           </a:p>
@@ -8053,9 +8617,14 @@
             </a:avLst>
           </a:prstGeom>
           <a:solidFill>
-            <a:srgbClr val="1D2D3E"/>
+            <a:srgbClr val="1F1F1F"/>
           </a:solidFill>
-          <a:ln/>
+          <a:ln w="9525">
+            <a:solidFill>
+              <a:srgbClr val="2B2B2B"/>
+            </a:solidFill>
+            <a:prstDash val="solid"/>
+          </a:ln>
           <a:effectLst>
             <a:outerShdw sx="100000" sy="100000" kx="0" ky="0" algn="bl" rotWithShape="0" blurRad="101600" dist="25400" dir="5400000">
               <a:srgbClr val="223649">
@@ -8092,7 +8661,7 @@
             <a:r>
               <a:rPr lang="en-US" sz="1300" dirty="0">
                 <a:solidFill>
-                  <a:srgbClr val="A9B4BE"/>
+                  <a:srgbClr val="6A9955"/>
                 </a:solidFill>
                 <a:latin typeface="Courier New" pitchFamily="34" charset="0"/>
                 <a:ea typeface="Courier New" pitchFamily="34" charset="-122"/>
@@ -8109,13 +8678,83 @@
             <a:r>
               <a:rPr lang="en-US" sz="1300" dirty="0">
                 <a:solidFill>
-                  <a:srgbClr val="EAECEE"/>
-                </a:solidFill>
-                <a:latin typeface="Courier New" pitchFamily="34" charset="0"/>
-                <a:ea typeface="Courier New" pitchFamily="34" charset="-122"/>
-                <a:cs typeface="Courier New" pitchFamily="34" charset="-120"/>
-              </a:rPr>
-              <a:t>using from './common';</a:t>
+                  <a:srgbClr val="C586C0"/>
+                </a:solidFill>
+                <a:latin typeface="Courier New" pitchFamily="34" charset="0"/>
+                <a:ea typeface="Courier New" pitchFamily="34" charset="-122"/>
+                <a:cs typeface="Courier New" pitchFamily="34" charset="-120"/>
+              </a:rPr>
+              <a:t>using</a:t>
+            </a:r>
+            <a:pPr indent="0" marL="0">
+              <a:buNone/>
+            </a:pPr>
+            <a:r>
+              <a:rPr lang="en-US" sz="1300" dirty="0">
+                <a:solidFill>
+                  <a:srgbClr val="CCCCCC"/>
+                </a:solidFill>
+                <a:latin typeface="Courier New" pitchFamily="34" charset="0"/>
+                <a:ea typeface="Courier New" pitchFamily="34" charset="-122"/>
+                <a:cs typeface="Courier New" pitchFamily="34" charset="-120"/>
+              </a:rPr>
+              <a:t> </a:t>
+            </a:r>
+            <a:pPr indent="0" marL="0">
+              <a:buNone/>
+            </a:pPr>
+            <a:r>
+              <a:rPr lang="en-US" sz="1300" dirty="0">
+                <a:solidFill>
+                  <a:srgbClr val="C586C0"/>
+                </a:solidFill>
+                <a:latin typeface="Courier New" pitchFamily="34" charset="0"/>
+                <a:ea typeface="Courier New" pitchFamily="34" charset="-122"/>
+                <a:cs typeface="Courier New" pitchFamily="34" charset="-120"/>
+              </a:rPr>
+              <a:t>from</a:t>
+            </a:r>
+            <a:pPr indent="0" marL="0">
+              <a:buNone/>
+            </a:pPr>
+            <a:r>
+              <a:rPr lang="en-US" sz="1300" dirty="0">
+                <a:solidFill>
+                  <a:srgbClr val="CCCCCC"/>
+                </a:solidFill>
+                <a:latin typeface="Courier New" pitchFamily="34" charset="0"/>
+                <a:ea typeface="Courier New" pitchFamily="34" charset="-122"/>
+                <a:cs typeface="Courier New" pitchFamily="34" charset="-120"/>
+              </a:rPr>
+              <a:t> </a:t>
+            </a:r>
+            <a:pPr indent="0" marL="0">
+              <a:buNone/>
+            </a:pPr>
+            <a:r>
+              <a:rPr lang="en-US" sz="1300" dirty="0">
+                <a:solidFill>
+                  <a:srgbClr val="CE9178"/>
+                </a:solidFill>
+                <a:latin typeface="Courier New" pitchFamily="34" charset="0"/>
+                <a:ea typeface="Courier New" pitchFamily="34" charset="-122"/>
+                <a:cs typeface="Courier New" pitchFamily="34" charset="-120"/>
+              </a:rPr>
+              <a:t>'./common'</a:t>
+            </a:r>
+            <a:pPr indent="0" marL="0">
+              <a:buNone/>
+            </a:pPr>
+            <a:r>
+              <a:rPr lang="en-US" sz="1300" dirty="0">
+                <a:solidFill>
+                  <a:srgbClr val="CCCCCC"/>
+                </a:solidFill>
+                <a:latin typeface="Courier New" pitchFamily="34" charset="0"/>
+                <a:ea typeface="Courier New" pitchFamily="34" charset="-122"/>
+                <a:cs typeface="Courier New" pitchFamily="34" charset="-120"/>
+              </a:rPr>
+              <a:t>;</a:t>
             </a:r>
             <a:endParaRPr lang="en-US" sz="1300" dirty="0"/>
           </a:p>
@@ -8126,13 +8765,83 @@
             <a:r>
               <a:rPr lang="en-US" sz="1300" dirty="0">
                 <a:solidFill>
-                  <a:srgbClr val="EAECEE"/>
-                </a:solidFill>
-                <a:latin typeface="Courier New" pitchFamily="34" charset="0"/>
-                <a:ea typeface="Courier New" pitchFamily="34" charset="-122"/>
-                <a:cs typeface="Courier New" pitchFamily="34" charset="-120"/>
-              </a:rPr>
-              <a:t>using from './gestao-clientes/annotations';</a:t>
+                  <a:srgbClr val="C586C0"/>
+                </a:solidFill>
+                <a:latin typeface="Courier New" pitchFamily="34" charset="0"/>
+                <a:ea typeface="Courier New" pitchFamily="34" charset="-122"/>
+                <a:cs typeface="Courier New" pitchFamily="34" charset="-120"/>
+              </a:rPr>
+              <a:t>using</a:t>
+            </a:r>
+            <a:pPr indent="0" marL="0">
+              <a:buNone/>
+            </a:pPr>
+            <a:r>
+              <a:rPr lang="en-US" sz="1300" dirty="0">
+                <a:solidFill>
+                  <a:srgbClr val="CCCCCC"/>
+                </a:solidFill>
+                <a:latin typeface="Courier New" pitchFamily="34" charset="0"/>
+                <a:ea typeface="Courier New" pitchFamily="34" charset="-122"/>
+                <a:cs typeface="Courier New" pitchFamily="34" charset="-120"/>
+              </a:rPr>
+              <a:t> </a:t>
+            </a:r>
+            <a:pPr indent="0" marL="0">
+              <a:buNone/>
+            </a:pPr>
+            <a:r>
+              <a:rPr lang="en-US" sz="1300" dirty="0">
+                <a:solidFill>
+                  <a:srgbClr val="C586C0"/>
+                </a:solidFill>
+                <a:latin typeface="Courier New" pitchFamily="34" charset="0"/>
+                <a:ea typeface="Courier New" pitchFamily="34" charset="-122"/>
+                <a:cs typeface="Courier New" pitchFamily="34" charset="-120"/>
+              </a:rPr>
+              <a:t>from</a:t>
+            </a:r>
+            <a:pPr indent="0" marL="0">
+              <a:buNone/>
+            </a:pPr>
+            <a:r>
+              <a:rPr lang="en-US" sz="1300" dirty="0">
+                <a:solidFill>
+                  <a:srgbClr val="CCCCCC"/>
+                </a:solidFill>
+                <a:latin typeface="Courier New" pitchFamily="34" charset="0"/>
+                <a:ea typeface="Courier New" pitchFamily="34" charset="-122"/>
+                <a:cs typeface="Courier New" pitchFamily="34" charset="-120"/>
+              </a:rPr>
+              <a:t> </a:t>
+            </a:r>
+            <a:pPr indent="0" marL="0">
+              <a:buNone/>
+            </a:pPr>
+            <a:r>
+              <a:rPr lang="en-US" sz="1300" dirty="0">
+                <a:solidFill>
+                  <a:srgbClr val="CE9178"/>
+                </a:solidFill>
+                <a:latin typeface="Courier New" pitchFamily="34" charset="0"/>
+                <a:ea typeface="Courier New" pitchFamily="34" charset="-122"/>
+                <a:cs typeface="Courier New" pitchFamily="34" charset="-120"/>
+              </a:rPr>
+              <a:t>'./gestao-clientes/annotations'</a:t>
+            </a:r>
+            <a:pPr indent="0" marL="0">
+              <a:buNone/>
+            </a:pPr>
+            <a:r>
+              <a:rPr lang="en-US" sz="1300" dirty="0">
+                <a:solidFill>
+                  <a:srgbClr val="CCCCCC"/>
+                </a:solidFill>
+                <a:latin typeface="Courier New" pitchFamily="34" charset="0"/>
+                <a:ea typeface="Courier New" pitchFamily="34" charset="-122"/>
+                <a:cs typeface="Courier New" pitchFamily="34" charset="-120"/>
+              </a:rPr>
+              <a:t>;</a:t>
             </a:r>
             <a:endParaRPr lang="en-US" sz="1300" dirty="0"/>
           </a:p>
@@ -8143,13 +8852,83 @@
             <a:r>
               <a:rPr lang="en-US" sz="1300" dirty="0">
                 <a:solidFill>
-                  <a:srgbClr val="EAECEE"/>
-                </a:solidFill>
-                <a:latin typeface="Courier New" pitchFamily="34" charset="0"/>
-                <a:ea typeface="Courier New" pitchFamily="34" charset="-122"/>
-                <a:cs typeface="Courier New" pitchFamily="34" charset="-120"/>
-              </a:rPr>
-              <a:t>using from './gestao-estoque/annotations';</a:t>
+                  <a:srgbClr val="C586C0"/>
+                </a:solidFill>
+                <a:latin typeface="Courier New" pitchFamily="34" charset="0"/>
+                <a:ea typeface="Courier New" pitchFamily="34" charset="-122"/>
+                <a:cs typeface="Courier New" pitchFamily="34" charset="-120"/>
+              </a:rPr>
+              <a:t>using</a:t>
+            </a:r>
+            <a:pPr indent="0" marL="0">
+              <a:buNone/>
+            </a:pPr>
+            <a:r>
+              <a:rPr lang="en-US" sz="1300" dirty="0">
+                <a:solidFill>
+                  <a:srgbClr val="CCCCCC"/>
+                </a:solidFill>
+                <a:latin typeface="Courier New" pitchFamily="34" charset="0"/>
+                <a:ea typeface="Courier New" pitchFamily="34" charset="-122"/>
+                <a:cs typeface="Courier New" pitchFamily="34" charset="-120"/>
+              </a:rPr>
+              <a:t> </a:t>
+            </a:r>
+            <a:pPr indent="0" marL="0">
+              <a:buNone/>
+            </a:pPr>
+            <a:r>
+              <a:rPr lang="en-US" sz="1300" dirty="0">
+                <a:solidFill>
+                  <a:srgbClr val="C586C0"/>
+                </a:solidFill>
+                <a:latin typeface="Courier New" pitchFamily="34" charset="0"/>
+                <a:ea typeface="Courier New" pitchFamily="34" charset="-122"/>
+                <a:cs typeface="Courier New" pitchFamily="34" charset="-120"/>
+              </a:rPr>
+              <a:t>from</a:t>
+            </a:r>
+            <a:pPr indent="0" marL="0">
+              <a:buNone/>
+            </a:pPr>
+            <a:r>
+              <a:rPr lang="en-US" sz="1300" dirty="0">
+                <a:solidFill>
+                  <a:srgbClr val="CCCCCC"/>
+                </a:solidFill>
+                <a:latin typeface="Courier New" pitchFamily="34" charset="0"/>
+                <a:ea typeface="Courier New" pitchFamily="34" charset="-122"/>
+                <a:cs typeface="Courier New" pitchFamily="34" charset="-120"/>
+              </a:rPr>
+              <a:t> </a:t>
+            </a:r>
+            <a:pPr indent="0" marL="0">
+              <a:buNone/>
+            </a:pPr>
+            <a:r>
+              <a:rPr lang="en-US" sz="1300" dirty="0">
+                <a:solidFill>
+                  <a:srgbClr val="CE9178"/>
+                </a:solidFill>
+                <a:latin typeface="Courier New" pitchFamily="34" charset="0"/>
+                <a:ea typeface="Courier New" pitchFamily="34" charset="-122"/>
+                <a:cs typeface="Courier New" pitchFamily="34" charset="-120"/>
+              </a:rPr>
+              <a:t>'./gestao-estoque/annotations'</a:t>
+            </a:r>
+            <a:pPr indent="0" marL="0">
+              <a:buNone/>
+            </a:pPr>
+            <a:r>
+              <a:rPr lang="en-US" sz="1300" dirty="0">
+                <a:solidFill>
+                  <a:srgbClr val="CCCCCC"/>
+                </a:solidFill>
+                <a:latin typeface="Courier New" pitchFamily="34" charset="0"/>
+                <a:ea typeface="Courier New" pitchFamily="34" charset="-122"/>
+                <a:cs typeface="Courier New" pitchFamily="34" charset="-120"/>
+              </a:rPr>
+              <a:t>;</a:t>
             </a:r>
             <a:endParaRPr lang="en-US" sz="1300" dirty="0"/>
           </a:p>
@@ -8160,13 +8939,83 @@
             <a:r>
               <a:rPr lang="en-US" sz="1300" dirty="0">
                 <a:solidFill>
-                  <a:srgbClr val="EAECEE"/>
-                </a:solidFill>
-                <a:latin typeface="Courier New" pitchFamily="34" charset="0"/>
-                <a:ea typeface="Courier New" pitchFamily="34" charset="-122"/>
-                <a:cs typeface="Courier New" pitchFamily="34" charset="-120"/>
-              </a:rPr>
-              <a:t>using from './pedidos-compras/annotations';</a:t>
+                  <a:srgbClr val="C586C0"/>
+                </a:solidFill>
+                <a:latin typeface="Courier New" pitchFamily="34" charset="0"/>
+                <a:ea typeface="Courier New" pitchFamily="34" charset="-122"/>
+                <a:cs typeface="Courier New" pitchFamily="34" charset="-120"/>
+              </a:rPr>
+              <a:t>using</a:t>
+            </a:r>
+            <a:pPr indent="0" marL="0">
+              <a:buNone/>
+            </a:pPr>
+            <a:r>
+              <a:rPr lang="en-US" sz="1300" dirty="0">
+                <a:solidFill>
+                  <a:srgbClr val="CCCCCC"/>
+                </a:solidFill>
+                <a:latin typeface="Courier New" pitchFamily="34" charset="0"/>
+                <a:ea typeface="Courier New" pitchFamily="34" charset="-122"/>
+                <a:cs typeface="Courier New" pitchFamily="34" charset="-120"/>
+              </a:rPr>
+              <a:t> </a:t>
+            </a:r>
+            <a:pPr indent="0" marL="0">
+              <a:buNone/>
+            </a:pPr>
+            <a:r>
+              <a:rPr lang="en-US" sz="1300" dirty="0">
+                <a:solidFill>
+                  <a:srgbClr val="C586C0"/>
+                </a:solidFill>
+                <a:latin typeface="Courier New" pitchFamily="34" charset="0"/>
+                <a:ea typeface="Courier New" pitchFamily="34" charset="-122"/>
+                <a:cs typeface="Courier New" pitchFamily="34" charset="-120"/>
+              </a:rPr>
+              <a:t>from</a:t>
+            </a:r>
+            <a:pPr indent="0" marL="0">
+              <a:buNone/>
+            </a:pPr>
+            <a:r>
+              <a:rPr lang="en-US" sz="1300" dirty="0">
+                <a:solidFill>
+                  <a:srgbClr val="CCCCCC"/>
+                </a:solidFill>
+                <a:latin typeface="Courier New" pitchFamily="34" charset="0"/>
+                <a:ea typeface="Courier New" pitchFamily="34" charset="-122"/>
+                <a:cs typeface="Courier New" pitchFamily="34" charset="-120"/>
+              </a:rPr>
+              <a:t> </a:t>
+            </a:r>
+            <a:pPr indent="0" marL="0">
+              <a:buNone/>
+            </a:pPr>
+            <a:r>
+              <a:rPr lang="en-US" sz="1300" dirty="0">
+                <a:solidFill>
+                  <a:srgbClr val="CE9178"/>
+                </a:solidFill>
+                <a:latin typeface="Courier New" pitchFamily="34" charset="0"/>
+                <a:ea typeface="Courier New" pitchFamily="34" charset="-122"/>
+                <a:cs typeface="Courier New" pitchFamily="34" charset="-120"/>
+              </a:rPr>
+              <a:t>'./pedidos-compras/annotations'</a:t>
+            </a:r>
+            <a:pPr indent="0" marL="0">
+              <a:buNone/>
+            </a:pPr>
+            <a:r>
+              <a:rPr lang="en-US" sz="1300" dirty="0">
+                <a:solidFill>
+                  <a:srgbClr val="CCCCCC"/>
+                </a:solidFill>
+                <a:latin typeface="Courier New" pitchFamily="34" charset="0"/>
+                <a:ea typeface="Courier New" pitchFamily="34" charset="-122"/>
+                <a:cs typeface="Courier New" pitchFamily="34" charset="-120"/>
+              </a:rPr>
+              <a:t>;</a:t>
             </a:r>
             <a:endParaRPr lang="en-US" sz="1300" dirty="0"/>
           </a:p>
@@ -8177,13 +9026,83 @@
             <a:r>
               <a:rPr lang="en-US" sz="1300" dirty="0">
                 <a:solidFill>
-                  <a:srgbClr val="EAECEE"/>
-                </a:solidFill>
-                <a:latin typeface="Courier New" pitchFamily="34" charset="0"/>
-                <a:ea typeface="Courier New" pitchFamily="34" charset="-122"/>
-                <a:cs typeface="Courier New" pitchFamily="34" charset="-120"/>
-              </a:rPr>
-              <a:t>using from './gestao-reembolsos/annotations';</a:t>
+                  <a:srgbClr val="C586C0"/>
+                </a:solidFill>
+                <a:latin typeface="Courier New" pitchFamily="34" charset="0"/>
+                <a:ea typeface="Courier New" pitchFamily="34" charset="-122"/>
+                <a:cs typeface="Courier New" pitchFamily="34" charset="-120"/>
+              </a:rPr>
+              <a:t>using</a:t>
+            </a:r>
+            <a:pPr indent="0" marL="0">
+              <a:buNone/>
+            </a:pPr>
+            <a:r>
+              <a:rPr lang="en-US" sz="1300" dirty="0">
+                <a:solidFill>
+                  <a:srgbClr val="CCCCCC"/>
+                </a:solidFill>
+                <a:latin typeface="Courier New" pitchFamily="34" charset="0"/>
+                <a:ea typeface="Courier New" pitchFamily="34" charset="-122"/>
+                <a:cs typeface="Courier New" pitchFamily="34" charset="-120"/>
+              </a:rPr>
+              <a:t> </a:t>
+            </a:r>
+            <a:pPr indent="0" marL="0">
+              <a:buNone/>
+            </a:pPr>
+            <a:r>
+              <a:rPr lang="en-US" sz="1300" dirty="0">
+                <a:solidFill>
+                  <a:srgbClr val="C586C0"/>
+                </a:solidFill>
+                <a:latin typeface="Courier New" pitchFamily="34" charset="0"/>
+                <a:ea typeface="Courier New" pitchFamily="34" charset="-122"/>
+                <a:cs typeface="Courier New" pitchFamily="34" charset="-120"/>
+              </a:rPr>
+              <a:t>from</a:t>
+            </a:r>
+            <a:pPr indent="0" marL="0">
+              <a:buNone/>
+            </a:pPr>
+            <a:r>
+              <a:rPr lang="en-US" sz="1300" dirty="0">
+                <a:solidFill>
+                  <a:srgbClr val="CCCCCC"/>
+                </a:solidFill>
+                <a:latin typeface="Courier New" pitchFamily="34" charset="0"/>
+                <a:ea typeface="Courier New" pitchFamily="34" charset="-122"/>
+                <a:cs typeface="Courier New" pitchFamily="34" charset="-120"/>
+              </a:rPr>
+              <a:t> </a:t>
+            </a:r>
+            <a:pPr indent="0" marL="0">
+              <a:buNone/>
+            </a:pPr>
+            <a:r>
+              <a:rPr lang="en-US" sz="1300" dirty="0">
+                <a:solidFill>
+                  <a:srgbClr val="CE9178"/>
+                </a:solidFill>
+                <a:latin typeface="Courier New" pitchFamily="34" charset="0"/>
+                <a:ea typeface="Courier New" pitchFamily="34" charset="-122"/>
+                <a:cs typeface="Courier New" pitchFamily="34" charset="-120"/>
+              </a:rPr>
+              <a:t>'./gestao-reembolsos/annotations'</a:t>
+            </a:r>
+            <a:pPr indent="0" marL="0">
+              <a:buNone/>
+            </a:pPr>
+            <a:r>
+              <a:rPr lang="en-US" sz="1300" dirty="0">
+                <a:solidFill>
+                  <a:srgbClr val="CCCCCC"/>
+                </a:solidFill>
+                <a:latin typeface="Courier New" pitchFamily="34" charset="0"/>
+                <a:ea typeface="Courier New" pitchFamily="34" charset="-122"/>
+                <a:cs typeface="Courier New" pitchFamily="34" charset="-120"/>
+              </a:rPr>
+              <a:t>;</a:t>
             </a:r>
             <a:endParaRPr lang="en-US" sz="1300" dirty="0"/>
           </a:p>
@@ -8352,9 +9271,14 @@
             </a:avLst>
           </a:prstGeom>
           <a:solidFill>
-            <a:srgbClr val="1D2D3E"/>
+            <a:srgbClr val="1F1F1F"/>
           </a:solidFill>
-          <a:ln/>
+          <a:ln w="9525">
+            <a:solidFill>
+              <a:srgbClr val="2B2B2B"/>
+            </a:solidFill>
+            <a:prstDash val="solid"/>
+          </a:ln>
           <a:effectLst>
             <a:outerShdw sx="100000" sy="100000" kx="0" ky="0" algn="bl" rotWithShape="0" blurRad="101600" dist="25400" dir="5400000">
               <a:srgbClr val="223649">
@@ -8391,13 +9315,125 @@
             <a:r>
               <a:rPr lang="en-US" sz="1300" dirty="0">
                 <a:solidFill>
-                  <a:srgbClr val="EAECEE"/>
-                </a:solidFill>
-                <a:latin typeface="Courier New" pitchFamily="34" charset="0"/>
-                <a:ea typeface="Courier New" pitchFamily="34" charset="-122"/>
-                <a:cs typeface="Courier New" pitchFamily="34" charset="-120"/>
-              </a:rPr>
-              <a:t>annotate service.Itens with @(</a:t>
+                  <a:srgbClr val="569CD6"/>
+                </a:solidFill>
+                <a:latin typeface="Courier New" pitchFamily="34" charset="0"/>
+                <a:ea typeface="Courier New" pitchFamily="34" charset="-122"/>
+                <a:cs typeface="Courier New" pitchFamily="34" charset="-120"/>
+              </a:rPr>
+              <a:t>annotate</a:t>
+            </a:r>
+            <a:pPr indent="0" marL="0">
+              <a:buNone/>
+            </a:pPr>
+            <a:r>
+              <a:rPr lang="en-US" sz="1300" dirty="0">
+                <a:solidFill>
+                  <a:srgbClr val="CCCCCC"/>
+                </a:solidFill>
+                <a:latin typeface="Courier New" pitchFamily="34" charset="0"/>
+                <a:ea typeface="Courier New" pitchFamily="34" charset="-122"/>
+                <a:cs typeface="Courier New" pitchFamily="34" charset="-120"/>
+              </a:rPr>
+              <a:t> </a:t>
+            </a:r>
+            <a:pPr indent="0" marL="0">
+              <a:buNone/>
+            </a:pPr>
+            <a:r>
+              <a:rPr lang="en-US" sz="1300" dirty="0">
+                <a:solidFill>
+                  <a:srgbClr val="569CD6"/>
+                </a:solidFill>
+                <a:latin typeface="Courier New" pitchFamily="34" charset="0"/>
+                <a:ea typeface="Courier New" pitchFamily="34" charset="-122"/>
+                <a:cs typeface="Courier New" pitchFamily="34" charset="-120"/>
+              </a:rPr>
+              <a:t>service</a:t>
+            </a:r>
+            <a:pPr indent="0" marL="0">
+              <a:buNone/>
+            </a:pPr>
+            <a:r>
+              <a:rPr lang="en-US" sz="1300" dirty="0">
+                <a:solidFill>
+                  <a:srgbClr val="CCCCCC"/>
+                </a:solidFill>
+                <a:latin typeface="Courier New" pitchFamily="34" charset="0"/>
+                <a:ea typeface="Courier New" pitchFamily="34" charset="-122"/>
+                <a:cs typeface="Courier New" pitchFamily="34" charset="-120"/>
+              </a:rPr>
+              <a:t>.</a:t>
+            </a:r>
+            <a:pPr indent="0" marL="0">
+              <a:buNone/>
+            </a:pPr>
+            <a:r>
+              <a:rPr lang="en-US" sz="1300" dirty="0">
+                <a:solidFill>
+                  <a:srgbClr val="4EC9B0"/>
+                </a:solidFill>
+                <a:latin typeface="Courier New" pitchFamily="34" charset="0"/>
+                <a:ea typeface="Courier New" pitchFamily="34" charset="-122"/>
+                <a:cs typeface="Courier New" pitchFamily="34" charset="-120"/>
+              </a:rPr>
+              <a:t>Itens</a:t>
+            </a:r>
+            <a:pPr indent="0" marL="0">
+              <a:buNone/>
+            </a:pPr>
+            <a:r>
+              <a:rPr lang="en-US" sz="1300" dirty="0">
+                <a:solidFill>
+                  <a:srgbClr val="CCCCCC"/>
+                </a:solidFill>
+                <a:latin typeface="Courier New" pitchFamily="34" charset="0"/>
+                <a:ea typeface="Courier New" pitchFamily="34" charset="-122"/>
+                <a:cs typeface="Courier New" pitchFamily="34" charset="-120"/>
+              </a:rPr>
+              <a:t> </a:t>
+            </a:r>
+            <a:pPr indent="0" marL="0">
+              <a:buNone/>
+            </a:pPr>
+            <a:r>
+              <a:rPr lang="en-US" sz="1300" dirty="0">
+                <a:solidFill>
+                  <a:srgbClr val="569CD6"/>
+                </a:solidFill>
+                <a:latin typeface="Courier New" pitchFamily="34" charset="0"/>
+                <a:ea typeface="Courier New" pitchFamily="34" charset="-122"/>
+                <a:cs typeface="Courier New" pitchFamily="34" charset="-120"/>
+              </a:rPr>
+              <a:t>with</a:t>
+            </a:r>
+            <a:pPr indent="0" marL="0">
+              <a:buNone/>
+            </a:pPr>
+            <a:r>
+              <a:rPr lang="en-US" sz="1300" dirty="0">
+                <a:solidFill>
+                  <a:srgbClr val="CCCCCC"/>
+                </a:solidFill>
+                <a:latin typeface="Courier New" pitchFamily="34" charset="0"/>
+                <a:ea typeface="Courier New" pitchFamily="34" charset="-122"/>
+                <a:cs typeface="Courier New" pitchFamily="34" charset="-120"/>
+              </a:rPr>
+              <a:t> @</a:t>
+            </a:r>
+            <a:pPr indent="0" marL="0">
+              <a:buNone/>
+            </a:pPr>
+            <a:r>
+              <a:rPr lang="en-US" sz="1300" dirty="0">
+                <a:solidFill>
+                  <a:srgbClr val="FFD700"/>
+                </a:solidFill>
+                <a:latin typeface="Courier New" pitchFamily="34" charset="0"/>
+                <a:ea typeface="Courier New" pitchFamily="34" charset="-122"/>
+                <a:cs typeface="Courier New" pitchFamily="34" charset="-120"/>
+              </a:rPr>
+              <a:t>(</a:t>
             </a:r>
             <a:endParaRPr lang="en-US" sz="1300" dirty="0"/>
           </a:p>
@@ -8408,13 +9444,125 @@
             <a:r>
               <a:rPr lang="en-US" sz="1300" dirty="0">
                 <a:solidFill>
-                  <a:srgbClr val="EAECEE"/>
-                </a:solidFill>
-                <a:latin typeface="Courier New" pitchFamily="34" charset="0"/>
-                <a:ea typeface="Courier New" pitchFamily="34" charset="-122"/>
-                <a:cs typeface="Courier New" pitchFamily="34" charset="-120"/>
-              </a:rPr>
-              <a:t>  Common.SemanticKey : [sku],</a:t>
+                  <a:srgbClr val="CCCCCC"/>
+                </a:solidFill>
+                <a:latin typeface="Courier New" pitchFamily="34" charset="0"/>
+                <a:ea typeface="Courier New" pitchFamily="34" charset="-122"/>
+                <a:cs typeface="Courier New" pitchFamily="34" charset="-120"/>
+              </a:rPr>
+              <a:t>  </a:t>
+            </a:r>
+            <a:pPr indent="0" marL="0">
+              <a:buNone/>
+            </a:pPr>
+            <a:r>
+              <a:rPr lang="en-US" sz="1300" dirty="0">
+                <a:solidFill>
+                  <a:srgbClr val="4EC9B0"/>
+                </a:solidFill>
+                <a:latin typeface="Courier New" pitchFamily="34" charset="0"/>
+                <a:ea typeface="Courier New" pitchFamily="34" charset="-122"/>
+                <a:cs typeface="Courier New" pitchFamily="34" charset="-120"/>
+              </a:rPr>
+              <a:t>Common</a:t>
+            </a:r>
+            <a:pPr indent="0" marL="0">
+              <a:buNone/>
+            </a:pPr>
+            <a:r>
+              <a:rPr lang="en-US" sz="1300" dirty="0">
+                <a:solidFill>
+                  <a:srgbClr val="CCCCCC"/>
+                </a:solidFill>
+                <a:latin typeface="Courier New" pitchFamily="34" charset="0"/>
+                <a:ea typeface="Courier New" pitchFamily="34" charset="-122"/>
+                <a:cs typeface="Courier New" pitchFamily="34" charset="-120"/>
+              </a:rPr>
+              <a:t>.</a:t>
+            </a:r>
+            <a:pPr indent="0" marL="0">
+              <a:buNone/>
+            </a:pPr>
+            <a:r>
+              <a:rPr lang="en-US" sz="1300" dirty="0">
+                <a:solidFill>
+                  <a:srgbClr val="4EC9B0"/>
+                </a:solidFill>
+                <a:latin typeface="Courier New" pitchFamily="34" charset="0"/>
+                <a:ea typeface="Courier New" pitchFamily="34" charset="-122"/>
+                <a:cs typeface="Courier New" pitchFamily="34" charset="-120"/>
+              </a:rPr>
+              <a:t>SemanticKey</a:t>
+            </a:r>
+            <a:pPr indent="0" marL="0">
+              <a:buNone/>
+            </a:pPr>
+            <a:r>
+              <a:rPr lang="en-US" sz="1300" dirty="0">
+                <a:solidFill>
+                  <a:srgbClr val="CCCCCC"/>
+                </a:solidFill>
+                <a:latin typeface="Courier New" pitchFamily="34" charset="0"/>
+                <a:ea typeface="Courier New" pitchFamily="34" charset="-122"/>
+                <a:cs typeface="Courier New" pitchFamily="34" charset="-120"/>
+              </a:rPr>
+              <a:t> : </a:t>
+            </a:r>
+            <a:pPr indent="0" marL="0">
+              <a:buNone/>
+            </a:pPr>
+            <a:r>
+              <a:rPr lang="en-US" sz="1300" dirty="0">
+                <a:solidFill>
+                  <a:srgbClr val="DA70D6"/>
+                </a:solidFill>
+                <a:latin typeface="Courier New" pitchFamily="34" charset="0"/>
+                <a:ea typeface="Courier New" pitchFamily="34" charset="-122"/>
+                <a:cs typeface="Courier New" pitchFamily="34" charset="-120"/>
+              </a:rPr>
+              <a:t>[</a:t>
+            </a:r>
+            <a:pPr indent="0" marL="0">
+              <a:buNone/>
+            </a:pPr>
+            <a:r>
+              <a:rPr lang="en-US" sz="1300" dirty="0">
+                <a:solidFill>
+                  <a:srgbClr val="9CDCFE"/>
+                </a:solidFill>
+                <a:latin typeface="Courier New" pitchFamily="34" charset="0"/>
+                <a:ea typeface="Courier New" pitchFamily="34" charset="-122"/>
+                <a:cs typeface="Courier New" pitchFamily="34" charset="-120"/>
+              </a:rPr>
+              <a:t>sku</a:t>
+            </a:r>
+            <a:pPr indent="0" marL="0">
+              <a:buNone/>
+            </a:pPr>
+            <a:r>
+              <a:rPr lang="en-US" sz="1300" dirty="0">
+                <a:solidFill>
+                  <a:srgbClr val="DA70D6"/>
+                </a:solidFill>
+                <a:latin typeface="Courier New" pitchFamily="34" charset="0"/>
+                <a:ea typeface="Courier New" pitchFamily="34" charset="-122"/>
+                <a:cs typeface="Courier New" pitchFamily="34" charset="-120"/>
+              </a:rPr>
+              <a:t>]</a:t>
+            </a:r>
+            <a:pPr indent="0" marL="0">
+              <a:buNone/>
+            </a:pPr>
+            <a:r>
+              <a:rPr lang="en-US" sz="1300" dirty="0">
+                <a:solidFill>
+                  <a:srgbClr val="CCCCCC"/>
+                </a:solidFill>
+                <a:latin typeface="Courier New" pitchFamily="34" charset="0"/>
+                <a:ea typeface="Courier New" pitchFamily="34" charset="-122"/>
+                <a:cs typeface="Courier New" pitchFamily="34" charset="-120"/>
+              </a:rPr>
+              <a:t>,</a:t>
             </a:r>
             <a:endParaRPr lang="en-US" sz="1300" dirty="0"/>
           </a:p>
@@ -8425,13 +9573,83 @@
             <a:r>
               <a:rPr lang="en-US" sz="1300" dirty="0">
                 <a:solidFill>
-                  <a:srgbClr val="EAECEE"/>
-                </a:solidFill>
-                <a:latin typeface="Courier New" pitchFamily="34" charset="0"/>
-                <a:ea typeface="Courier New" pitchFamily="34" charset="-122"/>
-                <a:cs typeface="Courier New" pitchFamily="34" charset="-120"/>
-              </a:rPr>
-              <a:t>  UI.HeaderInfo : {</a:t>
+                  <a:srgbClr val="CCCCCC"/>
+                </a:solidFill>
+                <a:latin typeface="Courier New" pitchFamily="34" charset="0"/>
+                <a:ea typeface="Courier New" pitchFamily="34" charset="-122"/>
+                <a:cs typeface="Courier New" pitchFamily="34" charset="-120"/>
+              </a:rPr>
+              <a:t>  </a:t>
+            </a:r>
+            <a:pPr indent="0" marL="0">
+              <a:buNone/>
+            </a:pPr>
+            <a:r>
+              <a:rPr lang="en-US" sz="1300" dirty="0">
+                <a:solidFill>
+                  <a:srgbClr val="4FC1FF"/>
+                </a:solidFill>
+                <a:latin typeface="Courier New" pitchFamily="34" charset="0"/>
+                <a:ea typeface="Courier New" pitchFamily="34" charset="-122"/>
+                <a:cs typeface="Courier New" pitchFamily="34" charset="-120"/>
+              </a:rPr>
+              <a:t>UI</a:t>
+            </a:r>
+            <a:pPr indent="0" marL="0">
+              <a:buNone/>
+            </a:pPr>
+            <a:r>
+              <a:rPr lang="en-US" sz="1300" dirty="0">
+                <a:solidFill>
+                  <a:srgbClr val="CCCCCC"/>
+                </a:solidFill>
+                <a:latin typeface="Courier New" pitchFamily="34" charset="0"/>
+                <a:ea typeface="Courier New" pitchFamily="34" charset="-122"/>
+                <a:cs typeface="Courier New" pitchFamily="34" charset="-120"/>
+              </a:rPr>
+              <a:t>.</a:t>
+            </a:r>
+            <a:pPr indent="0" marL="0">
+              <a:buNone/>
+            </a:pPr>
+            <a:r>
+              <a:rPr lang="en-US" sz="1300" dirty="0">
+                <a:solidFill>
+                  <a:srgbClr val="4EC9B0"/>
+                </a:solidFill>
+                <a:latin typeface="Courier New" pitchFamily="34" charset="0"/>
+                <a:ea typeface="Courier New" pitchFamily="34" charset="-122"/>
+                <a:cs typeface="Courier New" pitchFamily="34" charset="-120"/>
+              </a:rPr>
+              <a:t>HeaderInfo</a:t>
+            </a:r>
+            <a:pPr indent="0" marL="0">
+              <a:buNone/>
+            </a:pPr>
+            <a:r>
+              <a:rPr lang="en-US" sz="1300" dirty="0">
+                <a:solidFill>
+                  <a:srgbClr val="CCCCCC"/>
+                </a:solidFill>
+                <a:latin typeface="Courier New" pitchFamily="34" charset="0"/>
+                <a:ea typeface="Courier New" pitchFamily="34" charset="-122"/>
+                <a:cs typeface="Courier New" pitchFamily="34" charset="-120"/>
+              </a:rPr>
+              <a:t> : </a:t>
+            </a:r>
+            <a:pPr indent="0" marL="0">
+              <a:buNone/>
+            </a:pPr>
+            <a:r>
+              <a:rPr lang="en-US" sz="1300" dirty="0">
+                <a:solidFill>
+                  <a:srgbClr val="DA70D6"/>
+                </a:solidFill>
+                <a:latin typeface="Courier New" pitchFamily="34" charset="0"/>
+                <a:ea typeface="Courier New" pitchFamily="34" charset="-122"/>
+                <a:cs typeface="Courier New" pitchFamily="34" charset="-120"/>
+              </a:rPr>
+              <a:t>{</a:t>
             </a:r>
             <a:endParaRPr lang="en-US" sz="1300" dirty="0"/>
           </a:p>
@@ -8442,13 +9660,69 @@
             <a:r>
               <a:rPr lang="en-US" sz="1300" dirty="0">
                 <a:solidFill>
-                  <a:srgbClr val="EAECEE"/>
-                </a:solidFill>
-                <a:latin typeface="Courier New" pitchFamily="34" charset="0"/>
-                <a:ea typeface="Courier New" pitchFamily="34" charset="-122"/>
-                <a:cs typeface="Courier New" pitchFamily="34" charset="-120"/>
-              </a:rPr>
-              <a:t>    TypeName    : 'Item',</a:t>
+                  <a:srgbClr val="CCCCCC"/>
+                </a:solidFill>
+                <a:latin typeface="Courier New" pitchFamily="34" charset="0"/>
+                <a:ea typeface="Courier New" pitchFamily="34" charset="-122"/>
+                <a:cs typeface="Courier New" pitchFamily="34" charset="-120"/>
+              </a:rPr>
+              <a:t>    </a:t>
+            </a:r>
+            <a:pPr indent="0" marL="0">
+              <a:buNone/>
+            </a:pPr>
+            <a:r>
+              <a:rPr lang="en-US" sz="1300" dirty="0">
+                <a:solidFill>
+                  <a:srgbClr val="4EC9B0"/>
+                </a:solidFill>
+                <a:latin typeface="Courier New" pitchFamily="34" charset="0"/>
+                <a:ea typeface="Courier New" pitchFamily="34" charset="-122"/>
+                <a:cs typeface="Courier New" pitchFamily="34" charset="-120"/>
+              </a:rPr>
+              <a:t>TypeName</a:t>
+            </a:r>
+            <a:pPr indent="0" marL="0">
+              <a:buNone/>
+            </a:pPr>
+            <a:r>
+              <a:rPr lang="en-US" sz="1300" dirty="0">
+                <a:solidFill>
+                  <a:srgbClr val="CCCCCC"/>
+                </a:solidFill>
+                <a:latin typeface="Courier New" pitchFamily="34" charset="0"/>
+                <a:ea typeface="Courier New" pitchFamily="34" charset="-122"/>
+                <a:cs typeface="Courier New" pitchFamily="34" charset="-120"/>
+              </a:rPr>
+              <a:t>    : </a:t>
+            </a:r>
+            <a:pPr indent="0" marL="0">
+              <a:buNone/>
+            </a:pPr>
+            <a:r>
+              <a:rPr lang="en-US" sz="1300" dirty="0">
+                <a:solidFill>
+                  <a:srgbClr val="CE9178"/>
+                </a:solidFill>
+                <a:latin typeface="Courier New" pitchFamily="34" charset="0"/>
+                <a:ea typeface="Courier New" pitchFamily="34" charset="-122"/>
+                <a:cs typeface="Courier New" pitchFamily="34" charset="-120"/>
+              </a:rPr>
+              <a:t>'Item'</a:t>
+            </a:r>
+            <a:pPr indent="0" marL="0">
+              <a:buNone/>
+            </a:pPr>
+            <a:r>
+              <a:rPr lang="en-US" sz="1300" dirty="0">
+                <a:solidFill>
+                  <a:srgbClr val="CCCCCC"/>
+                </a:solidFill>
+                <a:latin typeface="Courier New" pitchFamily="34" charset="0"/>
+                <a:ea typeface="Courier New" pitchFamily="34" charset="-122"/>
+                <a:cs typeface="Courier New" pitchFamily="34" charset="-120"/>
+              </a:rPr>
+              <a:t>,</a:t>
             </a:r>
             <a:endParaRPr lang="en-US" sz="1300" dirty="0"/>
           </a:p>
@@ -8459,13 +9733,153 @@
             <a:r>
               <a:rPr lang="en-US" sz="1300" dirty="0">
                 <a:solidFill>
-                  <a:srgbClr val="EAECEE"/>
-                </a:solidFill>
-                <a:latin typeface="Courier New" pitchFamily="34" charset="0"/>
-                <a:ea typeface="Courier New" pitchFamily="34" charset="-122"/>
-                <a:cs typeface="Courier New" pitchFamily="34" charset="-120"/>
-              </a:rPr>
-              <a:t>    Title       : { Value: nome },</a:t>
+                  <a:srgbClr val="CCCCCC"/>
+                </a:solidFill>
+                <a:latin typeface="Courier New" pitchFamily="34" charset="0"/>
+                <a:ea typeface="Courier New" pitchFamily="34" charset="-122"/>
+                <a:cs typeface="Courier New" pitchFamily="34" charset="-120"/>
+              </a:rPr>
+              <a:t>    </a:t>
+            </a:r>
+            <a:pPr indent="0" marL="0">
+              <a:buNone/>
+            </a:pPr>
+            <a:r>
+              <a:rPr lang="en-US" sz="1300" dirty="0">
+                <a:solidFill>
+                  <a:srgbClr val="4EC9B0"/>
+                </a:solidFill>
+                <a:latin typeface="Courier New" pitchFamily="34" charset="0"/>
+                <a:ea typeface="Courier New" pitchFamily="34" charset="-122"/>
+                <a:cs typeface="Courier New" pitchFamily="34" charset="-120"/>
+              </a:rPr>
+              <a:t>Title</a:t>
+            </a:r>
+            <a:pPr indent="0" marL="0">
+              <a:buNone/>
+            </a:pPr>
+            <a:r>
+              <a:rPr lang="en-US" sz="1300" dirty="0">
+                <a:solidFill>
+                  <a:srgbClr val="CCCCCC"/>
+                </a:solidFill>
+                <a:latin typeface="Courier New" pitchFamily="34" charset="0"/>
+                <a:ea typeface="Courier New" pitchFamily="34" charset="-122"/>
+                <a:cs typeface="Courier New" pitchFamily="34" charset="-120"/>
+              </a:rPr>
+              <a:t>       : </a:t>
+            </a:r>
+            <a:pPr indent="0" marL="0">
+              <a:buNone/>
+            </a:pPr>
+            <a:r>
+              <a:rPr lang="en-US" sz="1300" dirty="0">
+                <a:solidFill>
+                  <a:srgbClr val="179FFF"/>
+                </a:solidFill>
+                <a:latin typeface="Courier New" pitchFamily="34" charset="0"/>
+                <a:ea typeface="Courier New" pitchFamily="34" charset="-122"/>
+                <a:cs typeface="Courier New" pitchFamily="34" charset="-120"/>
+              </a:rPr>
+              <a:t>{</a:t>
+            </a:r>
+            <a:pPr indent="0" marL="0">
+              <a:buNone/>
+            </a:pPr>
+            <a:r>
+              <a:rPr lang="en-US" sz="1300" dirty="0">
+                <a:solidFill>
+                  <a:srgbClr val="CCCCCC"/>
+                </a:solidFill>
+                <a:latin typeface="Courier New" pitchFamily="34" charset="0"/>
+                <a:ea typeface="Courier New" pitchFamily="34" charset="-122"/>
+                <a:cs typeface="Courier New" pitchFamily="34" charset="-120"/>
+              </a:rPr>
+              <a:t> </a:t>
+            </a:r>
+            <a:pPr indent="0" marL="0">
+              <a:buNone/>
+            </a:pPr>
+            <a:r>
+              <a:rPr lang="en-US" sz="1300" dirty="0">
+                <a:solidFill>
+                  <a:srgbClr val="4EC9B0"/>
+                </a:solidFill>
+                <a:latin typeface="Courier New" pitchFamily="34" charset="0"/>
+                <a:ea typeface="Courier New" pitchFamily="34" charset="-122"/>
+                <a:cs typeface="Courier New" pitchFamily="34" charset="-120"/>
+              </a:rPr>
+              <a:t>Value</a:t>
+            </a:r>
+            <a:pPr indent="0" marL="0">
+              <a:buNone/>
+            </a:pPr>
+            <a:r>
+              <a:rPr lang="en-US" sz="1300" dirty="0">
+                <a:solidFill>
+                  <a:srgbClr val="CCCCCC"/>
+                </a:solidFill>
+                <a:latin typeface="Courier New" pitchFamily="34" charset="0"/>
+                <a:ea typeface="Courier New" pitchFamily="34" charset="-122"/>
+                <a:cs typeface="Courier New" pitchFamily="34" charset="-120"/>
+              </a:rPr>
+              <a:t>: </a:t>
+            </a:r>
+            <a:pPr indent="0" marL="0">
+              <a:buNone/>
+            </a:pPr>
+            <a:r>
+              <a:rPr lang="en-US" sz="1300" dirty="0">
+                <a:solidFill>
+                  <a:srgbClr val="9CDCFE"/>
+                </a:solidFill>
+                <a:latin typeface="Courier New" pitchFamily="34" charset="0"/>
+                <a:ea typeface="Courier New" pitchFamily="34" charset="-122"/>
+                <a:cs typeface="Courier New" pitchFamily="34" charset="-120"/>
+              </a:rPr>
+              <a:t>nome</a:t>
+            </a:r>
+            <a:pPr indent="0" marL="0">
+              <a:buNone/>
+            </a:pPr>
+            <a:r>
+              <a:rPr lang="en-US" sz="1300" dirty="0">
+                <a:solidFill>
+                  <a:srgbClr val="CCCCCC"/>
+                </a:solidFill>
+                <a:latin typeface="Courier New" pitchFamily="34" charset="0"/>
+                <a:ea typeface="Courier New" pitchFamily="34" charset="-122"/>
+                <a:cs typeface="Courier New" pitchFamily="34" charset="-120"/>
+              </a:rPr>
+              <a:t> </a:t>
+            </a:r>
+            <a:pPr indent="0" marL="0">
+              <a:buNone/>
+            </a:pPr>
+            <a:r>
+              <a:rPr lang="en-US" sz="1300" dirty="0">
+                <a:solidFill>
+                  <a:srgbClr val="179FFF"/>
+                </a:solidFill>
+                <a:latin typeface="Courier New" pitchFamily="34" charset="0"/>
+                <a:ea typeface="Courier New" pitchFamily="34" charset="-122"/>
+                <a:cs typeface="Courier New" pitchFamily="34" charset="-120"/>
+              </a:rPr>
+              <a:t>}</a:t>
+            </a:r>
+            <a:pPr indent="0" marL="0">
+              <a:buNone/>
+            </a:pPr>
+            <a:r>
+              <a:rPr lang="en-US" sz="1300" dirty="0">
+                <a:solidFill>
+                  <a:srgbClr val="CCCCCC"/>
+                </a:solidFill>
+                <a:latin typeface="Courier New" pitchFamily="34" charset="0"/>
+                <a:ea typeface="Courier New" pitchFamily="34" charset="-122"/>
+                <a:cs typeface="Courier New" pitchFamily="34" charset="-120"/>
+              </a:rPr>
+              <a:t>,</a:t>
             </a:r>
             <a:endParaRPr lang="en-US" sz="1300" dirty="0"/>
           </a:p>
@@ -8476,13 +9890,153 @@
             <a:r>
               <a:rPr lang="en-US" sz="1300" dirty="0">
                 <a:solidFill>
-                  <a:srgbClr val="EAECEE"/>
-                </a:solidFill>
-                <a:latin typeface="Courier New" pitchFamily="34" charset="0"/>
-                <a:ea typeface="Courier New" pitchFamily="34" charset="-122"/>
-                <a:cs typeface="Courier New" pitchFamily="34" charset="-120"/>
-              </a:rPr>
-              <a:t>    Description : { Value: sku },</a:t>
+                  <a:srgbClr val="CCCCCC"/>
+                </a:solidFill>
+                <a:latin typeface="Courier New" pitchFamily="34" charset="0"/>
+                <a:ea typeface="Courier New" pitchFamily="34" charset="-122"/>
+                <a:cs typeface="Courier New" pitchFamily="34" charset="-120"/>
+              </a:rPr>
+              <a:t>    </a:t>
+            </a:r>
+            <a:pPr indent="0" marL="0">
+              <a:buNone/>
+            </a:pPr>
+            <a:r>
+              <a:rPr lang="en-US" sz="1300" dirty="0">
+                <a:solidFill>
+                  <a:srgbClr val="4EC9B0"/>
+                </a:solidFill>
+                <a:latin typeface="Courier New" pitchFamily="34" charset="0"/>
+                <a:ea typeface="Courier New" pitchFamily="34" charset="-122"/>
+                <a:cs typeface="Courier New" pitchFamily="34" charset="-120"/>
+              </a:rPr>
+              <a:t>Description</a:t>
+            </a:r>
+            <a:pPr indent="0" marL="0">
+              <a:buNone/>
+            </a:pPr>
+            <a:r>
+              <a:rPr lang="en-US" sz="1300" dirty="0">
+                <a:solidFill>
+                  <a:srgbClr val="CCCCCC"/>
+                </a:solidFill>
+                <a:latin typeface="Courier New" pitchFamily="34" charset="0"/>
+                <a:ea typeface="Courier New" pitchFamily="34" charset="-122"/>
+                <a:cs typeface="Courier New" pitchFamily="34" charset="-120"/>
+              </a:rPr>
+              <a:t> : </a:t>
+            </a:r>
+            <a:pPr indent="0" marL="0">
+              <a:buNone/>
+            </a:pPr>
+            <a:r>
+              <a:rPr lang="en-US" sz="1300" dirty="0">
+                <a:solidFill>
+                  <a:srgbClr val="179FFF"/>
+                </a:solidFill>
+                <a:latin typeface="Courier New" pitchFamily="34" charset="0"/>
+                <a:ea typeface="Courier New" pitchFamily="34" charset="-122"/>
+                <a:cs typeface="Courier New" pitchFamily="34" charset="-120"/>
+              </a:rPr>
+              <a:t>{</a:t>
+            </a:r>
+            <a:pPr indent="0" marL="0">
+              <a:buNone/>
+            </a:pPr>
+            <a:r>
+              <a:rPr lang="en-US" sz="1300" dirty="0">
+                <a:solidFill>
+                  <a:srgbClr val="CCCCCC"/>
+                </a:solidFill>
+                <a:latin typeface="Courier New" pitchFamily="34" charset="0"/>
+                <a:ea typeface="Courier New" pitchFamily="34" charset="-122"/>
+                <a:cs typeface="Courier New" pitchFamily="34" charset="-120"/>
+              </a:rPr>
+              <a:t> </a:t>
+            </a:r>
+            <a:pPr indent="0" marL="0">
+              <a:buNone/>
+            </a:pPr>
+            <a:r>
+              <a:rPr lang="en-US" sz="1300" dirty="0">
+                <a:solidFill>
+                  <a:srgbClr val="4EC9B0"/>
+                </a:solidFill>
+                <a:latin typeface="Courier New" pitchFamily="34" charset="0"/>
+                <a:ea typeface="Courier New" pitchFamily="34" charset="-122"/>
+                <a:cs typeface="Courier New" pitchFamily="34" charset="-120"/>
+              </a:rPr>
+              <a:t>Value</a:t>
+            </a:r>
+            <a:pPr indent="0" marL="0">
+              <a:buNone/>
+            </a:pPr>
+            <a:r>
+              <a:rPr lang="en-US" sz="1300" dirty="0">
+                <a:solidFill>
+                  <a:srgbClr val="CCCCCC"/>
+                </a:solidFill>
+                <a:latin typeface="Courier New" pitchFamily="34" charset="0"/>
+                <a:ea typeface="Courier New" pitchFamily="34" charset="-122"/>
+                <a:cs typeface="Courier New" pitchFamily="34" charset="-120"/>
+              </a:rPr>
+              <a:t>: </a:t>
+            </a:r>
+            <a:pPr indent="0" marL="0">
+              <a:buNone/>
+            </a:pPr>
+            <a:r>
+              <a:rPr lang="en-US" sz="1300" dirty="0">
+                <a:solidFill>
+                  <a:srgbClr val="9CDCFE"/>
+                </a:solidFill>
+                <a:latin typeface="Courier New" pitchFamily="34" charset="0"/>
+                <a:ea typeface="Courier New" pitchFamily="34" charset="-122"/>
+                <a:cs typeface="Courier New" pitchFamily="34" charset="-120"/>
+              </a:rPr>
+              <a:t>sku</a:t>
+            </a:r>
+            <a:pPr indent="0" marL="0">
+              <a:buNone/>
+            </a:pPr>
+            <a:r>
+              <a:rPr lang="en-US" sz="1300" dirty="0">
+                <a:solidFill>
+                  <a:srgbClr val="CCCCCC"/>
+                </a:solidFill>
+                <a:latin typeface="Courier New" pitchFamily="34" charset="0"/>
+                <a:ea typeface="Courier New" pitchFamily="34" charset="-122"/>
+                <a:cs typeface="Courier New" pitchFamily="34" charset="-120"/>
+              </a:rPr>
+              <a:t> </a:t>
+            </a:r>
+            <a:pPr indent="0" marL="0">
+              <a:buNone/>
+            </a:pPr>
+            <a:r>
+              <a:rPr lang="en-US" sz="1300" dirty="0">
+                <a:solidFill>
+                  <a:srgbClr val="179FFF"/>
+                </a:solidFill>
+                <a:latin typeface="Courier New" pitchFamily="34" charset="0"/>
+                <a:ea typeface="Courier New" pitchFamily="34" charset="-122"/>
+                <a:cs typeface="Courier New" pitchFamily="34" charset="-120"/>
+              </a:rPr>
+              <a:t>}</a:t>
+            </a:r>
+            <a:pPr indent="0" marL="0">
+              <a:buNone/>
+            </a:pPr>
+            <a:r>
+              <a:rPr lang="en-US" sz="1300" dirty="0">
+                <a:solidFill>
+                  <a:srgbClr val="CCCCCC"/>
+                </a:solidFill>
+                <a:latin typeface="Courier New" pitchFamily="34" charset="0"/>
+                <a:ea typeface="Courier New" pitchFamily="34" charset="-122"/>
+                <a:cs typeface="Courier New" pitchFamily="34" charset="-120"/>
+              </a:rPr>
+              <a:t>,</a:t>
             </a:r>
             <a:endParaRPr lang="en-US" sz="1300" dirty="0"/>
           </a:p>
@@ -8493,13 +10047,97 @@
             <a:r>
               <a:rPr lang="en-US" sz="1300" dirty="0">
                 <a:solidFill>
-                  <a:srgbClr val="EAECEE"/>
-                </a:solidFill>
-                <a:latin typeface="Courier New" pitchFamily="34" charset="0"/>
-                <a:ea typeface="Courier New" pitchFamily="34" charset="-122"/>
-                <a:cs typeface="Courier New" pitchFamily="34" charset="-120"/>
-              </a:rPr>
-              <a:t>    ImageUrl    : fotoItem },</a:t>
+                  <a:srgbClr val="CCCCCC"/>
+                </a:solidFill>
+                <a:latin typeface="Courier New" pitchFamily="34" charset="0"/>
+                <a:ea typeface="Courier New" pitchFamily="34" charset="-122"/>
+                <a:cs typeface="Courier New" pitchFamily="34" charset="-120"/>
+              </a:rPr>
+              <a:t>    </a:t>
+            </a:r>
+            <a:pPr indent="0" marL="0">
+              <a:buNone/>
+            </a:pPr>
+            <a:r>
+              <a:rPr lang="en-US" sz="1300" dirty="0">
+                <a:solidFill>
+                  <a:srgbClr val="4EC9B0"/>
+                </a:solidFill>
+                <a:latin typeface="Courier New" pitchFamily="34" charset="0"/>
+                <a:ea typeface="Courier New" pitchFamily="34" charset="-122"/>
+                <a:cs typeface="Courier New" pitchFamily="34" charset="-120"/>
+              </a:rPr>
+              <a:t>ImageUrl</a:t>
+            </a:r>
+            <a:pPr indent="0" marL="0">
+              <a:buNone/>
+            </a:pPr>
+            <a:r>
+              <a:rPr lang="en-US" sz="1300" dirty="0">
+                <a:solidFill>
+                  <a:srgbClr val="CCCCCC"/>
+                </a:solidFill>
+                <a:latin typeface="Courier New" pitchFamily="34" charset="0"/>
+                <a:ea typeface="Courier New" pitchFamily="34" charset="-122"/>
+                <a:cs typeface="Courier New" pitchFamily="34" charset="-120"/>
+              </a:rPr>
+              <a:t>    : </a:t>
+            </a:r>
+            <a:pPr indent="0" marL="0">
+              <a:buNone/>
+            </a:pPr>
+            <a:r>
+              <a:rPr lang="en-US" sz="1300" dirty="0">
+                <a:solidFill>
+                  <a:srgbClr val="9CDCFE"/>
+                </a:solidFill>
+                <a:latin typeface="Courier New" pitchFamily="34" charset="0"/>
+                <a:ea typeface="Courier New" pitchFamily="34" charset="-122"/>
+                <a:cs typeface="Courier New" pitchFamily="34" charset="-120"/>
+              </a:rPr>
+              <a:t>fotoItem</a:t>
+            </a:r>
+            <a:pPr indent="0" marL="0">
+              <a:buNone/>
+            </a:pPr>
+            <a:r>
+              <a:rPr lang="en-US" sz="1300" dirty="0">
+                <a:solidFill>
+                  <a:srgbClr val="CCCCCC"/>
+                </a:solidFill>
+                <a:latin typeface="Courier New" pitchFamily="34" charset="0"/>
+                <a:ea typeface="Courier New" pitchFamily="34" charset="-122"/>
+                <a:cs typeface="Courier New" pitchFamily="34" charset="-120"/>
+              </a:rPr>
+              <a:t> </a:t>
+            </a:r>
+            <a:pPr indent="0" marL="0">
+              <a:buNone/>
+            </a:pPr>
+            <a:r>
+              <a:rPr lang="en-US" sz="1300" dirty="0">
+                <a:solidFill>
+                  <a:srgbClr val="DA70D6"/>
+                </a:solidFill>
+                <a:latin typeface="Courier New" pitchFamily="34" charset="0"/>
+                <a:ea typeface="Courier New" pitchFamily="34" charset="-122"/>
+                <a:cs typeface="Courier New" pitchFamily="34" charset="-120"/>
+              </a:rPr>
+              <a:t>}</a:t>
+            </a:r>
+            <a:pPr indent="0" marL="0">
+              <a:buNone/>
+            </a:pPr>
+            <a:r>
+              <a:rPr lang="en-US" sz="1300" dirty="0">
+                <a:solidFill>
+                  <a:srgbClr val="CCCCCC"/>
+                </a:solidFill>
+                <a:latin typeface="Courier New" pitchFamily="34" charset="0"/>
+                <a:ea typeface="Courier New" pitchFamily="34" charset="-122"/>
+                <a:cs typeface="Courier New" pitchFamily="34" charset="-120"/>
+              </a:rPr>
+              <a:t>,</a:t>
             </a:r>
             <a:endParaRPr lang="en-US" sz="1300" dirty="0"/>
           </a:p>
@@ -8510,13 +10148,153 @@
             <a:r>
               <a:rPr lang="en-US" sz="1300" dirty="0">
                 <a:solidFill>
-                  <a:srgbClr val="EAECEE"/>
-                </a:solidFill>
-                <a:latin typeface="Courier New" pitchFamily="34" charset="0"/>
-                <a:ea typeface="Courier New" pitchFamily="34" charset="-122"/>
-                <a:cs typeface="Courier New" pitchFamily="34" charset="-120"/>
-              </a:rPr>
-              <a:t>  UI.SelectionFields : [ sku, nome,</a:t>
+                  <a:srgbClr val="CCCCCC"/>
+                </a:solidFill>
+                <a:latin typeface="Courier New" pitchFamily="34" charset="0"/>
+                <a:ea typeface="Courier New" pitchFamily="34" charset="-122"/>
+                <a:cs typeface="Courier New" pitchFamily="34" charset="-120"/>
+              </a:rPr>
+              <a:t>  </a:t>
+            </a:r>
+            <a:pPr indent="0" marL="0">
+              <a:buNone/>
+            </a:pPr>
+            <a:r>
+              <a:rPr lang="en-US" sz="1300" dirty="0">
+                <a:solidFill>
+                  <a:srgbClr val="4FC1FF"/>
+                </a:solidFill>
+                <a:latin typeface="Courier New" pitchFamily="34" charset="0"/>
+                <a:ea typeface="Courier New" pitchFamily="34" charset="-122"/>
+                <a:cs typeface="Courier New" pitchFamily="34" charset="-120"/>
+              </a:rPr>
+              <a:t>UI</a:t>
+            </a:r>
+            <a:pPr indent="0" marL="0">
+              <a:buNone/>
+            </a:pPr>
+            <a:r>
+              <a:rPr lang="en-US" sz="1300" dirty="0">
+                <a:solidFill>
+                  <a:srgbClr val="CCCCCC"/>
+                </a:solidFill>
+                <a:latin typeface="Courier New" pitchFamily="34" charset="0"/>
+                <a:ea typeface="Courier New" pitchFamily="34" charset="-122"/>
+                <a:cs typeface="Courier New" pitchFamily="34" charset="-120"/>
+              </a:rPr>
+              <a:t>.</a:t>
+            </a:r>
+            <a:pPr indent="0" marL="0">
+              <a:buNone/>
+            </a:pPr>
+            <a:r>
+              <a:rPr lang="en-US" sz="1300" dirty="0">
+                <a:solidFill>
+                  <a:srgbClr val="4EC9B0"/>
+                </a:solidFill>
+                <a:latin typeface="Courier New" pitchFamily="34" charset="0"/>
+                <a:ea typeface="Courier New" pitchFamily="34" charset="-122"/>
+                <a:cs typeface="Courier New" pitchFamily="34" charset="-120"/>
+              </a:rPr>
+              <a:t>SelectionFields</a:t>
+            </a:r>
+            <a:pPr indent="0" marL="0">
+              <a:buNone/>
+            </a:pPr>
+            <a:r>
+              <a:rPr lang="en-US" sz="1300" dirty="0">
+                <a:solidFill>
+                  <a:srgbClr val="CCCCCC"/>
+                </a:solidFill>
+                <a:latin typeface="Courier New" pitchFamily="34" charset="0"/>
+                <a:ea typeface="Courier New" pitchFamily="34" charset="-122"/>
+                <a:cs typeface="Courier New" pitchFamily="34" charset="-120"/>
+              </a:rPr>
+              <a:t> : </a:t>
+            </a:r>
+            <a:pPr indent="0" marL="0">
+              <a:buNone/>
+            </a:pPr>
+            <a:r>
+              <a:rPr lang="en-US" sz="1300" dirty="0">
+                <a:solidFill>
+                  <a:srgbClr val="DA70D6"/>
+                </a:solidFill>
+                <a:latin typeface="Courier New" pitchFamily="34" charset="0"/>
+                <a:ea typeface="Courier New" pitchFamily="34" charset="-122"/>
+                <a:cs typeface="Courier New" pitchFamily="34" charset="-120"/>
+              </a:rPr>
+              <a:t>[</a:t>
+            </a:r>
+            <a:pPr indent="0" marL="0">
+              <a:buNone/>
+            </a:pPr>
+            <a:r>
+              <a:rPr lang="en-US" sz="1300" dirty="0">
+                <a:solidFill>
+                  <a:srgbClr val="CCCCCC"/>
+                </a:solidFill>
+                <a:latin typeface="Courier New" pitchFamily="34" charset="0"/>
+                <a:ea typeface="Courier New" pitchFamily="34" charset="-122"/>
+                <a:cs typeface="Courier New" pitchFamily="34" charset="-120"/>
+              </a:rPr>
+              <a:t> </a:t>
+            </a:r>
+            <a:pPr indent="0" marL="0">
+              <a:buNone/>
+            </a:pPr>
+            <a:r>
+              <a:rPr lang="en-US" sz="1300" dirty="0">
+                <a:solidFill>
+                  <a:srgbClr val="9CDCFE"/>
+                </a:solidFill>
+                <a:latin typeface="Courier New" pitchFamily="34" charset="0"/>
+                <a:ea typeface="Courier New" pitchFamily="34" charset="-122"/>
+                <a:cs typeface="Courier New" pitchFamily="34" charset="-120"/>
+              </a:rPr>
+              <a:t>sku</a:t>
+            </a:r>
+            <a:pPr indent="0" marL="0">
+              <a:buNone/>
+            </a:pPr>
+            <a:r>
+              <a:rPr lang="en-US" sz="1300" dirty="0">
+                <a:solidFill>
+                  <a:srgbClr val="CCCCCC"/>
+                </a:solidFill>
+                <a:latin typeface="Courier New" pitchFamily="34" charset="0"/>
+                <a:ea typeface="Courier New" pitchFamily="34" charset="-122"/>
+                <a:cs typeface="Courier New" pitchFamily="34" charset="-120"/>
+              </a:rPr>
+              <a:t>, </a:t>
+            </a:r>
+            <a:pPr indent="0" marL="0">
+              <a:buNone/>
+            </a:pPr>
+            <a:r>
+              <a:rPr lang="en-US" sz="1300" dirty="0">
+                <a:solidFill>
+                  <a:srgbClr val="9CDCFE"/>
+                </a:solidFill>
+                <a:latin typeface="Courier New" pitchFamily="34" charset="0"/>
+                <a:ea typeface="Courier New" pitchFamily="34" charset="-122"/>
+                <a:cs typeface="Courier New" pitchFamily="34" charset="-120"/>
+              </a:rPr>
+              <a:t>nome</a:t>
+            </a:r>
+            <a:pPr indent="0" marL="0">
+              <a:buNone/>
+            </a:pPr>
+            <a:r>
+              <a:rPr lang="en-US" sz="1300" dirty="0">
+                <a:solidFill>
+                  <a:srgbClr val="CCCCCC"/>
+                </a:solidFill>
+                <a:latin typeface="Courier New" pitchFamily="34" charset="0"/>
+                <a:ea typeface="Courier New" pitchFamily="34" charset="-122"/>
+                <a:cs typeface="Courier New" pitchFamily="34" charset="-120"/>
+              </a:rPr>
+              <a:t>,</a:t>
             </a:r>
             <a:endParaRPr lang="en-US" sz="1300" dirty="0"/>
           </a:p>
@@ -8527,13 +10305,97 @@
             <a:r>
               <a:rPr lang="en-US" sz="1300" dirty="0">
                 <a:solidFill>
-                  <a:srgbClr val="EAECEE"/>
-                </a:solidFill>
-                <a:latin typeface="Courier New" pitchFamily="34" charset="0"/>
-                <a:ea typeface="Courier New" pitchFamily="34" charset="-122"/>
-                <a:cs typeface="Courier New" pitchFamily="34" charset="-120"/>
-              </a:rPr>
-              <a:t>    categoria_code, statusEstoque_code ],</a:t>
+                  <a:srgbClr val="CCCCCC"/>
+                </a:solidFill>
+                <a:latin typeface="Courier New" pitchFamily="34" charset="0"/>
+                <a:ea typeface="Courier New" pitchFamily="34" charset="-122"/>
+                <a:cs typeface="Courier New" pitchFamily="34" charset="-120"/>
+              </a:rPr>
+              <a:t>    </a:t>
+            </a:r>
+            <a:pPr indent="0" marL="0">
+              <a:buNone/>
+            </a:pPr>
+            <a:r>
+              <a:rPr lang="en-US" sz="1300" dirty="0">
+                <a:solidFill>
+                  <a:srgbClr val="9CDCFE"/>
+                </a:solidFill>
+                <a:latin typeface="Courier New" pitchFamily="34" charset="0"/>
+                <a:ea typeface="Courier New" pitchFamily="34" charset="-122"/>
+                <a:cs typeface="Courier New" pitchFamily="34" charset="-120"/>
+              </a:rPr>
+              <a:t>categoria_code</a:t>
+            </a:r>
+            <a:pPr indent="0" marL="0">
+              <a:buNone/>
+            </a:pPr>
+            <a:r>
+              <a:rPr lang="en-US" sz="1300" dirty="0">
+                <a:solidFill>
+                  <a:srgbClr val="CCCCCC"/>
+                </a:solidFill>
+                <a:latin typeface="Courier New" pitchFamily="34" charset="0"/>
+                <a:ea typeface="Courier New" pitchFamily="34" charset="-122"/>
+                <a:cs typeface="Courier New" pitchFamily="34" charset="-120"/>
+              </a:rPr>
+              <a:t>, </a:t>
+            </a:r>
+            <a:pPr indent="0" marL="0">
+              <a:buNone/>
+            </a:pPr>
+            <a:r>
+              <a:rPr lang="en-US" sz="1300" dirty="0">
+                <a:solidFill>
+                  <a:srgbClr val="9CDCFE"/>
+                </a:solidFill>
+                <a:latin typeface="Courier New" pitchFamily="34" charset="0"/>
+                <a:ea typeface="Courier New" pitchFamily="34" charset="-122"/>
+                <a:cs typeface="Courier New" pitchFamily="34" charset="-120"/>
+              </a:rPr>
+              <a:t>statusEstoque_code</a:t>
+            </a:r>
+            <a:pPr indent="0" marL="0">
+              <a:buNone/>
+            </a:pPr>
+            <a:r>
+              <a:rPr lang="en-US" sz="1300" dirty="0">
+                <a:solidFill>
+                  <a:srgbClr val="CCCCCC"/>
+                </a:solidFill>
+                <a:latin typeface="Courier New" pitchFamily="34" charset="0"/>
+                <a:ea typeface="Courier New" pitchFamily="34" charset="-122"/>
+                <a:cs typeface="Courier New" pitchFamily="34" charset="-120"/>
+              </a:rPr>
+              <a:t> </a:t>
+            </a:r>
+            <a:pPr indent="0" marL="0">
+              <a:buNone/>
+            </a:pPr>
+            <a:r>
+              <a:rPr lang="en-US" sz="1300" dirty="0">
+                <a:solidFill>
+                  <a:srgbClr val="DA70D6"/>
+                </a:solidFill>
+                <a:latin typeface="Courier New" pitchFamily="34" charset="0"/>
+                <a:ea typeface="Courier New" pitchFamily="34" charset="-122"/>
+                <a:cs typeface="Courier New" pitchFamily="34" charset="-120"/>
+              </a:rPr>
+              <a:t>]</a:t>
+            </a:r>
+            <a:pPr indent="0" marL="0">
+              <a:buNone/>
+            </a:pPr>
+            <a:r>
+              <a:rPr lang="en-US" sz="1300" dirty="0">
+                <a:solidFill>
+                  <a:srgbClr val="CCCCCC"/>
+                </a:solidFill>
+                <a:latin typeface="Courier New" pitchFamily="34" charset="0"/>
+                <a:ea typeface="Courier New" pitchFamily="34" charset="-122"/>
+                <a:cs typeface="Courier New" pitchFamily="34" charset="-120"/>
+              </a:rPr>
+              <a:t>,</a:t>
             </a:r>
             <a:endParaRPr lang="en-US" sz="1300" dirty="0"/>
           </a:p>
@@ -8544,13 +10406,83 @@
             <a:r>
               <a:rPr lang="en-US" sz="1300" dirty="0">
                 <a:solidFill>
-                  <a:srgbClr val="EAECEE"/>
-                </a:solidFill>
-                <a:latin typeface="Courier New" pitchFamily="34" charset="0"/>
-                <a:ea typeface="Courier New" pitchFamily="34" charset="-122"/>
-                <a:cs typeface="Courier New" pitchFamily="34" charset="-120"/>
-              </a:rPr>
-              <a:t>  UI.LineItem : [</a:t>
+                  <a:srgbClr val="CCCCCC"/>
+                </a:solidFill>
+                <a:latin typeface="Courier New" pitchFamily="34" charset="0"/>
+                <a:ea typeface="Courier New" pitchFamily="34" charset="-122"/>
+                <a:cs typeface="Courier New" pitchFamily="34" charset="-120"/>
+              </a:rPr>
+              <a:t>  </a:t>
+            </a:r>
+            <a:pPr indent="0" marL="0">
+              <a:buNone/>
+            </a:pPr>
+            <a:r>
+              <a:rPr lang="en-US" sz="1300" dirty="0">
+                <a:solidFill>
+                  <a:srgbClr val="4FC1FF"/>
+                </a:solidFill>
+                <a:latin typeface="Courier New" pitchFamily="34" charset="0"/>
+                <a:ea typeface="Courier New" pitchFamily="34" charset="-122"/>
+                <a:cs typeface="Courier New" pitchFamily="34" charset="-120"/>
+              </a:rPr>
+              <a:t>UI</a:t>
+            </a:r>
+            <a:pPr indent="0" marL="0">
+              <a:buNone/>
+            </a:pPr>
+            <a:r>
+              <a:rPr lang="en-US" sz="1300" dirty="0">
+                <a:solidFill>
+                  <a:srgbClr val="CCCCCC"/>
+                </a:solidFill>
+                <a:latin typeface="Courier New" pitchFamily="34" charset="0"/>
+                <a:ea typeface="Courier New" pitchFamily="34" charset="-122"/>
+                <a:cs typeface="Courier New" pitchFamily="34" charset="-120"/>
+              </a:rPr>
+              <a:t>.</a:t>
+            </a:r>
+            <a:pPr indent="0" marL="0">
+              <a:buNone/>
+            </a:pPr>
+            <a:r>
+              <a:rPr lang="en-US" sz="1300" dirty="0">
+                <a:solidFill>
+                  <a:srgbClr val="4EC9B0"/>
+                </a:solidFill>
+                <a:latin typeface="Courier New" pitchFamily="34" charset="0"/>
+                <a:ea typeface="Courier New" pitchFamily="34" charset="-122"/>
+                <a:cs typeface="Courier New" pitchFamily="34" charset="-120"/>
+              </a:rPr>
+              <a:t>LineItem</a:t>
+            </a:r>
+            <a:pPr indent="0" marL="0">
+              <a:buNone/>
+            </a:pPr>
+            <a:r>
+              <a:rPr lang="en-US" sz="1300" dirty="0">
+                <a:solidFill>
+                  <a:srgbClr val="CCCCCC"/>
+                </a:solidFill>
+                <a:latin typeface="Courier New" pitchFamily="34" charset="0"/>
+                <a:ea typeface="Courier New" pitchFamily="34" charset="-122"/>
+                <a:cs typeface="Courier New" pitchFamily="34" charset="-120"/>
+              </a:rPr>
+              <a:t> : </a:t>
+            </a:r>
+            <a:pPr indent="0" marL="0">
+              <a:buNone/>
+            </a:pPr>
+            <a:r>
+              <a:rPr lang="en-US" sz="1300" dirty="0">
+                <a:solidFill>
+                  <a:srgbClr val="DA70D6"/>
+                </a:solidFill>
+                <a:latin typeface="Courier New" pitchFamily="34" charset="0"/>
+                <a:ea typeface="Courier New" pitchFamily="34" charset="-122"/>
+                <a:cs typeface="Courier New" pitchFamily="34" charset="-120"/>
+              </a:rPr>
+              <a:t>[</a:t>
             </a:r>
             <a:endParaRPr lang="en-US" sz="1300" dirty="0"/>
           </a:p>
@@ -8561,13 +10493,181 @@
             <a:r>
               <a:rPr lang="en-US" sz="1300" dirty="0">
                 <a:solidFill>
-                  <a:srgbClr val="EAECEE"/>
-                </a:solidFill>
-                <a:latin typeface="Courier New" pitchFamily="34" charset="0"/>
-                <a:ea typeface="Courier New" pitchFamily="34" charset="-122"/>
-                <a:cs typeface="Courier New" pitchFamily="34" charset="-120"/>
-              </a:rPr>
-              <a:t>    { Value: fotoItem, Label: 'Foto' },</a:t>
+                  <a:srgbClr val="CCCCCC"/>
+                </a:solidFill>
+                <a:latin typeface="Courier New" pitchFamily="34" charset="0"/>
+                <a:ea typeface="Courier New" pitchFamily="34" charset="-122"/>
+                <a:cs typeface="Courier New" pitchFamily="34" charset="-120"/>
+              </a:rPr>
+              <a:t>    </a:t>
+            </a:r>
+            <a:pPr indent="0" marL="0">
+              <a:buNone/>
+            </a:pPr>
+            <a:r>
+              <a:rPr lang="en-US" sz="1300" dirty="0">
+                <a:solidFill>
+                  <a:srgbClr val="179FFF"/>
+                </a:solidFill>
+                <a:latin typeface="Courier New" pitchFamily="34" charset="0"/>
+                <a:ea typeface="Courier New" pitchFamily="34" charset="-122"/>
+                <a:cs typeface="Courier New" pitchFamily="34" charset="-120"/>
+              </a:rPr>
+              <a:t>{</a:t>
+            </a:r>
+            <a:pPr indent="0" marL="0">
+              <a:buNone/>
+            </a:pPr>
+            <a:r>
+              <a:rPr lang="en-US" sz="1300" dirty="0">
+                <a:solidFill>
+                  <a:srgbClr val="CCCCCC"/>
+                </a:solidFill>
+                <a:latin typeface="Courier New" pitchFamily="34" charset="0"/>
+                <a:ea typeface="Courier New" pitchFamily="34" charset="-122"/>
+                <a:cs typeface="Courier New" pitchFamily="34" charset="-120"/>
+              </a:rPr>
+              <a:t> </a:t>
+            </a:r>
+            <a:pPr indent="0" marL="0">
+              <a:buNone/>
+            </a:pPr>
+            <a:r>
+              <a:rPr lang="en-US" sz="1300" dirty="0">
+                <a:solidFill>
+                  <a:srgbClr val="4EC9B0"/>
+                </a:solidFill>
+                <a:latin typeface="Courier New" pitchFamily="34" charset="0"/>
+                <a:ea typeface="Courier New" pitchFamily="34" charset="-122"/>
+                <a:cs typeface="Courier New" pitchFamily="34" charset="-120"/>
+              </a:rPr>
+              <a:t>Value</a:t>
+            </a:r>
+            <a:pPr indent="0" marL="0">
+              <a:buNone/>
+            </a:pPr>
+            <a:r>
+              <a:rPr lang="en-US" sz="1300" dirty="0">
+                <a:solidFill>
+                  <a:srgbClr val="CCCCCC"/>
+                </a:solidFill>
+                <a:latin typeface="Courier New" pitchFamily="34" charset="0"/>
+                <a:ea typeface="Courier New" pitchFamily="34" charset="-122"/>
+                <a:cs typeface="Courier New" pitchFamily="34" charset="-120"/>
+              </a:rPr>
+              <a:t>: </a:t>
+            </a:r>
+            <a:pPr indent="0" marL="0">
+              <a:buNone/>
+            </a:pPr>
+            <a:r>
+              <a:rPr lang="en-US" sz="1300" dirty="0">
+                <a:solidFill>
+                  <a:srgbClr val="9CDCFE"/>
+                </a:solidFill>
+                <a:latin typeface="Courier New" pitchFamily="34" charset="0"/>
+                <a:ea typeface="Courier New" pitchFamily="34" charset="-122"/>
+                <a:cs typeface="Courier New" pitchFamily="34" charset="-120"/>
+              </a:rPr>
+              <a:t>fotoItem</a:t>
+            </a:r>
+            <a:pPr indent="0" marL="0">
+              <a:buNone/>
+            </a:pPr>
+            <a:r>
+              <a:rPr lang="en-US" sz="1300" dirty="0">
+                <a:solidFill>
+                  <a:srgbClr val="CCCCCC"/>
+                </a:solidFill>
+                <a:latin typeface="Courier New" pitchFamily="34" charset="0"/>
+                <a:ea typeface="Courier New" pitchFamily="34" charset="-122"/>
+                <a:cs typeface="Courier New" pitchFamily="34" charset="-120"/>
+              </a:rPr>
+              <a:t>, </a:t>
+            </a:r>
+            <a:pPr indent="0" marL="0">
+              <a:buNone/>
+            </a:pPr>
+            <a:r>
+              <a:rPr lang="en-US" sz="1300" dirty="0">
+                <a:solidFill>
+                  <a:srgbClr val="4EC9B0"/>
+                </a:solidFill>
+                <a:latin typeface="Courier New" pitchFamily="34" charset="0"/>
+                <a:ea typeface="Courier New" pitchFamily="34" charset="-122"/>
+                <a:cs typeface="Courier New" pitchFamily="34" charset="-120"/>
+              </a:rPr>
+              <a:t>Label</a:t>
+            </a:r>
+            <a:pPr indent="0" marL="0">
+              <a:buNone/>
+            </a:pPr>
+            <a:r>
+              <a:rPr lang="en-US" sz="1300" dirty="0">
+                <a:solidFill>
+                  <a:srgbClr val="CCCCCC"/>
+                </a:solidFill>
+                <a:latin typeface="Courier New" pitchFamily="34" charset="0"/>
+                <a:ea typeface="Courier New" pitchFamily="34" charset="-122"/>
+                <a:cs typeface="Courier New" pitchFamily="34" charset="-120"/>
+              </a:rPr>
+              <a:t>: </a:t>
+            </a:r>
+            <a:pPr indent="0" marL="0">
+              <a:buNone/>
+            </a:pPr>
+            <a:r>
+              <a:rPr lang="en-US" sz="1300" dirty="0">
+                <a:solidFill>
+                  <a:srgbClr val="CE9178"/>
+                </a:solidFill>
+                <a:latin typeface="Courier New" pitchFamily="34" charset="0"/>
+                <a:ea typeface="Courier New" pitchFamily="34" charset="-122"/>
+                <a:cs typeface="Courier New" pitchFamily="34" charset="-120"/>
+              </a:rPr>
+              <a:t>'Foto'</a:t>
+            </a:r>
+            <a:pPr indent="0" marL="0">
+              <a:buNone/>
+            </a:pPr>
+            <a:r>
+              <a:rPr lang="en-US" sz="1300" dirty="0">
+                <a:solidFill>
+                  <a:srgbClr val="CCCCCC"/>
+                </a:solidFill>
+                <a:latin typeface="Courier New" pitchFamily="34" charset="0"/>
+                <a:ea typeface="Courier New" pitchFamily="34" charset="-122"/>
+                <a:cs typeface="Courier New" pitchFamily="34" charset="-120"/>
+              </a:rPr>
+              <a:t> </a:t>
+            </a:r>
+            <a:pPr indent="0" marL="0">
+              <a:buNone/>
+            </a:pPr>
+            <a:r>
+              <a:rPr lang="en-US" sz="1300" dirty="0">
+                <a:solidFill>
+                  <a:srgbClr val="179FFF"/>
+                </a:solidFill>
+                <a:latin typeface="Courier New" pitchFamily="34" charset="0"/>
+                <a:ea typeface="Courier New" pitchFamily="34" charset="-122"/>
+                <a:cs typeface="Courier New" pitchFamily="34" charset="-120"/>
+              </a:rPr>
+              <a:t>}</a:t>
+            </a:r>
+            <a:pPr indent="0" marL="0">
+              <a:buNone/>
+            </a:pPr>
+            <a:r>
+              <a:rPr lang="en-US" sz="1300" dirty="0">
+                <a:solidFill>
+                  <a:srgbClr val="CCCCCC"/>
+                </a:solidFill>
+                <a:latin typeface="Courier New" pitchFamily="34" charset="0"/>
+                <a:ea typeface="Courier New" pitchFamily="34" charset="-122"/>
+                <a:cs typeface="Courier New" pitchFamily="34" charset="-120"/>
+              </a:rPr>
+              <a:t>,</a:t>
             </a:r>
             <a:endParaRPr lang="en-US" sz="1300" dirty="0"/>
           </a:p>
@@ -8578,13 +10678,181 @@
             <a:r>
               <a:rPr lang="en-US" sz="1300" dirty="0">
                 <a:solidFill>
-                  <a:srgbClr val="EAECEE"/>
-                </a:solidFill>
-                <a:latin typeface="Courier New" pitchFamily="34" charset="0"/>
-                <a:ea typeface="Courier New" pitchFamily="34" charset="-122"/>
-                <a:cs typeface="Courier New" pitchFamily="34" charset="-120"/>
-              </a:rPr>
-              <a:t>    { Value: sku,  ![@UI.Importance]: #High },</a:t>
+                  <a:srgbClr val="CCCCCC"/>
+                </a:solidFill>
+                <a:latin typeface="Courier New" pitchFamily="34" charset="0"/>
+                <a:ea typeface="Courier New" pitchFamily="34" charset="-122"/>
+                <a:cs typeface="Courier New" pitchFamily="34" charset="-120"/>
+              </a:rPr>
+              <a:t>    </a:t>
+            </a:r>
+            <a:pPr indent="0" marL="0">
+              <a:buNone/>
+            </a:pPr>
+            <a:r>
+              <a:rPr lang="en-US" sz="1300" dirty="0">
+                <a:solidFill>
+                  <a:srgbClr val="179FFF"/>
+                </a:solidFill>
+                <a:latin typeface="Courier New" pitchFamily="34" charset="0"/>
+                <a:ea typeface="Courier New" pitchFamily="34" charset="-122"/>
+                <a:cs typeface="Courier New" pitchFamily="34" charset="-120"/>
+              </a:rPr>
+              <a:t>{</a:t>
+            </a:r>
+            <a:pPr indent="0" marL="0">
+              <a:buNone/>
+            </a:pPr>
+            <a:r>
+              <a:rPr lang="en-US" sz="1300" dirty="0">
+                <a:solidFill>
+                  <a:srgbClr val="CCCCCC"/>
+                </a:solidFill>
+                <a:latin typeface="Courier New" pitchFamily="34" charset="0"/>
+                <a:ea typeface="Courier New" pitchFamily="34" charset="-122"/>
+                <a:cs typeface="Courier New" pitchFamily="34" charset="-120"/>
+              </a:rPr>
+              <a:t> </a:t>
+            </a:r>
+            <a:pPr indent="0" marL="0">
+              <a:buNone/>
+            </a:pPr>
+            <a:r>
+              <a:rPr lang="en-US" sz="1300" dirty="0">
+                <a:solidFill>
+                  <a:srgbClr val="4EC9B0"/>
+                </a:solidFill>
+                <a:latin typeface="Courier New" pitchFamily="34" charset="0"/>
+                <a:ea typeface="Courier New" pitchFamily="34" charset="-122"/>
+                <a:cs typeface="Courier New" pitchFamily="34" charset="-120"/>
+              </a:rPr>
+              <a:t>Value</a:t>
+            </a:r>
+            <a:pPr indent="0" marL="0">
+              <a:buNone/>
+            </a:pPr>
+            <a:r>
+              <a:rPr lang="en-US" sz="1300" dirty="0">
+                <a:solidFill>
+                  <a:srgbClr val="CCCCCC"/>
+                </a:solidFill>
+                <a:latin typeface="Courier New" pitchFamily="34" charset="0"/>
+                <a:ea typeface="Courier New" pitchFamily="34" charset="-122"/>
+                <a:cs typeface="Courier New" pitchFamily="34" charset="-120"/>
+              </a:rPr>
+              <a:t>: </a:t>
+            </a:r>
+            <a:pPr indent="0" marL="0">
+              <a:buNone/>
+            </a:pPr>
+            <a:r>
+              <a:rPr lang="en-US" sz="1300" dirty="0">
+                <a:solidFill>
+                  <a:srgbClr val="9CDCFE"/>
+                </a:solidFill>
+                <a:latin typeface="Courier New" pitchFamily="34" charset="0"/>
+                <a:ea typeface="Courier New" pitchFamily="34" charset="-122"/>
+                <a:cs typeface="Courier New" pitchFamily="34" charset="-120"/>
+              </a:rPr>
+              <a:t>sku</a:t>
+            </a:r>
+            <a:pPr indent="0" marL="0">
+              <a:buNone/>
+            </a:pPr>
+            <a:r>
+              <a:rPr lang="en-US" sz="1300" dirty="0">
+                <a:solidFill>
+                  <a:srgbClr val="CCCCCC"/>
+                </a:solidFill>
+                <a:latin typeface="Courier New" pitchFamily="34" charset="0"/>
+                <a:ea typeface="Courier New" pitchFamily="34" charset="-122"/>
+                <a:cs typeface="Courier New" pitchFamily="34" charset="-120"/>
+              </a:rPr>
+              <a:t>,  </a:t>
+            </a:r>
+            <a:pPr indent="0" marL="0">
+              <a:buNone/>
+            </a:pPr>
+            <a:r>
+              <a:rPr lang="en-US" sz="1300" dirty="0">
+                <a:solidFill>
+                  <a:srgbClr val="DCDCAA"/>
+                </a:solidFill>
+                <a:latin typeface="Courier New" pitchFamily="34" charset="0"/>
+                <a:ea typeface="Courier New" pitchFamily="34" charset="-122"/>
+                <a:cs typeface="Courier New" pitchFamily="34" charset="-120"/>
+              </a:rPr>
+              <a:t>![@UI.Importance]</a:t>
+            </a:r>
+            <a:pPr indent="0" marL="0">
+              <a:buNone/>
+            </a:pPr>
+            <a:r>
+              <a:rPr lang="en-US" sz="1300" dirty="0">
+                <a:solidFill>
+                  <a:srgbClr val="CCCCCC"/>
+                </a:solidFill>
+                <a:latin typeface="Courier New" pitchFamily="34" charset="0"/>
+                <a:ea typeface="Courier New" pitchFamily="34" charset="-122"/>
+                <a:cs typeface="Courier New" pitchFamily="34" charset="-120"/>
+              </a:rPr>
+              <a:t>: </a:t>
+            </a:r>
+            <a:pPr indent="0" marL="0">
+              <a:buNone/>
+            </a:pPr>
+            <a:r>
+              <a:rPr lang="en-US" sz="1300" dirty="0">
+                <a:solidFill>
+                  <a:srgbClr val="4FC1FF"/>
+                </a:solidFill>
+                <a:latin typeface="Courier New" pitchFamily="34" charset="0"/>
+                <a:ea typeface="Courier New" pitchFamily="34" charset="-122"/>
+                <a:cs typeface="Courier New" pitchFamily="34" charset="-120"/>
+              </a:rPr>
+              <a:t>#High</a:t>
+            </a:r>
+            <a:pPr indent="0" marL="0">
+              <a:buNone/>
+            </a:pPr>
+            <a:r>
+              <a:rPr lang="en-US" sz="1300" dirty="0">
+                <a:solidFill>
+                  <a:srgbClr val="CCCCCC"/>
+                </a:solidFill>
+                <a:latin typeface="Courier New" pitchFamily="34" charset="0"/>
+                <a:ea typeface="Courier New" pitchFamily="34" charset="-122"/>
+                <a:cs typeface="Courier New" pitchFamily="34" charset="-120"/>
+              </a:rPr>
+              <a:t> </a:t>
+            </a:r>
+            <a:pPr indent="0" marL="0">
+              <a:buNone/>
+            </a:pPr>
+            <a:r>
+              <a:rPr lang="en-US" sz="1300" dirty="0">
+                <a:solidFill>
+                  <a:srgbClr val="179FFF"/>
+                </a:solidFill>
+                <a:latin typeface="Courier New" pitchFamily="34" charset="0"/>
+                <a:ea typeface="Courier New" pitchFamily="34" charset="-122"/>
+                <a:cs typeface="Courier New" pitchFamily="34" charset="-120"/>
+              </a:rPr>
+              <a:t>}</a:t>
+            </a:r>
+            <a:pPr indent="0" marL="0">
+              <a:buNone/>
+            </a:pPr>
+            <a:r>
+              <a:rPr lang="en-US" sz="1300" dirty="0">
+                <a:solidFill>
+                  <a:srgbClr val="CCCCCC"/>
+                </a:solidFill>
+                <a:latin typeface="Courier New" pitchFamily="34" charset="0"/>
+                <a:ea typeface="Courier New" pitchFamily="34" charset="-122"/>
+                <a:cs typeface="Courier New" pitchFamily="34" charset="-120"/>
+              </a:rPr>
+              <a:t>,</a:t>
             </a:r>
             <a:endParaRPr lang="en-US" sz="1300" dirty="0"/>
           </a:p>
@@ -8595,13 +10863,125 @@
             <a:r>
               <a:rPr lang="en-US" sz="1300" dirty="0">
                 <a:solidFill>
-                  <a:srgbClr val="EAECEE"/>
-                </a:solidFill>
-                <a:latin typeface="Courier New" pitchFamily="34" charset="0"/>
-                <a:ea typeface="Courier New" pitchFamily="34" charset="-122"/>
-                <a:cs typeface="Courier New" pitchFamily="34" charset="-120"/>
-              </a:rPr>
-              <a:t>    { Value: qtdeDisponivel },</a:t>
+                  <a:srgbClr val="CCCCCC"/>
+                </a:solidFill>
+                <a:latin typeface="Courier New" pitchFamily="34" charset="0"/>
+                <a:ea typeface="Courier New" pitchFamily="34" charset="-122"/>
+                <a:cs typeface="Courier New" pitchFamily="34" charset="-120"/>
+              </a:rPr>
+              <a:t>    </a:t>
+            </a:r>
+            <a:pPr indent="0" marL="0">
+              <a:buNone/>
+            </a:pPr>
+            <a:r>
+              <a:rPr lang="en-US" sz="1300" dirty="0">
+                <a:solidFill>
+                  <a:srgbClr val="179FFF"/>
+                </a:solidFill>
+                <a:latin typeface="Courier New" pitchFamily="34" charset="0"/>
+                <a:ea typeface="Courier New" pitchFamily="34" charset="-122"/>
+                <a:cs typeface="Courier New" pitchFamily="34" charset="-120"/>
+              </a:rPr>
+              <a:t>{</a:t>
+            </a:r>
+            <a:pPr indent="0" marL="0">
+              <a:buNone/>
+            </a:pPr>
+            <a:r>
+              <a:rPr lang="en-US" sz="1300" dirty="0">
+                <a:solidFill>
+                  <a:srgbClr val="CCCCCC"/>
+                </a:solidFill>
+                <a:latin typeface="Courier New" pitchFamily="34" charset="0"/>
+                <a:ea typeface="Courier New" pitchFamily="34" charset="-122"/>
+                <a:cs typeface="Courier New" pitchFamily="34" charset="-120"/>
+              </a:rPr>
+              <a:t> </a:t>
+            </a:r>
+            <a:pPr indent="0" marL="0">
+              <a:buNone/>
+            </a:pPr>
+            <a:r>
+              <a:rPr lang="en-US" sz="1300" dirty="0">
+                <a:solidFill>
+                  <a:srgbClr val="4EC9B0"/>
+                </a:solidFill>
+                <a:latin typeface="Courier New" pitchFamily="34" charset="0"/>
+                <a:ea typeface="Courier New" pitchFamily="34" charset="-122"/>
+                <a:cs typeface="Courier New" pitchFamily="34" charset="-120"/>
+              </a:rPr>
+              <a:t>Value</a:t>
+            </a:r>
+            <a:pPr indent="0" marL="0">
+              <a:buNone/>
+            </a:pPr>
+            <a:r>
+              <a:rPr lang="en-US" sz="1300" dirty="0">
+                <a:solidFill>
+                  <a:srgbClr val="CCCCCC"/>
+                </a:solidFill>
+                <a:latin typeface="Courier New" pitchFamily="34" charset="0"/>
+                <a:ea typeface="Courier New" pitchFamily="34" charset="-122"/>
+                <a:cs typeface="Courier New" pitchFamily="34" charset="-120"/>
+              </a:rPr>
+              <a:t>: </a:t>
+            </a:r>
+            <a:pPr indent="0" marL="0">
+              <a:buNone/>
+            </a:pPr>
+            <a:r>
+              <a:rPr lang="en-US" sz="1300" dirty="0">
+                <a:solidFill>
+                  <a:srgbClr val="9CDCFE"/>
+                </a:solidFill>
+                <a:latin typeface="Courier New" pitchFamily="34" charset="0"/>
+                <a:ea typeface="Courier New" pitchFamily="34" charset="-122"/>
+                <a:cs typeface="Courier New" pitchFamily="34" charset="-120"/>
+              </a:rPr>
+              <a:t>qtdeDisponivel</a:t>
+            </a:r>
+            <a:pPr indent="0" marL="0">
+              <a:buNone/>
+            </a:pPr>
+            <a:r>
+              <a:rPr lang="en-US" sz="1300" dirty="0">
+                <a:solidFill>
+                  <a:srgbClr val="CCCCCC"/>
+                </a:solidFill>
+                <a:latin typeface="Courier New" pitchFamily="34" charset="0"/>
+                <a:ea typeface="Courier New" pitchFamily="34" charset="-122"/>
+                <a:cs typeface="Courier New" pitchFamily="34" charset="-120"/>
+              </a:rPr>
+              <a:t> </a:t>
+            </a:r>
+            <a:pPr indent="0" marL="0">
+              <a:buNone/>
+            </a:pPr>
+            <a:r>
+              <a:rPr lang="en-US" sz="1300" dirty="0">
+                <a:solidFill>
+                  <a:srgbClr val="179FFF"/>
+                </a:solidFill>
+                <a:latin typeface="Courier New" pitchFamily="34" charset="0"/>
+                <a:ea typeface="Courier New" pitchFamily="34" charset="-122"/>
+                <a:cs typeface="Courier New" pitchFamily="34" charset="-120"/>
+              </a:rPr>
+              <a:t>}</a:t>
+            </a:r>
+            <a:pPr indent="0" marL="0">
+              <a:buNone/>
+            </a:pPr>
+            <a:r>
+              <a:rPr lang="en-US" sz="1300" dirty="0">
+                <a:solidFill>
+                  <a:srgbClr val="CCCCCC"/>
+                </a:solidFill>
+                <a:latin typeface="Courier New" pitchFamily="34" charset="0"/>
+                <a:ea typeface="Courier New" pitchFamily="34" charset="-122"/>
+                <a:cs typeface="Courier New" pitchFamily="34" charset="-120"/>
+              </a:rPr>
+              <a:t>,</a:t>
             </a:r>
             <a:endParaRPr lang="en-US" sz="1300" dirty="0"/>
           </a:p>
@@ -8612,13 +10992,97 @@
             <a:r>
               <a:rPr lang="en-US" sz="1300" dirty="0">
                 <a:solidFill>
-                  <a:srgbClr val="EAECEE"/>
-                </a:solidFill>
-                <a:latin typeface="Courier New" pitchFamily="34" charset="0"/>
-                <a:ea typeface="Courier New" pitchFamily="34" charset="-122"/>
-                <a:cs typeface="Courier New" pitchFamily="34" charset="-120"/>
-              </a:rPr>
-              <a:t>    { Value: statusEstoque_code,</a:t>
+                  <a:srgbClr val="CCCCCC"/>
+                </a:solidFill>
+                <a:latin typeface="Courier New" pitchFamily="34" charset="0"/>
+                <a:ea typeface="Courier New" pitchFamily="34" charset="-122"/>
+                <a:cs typeface="Courier New" pitchFamily="34" charset="-120"/>
+              </a:rPr>
+              <a:t>    </a:t>
+            </a:r>
+            <a:pPr indent="0" marL="0">
+              <a:buNone/>
+            </a:pPr>
+            <a:r>
+              <a:rPr lang="en-US" sz="1300" dirty="0">
+                <a:solidFill>
+                  <a:srgbClr val="179FFF"/>
+                </a:solidFill>
+                <a:latin typeface="Courier New" pitchFamily="34" charset="0"/>
+                <a:ea typeface="Courier New" pitchFamily="34" charset="-122"/>
+                <a:cs typeface="Courier New" pitchFamily="34" charset="-120"/>
+              </a:rPr>
+              <a:t>{</a:t>
+            </a:r>
+            <a:pPr indent="0" marL="0">
+              <a:buNone/>
+            </a:pPr>
+            <a:r>
+              <a:rPr lang="en-US" sz="1300" dirty="0">
+                <a:solidFill>
+                  <a:srgbClr val="CCCCCC"/>
+                </a:solidFill>
+                <a:latin typeface="Courier New" pitchFamily="34" charset="0"/>
+                <a:ea typeface="Courier New" pitchFamily="34" charset="-122"/>
+                <a:cs typeface="Courier New" pitchFamily="34" charset="-120"/>
+              </a:rPr>
+              <a:t> </a:t>
+            </a:r>
+            <a:pPr indent="0" marL="0">
+              <a:buNone/>
+            </a:pPr>
+            <a:r>
+              <a:rPr lang="en-US" sz="1300" dirty="0">
+                <a:solidFill>
+                  <a:srgbClr val="4EC9B0"/>
+                </a:solidFill>
+                <a:latin typeface="Courier New" pitchFamily="34" charset="0"/>
+                <a:ea typeface="Courier New" pitchFamily="34" charset="-122"/>
+                <a:cs typeface="Courier New" pitchFamily="34" charset="-120"/>
+              </a:rPr>
+              <a:t>Value</a:t>
+            </a:r>
+            <a:pPr indent="0" marL="0">
+              <a:buNone/>
+            </a:pPr>
+            <a:r>
+              <a:rPr lang="en-US" sz="1300" dirty="0">
+                <a:solidFill>
+                  <a:srgbClr val="CCCCCC"/>
+                </a:solidFill>
+                <a:latin typeface="Courier New" pitchFamily="34" charset="0"/>
+                <a:ea typeface="Courier New" pitchFamily="34" charset="-122"/>
+                <a:cs typeface="Courier New" pitchFamily="34" charset="-120"/>
+              </a:rPr>
+              <a:t>: </a:t>
+            </a:r>
+            <a:pPr indent="0" marL="0">
+              <a:buNone/>
+            </a:pPr>
+            <a:r>
+              <a:rPr lang="en-US" sz="1300" dirty="0">
+                <a:solidFill>
+                  <a:srgbClr val="9CDCFE"/>
+                </a:solidFill>
+                <a:latin typeface="Courier New" pitchFamily="34" charset="0"/>
+                <a:ea typeface="Courier New" pitchFamily="34" charset="-122"/>
+                <a:cs typeface="Courier New" pitchFamily="34" charset="-120"/>
+              </a:rPr>
+              <a:t>statusEstoque_code</a:t>
+            </a:r>
+            <a:pPr indent="0" marL="0">
+              <a:buNone/>
+            </a:pPr>
+            <a:r>
+              <a:rPr lang="en-US" sz="1300" dirty="0">
+                <a:solidFill>
+                  <a:srgbClr val="CCCCCC"/>
+                </a:solidFill>
+                <a:latin typeface="Courier New" pitchFamily="34" charset="0"/>
+                <a:ea typeface="Courier New" pitchFamily="34" charset="-122"/>
+                <a:cs typeface="Courier New" pitchFamily="34" charset="-120"/>
+              </a:rPr>
+              <a:t>,</a:t>
             </a:r>
             <a:endParaRPr lang="en-US" sz="1300" dirty="0"/>
           </a:p>
@@ -8629,13 +11093,111 @@
             <a:r>
               <a:rPr lang="en-US" sz="1300" dirty="0">
                 <a:solidFill>
-                  <a:srgbClr val="EAECEE"/>
-                </a:solidFill>
-                <a:latin typeface="Courier New" pitchFamily="34" charset="0"/>
-                <a:ea typeface="Courier New" pitchFamily="34" charset="-122"/>
-                <a:cs typeface="Courier New" pitchFamily="34" charset="-120"/>
-              </a:rPr>
-              <a:t>      Criticality: statusEstoque.criticality }</a:t>
+                  <a:srgbClr val="CCCCCC"/>
+                </a:solidFill>
+                <a:latin typeface="Courier New" pitchFamily="34" charset="0"/>
+                <a:ea typeface="Courier New" pitchFamily="34" charset="-122"/>
+                <a:cs typeface="Courier New" pitchFamily="34" charset="-120"/>
+              </a:rPr>
+              <a:t>      </a:t>
+            </a:r>
+            <a:pPr indent="0" marL="0">
+              <a:buNone/>
+            </a:pPr>
+            <a:r>
+              <a:rPr lang="en-US" sz="1300" dirty="0">
+                <a:solidFill>
+                  <a:srgbClr val="4EC9B0"/>
+                </a:solidFill>
+                <a:latin typeface="Courier New" pitchFamily="34" charset="0"/>
+                <a:ea typeface="Courier New" pitchFamily="34" charset="-122"/>
+                <a:cs typeface="Courier New" pitchFamily="34" charset="-120"/>
+              </a:rPr>
+              <a:t>Criticality</a:t>
+            </a:r>
+            <a:pPr indent="0" marL="0">
+              <a:buNone/>
+            </a:pPr>
+            <a:r>
+              <a:rPr lang="en-US" sz="1300" dirty="0">
+                <a:solidFill>
+                  <a:srgbClr val="CCCCCC"/>
+                </a:solidFill>
+                <a:latin typeface="Courier New" pitchFamily="34" charset="0"/>
+                <a:ea typeface="Courier New" pitchFamily="34" charset="-122"/>
+                <a:cs typeface="Courier New" pitchFamily="34" charset="-120"/>
+              </a:rPr>
+              <a:t>: </a:t>
+            </a:r>
+            <a:pPr indent="0" marL="0">
+              <a:buNone/>
+            </a:pPr>
+            <a:r>
+              <a:rPr lang="en-US" sz="1300" dirty="0">
+                <a:solidFill>
+                  <a:srgbClr val="9CDCFE"/>
+                </a:solidFill>
+                <a:latin typeface="Courier New" pitchFamily="34" charset="0"/>
+                <a:ea typeface="Courier New" pitchFamily="34" charset="-122"/>
+                <a:cs typeface="Courier New" pitchFamily="34" charset="-120"/>
+              </a:rPr>
+              <a:t>statusEstoque</a:t>
+            </a:r>
+            <a:pPr indent="0" marL="0">
+              <a:buNone/>
+            </a:pPr>
+            <a:r>
+              <a:rPr lang="en-US" sz="1300" dirty="0">
+                <a:solidFill>
+                  <a:srgbClr val="CCCCCC"/>
+                </a:solidFill>
+                <a:latin typeface="Courier New" pitchFamily="34" charset="0"/>
+                <a:ea typeface="Courier New" pitchFamily="34" charset="-122"/>
+                <a:cs typeface="Courier New" pitchFamily="34" charset="-120"/>
+              </a:rPr>
+              <a:t>.</a:t>
+            </a:r>
+            <a:pPr indent="0" marL="0">
+              <a:buNone/>
+            </a:pPr>
+            <a:r>
+              <a:rPr lang="en-US" sz="1300" dirty="0">
+                <a:solidFill>
+                  <a:srgbClr val="9CDCFE"/>
+                </a:solidFill>
+                <a:latin typeface="Courier New" pitchFamily="34" charset="0"/>
+                <a:ea typeface="Courier New" pitchFamily="34" charset="-122"/>
+                <a:cs typeface="Courier New" pitchFamily="34" charset="-120"/>
+              </a:rPr>
+              <a:t>criticality</a:t>
+            </a:r>
+            <a:pPr indent="0" marL="0">
+              <a:buNone/>
+            </a:pPr>
+            <a:r>
+              <a:rPr lang="en-US" sz="1300" dirty="0">
+                <a:solidFill>
+                  <a:srgbClr val="CCCCCC"/>
+                </a:solidFill>
+                <a:latin typeface="Courier New" pitchFamily="34" charset="0"/>
+                <a:ea typeface="Courier New" pitchFamily="34" charset="-122"/>
+                <a:cs typeface="Courier New" pitchFamily="34" charset="-120"/>
+              </a:rPr>
+              <a:t> </a:t>
+            </a:r>
+            <a:pPr indent="0" marL="0">
+              <a:buNone/>
+            </a:pPr>
+            <a:r>
+              <a:rPr lang="en-US" sz="1300" dirty="0">
+                <a:solidFill>
+                  <a:srgbClr val="179FFF"/>
+                </a:solidFill>
+                <a:latin typeface="Courier New" pitchFamily="34" charset="0"/>
+                <a:ea typeface="Courier New" pitchFamily="34" charset="-122"/>
+                <a:cs typeface="Courier New" pitchFamily="34" charset="-120"/>
+              </a:rPr>
+              <a:t>}</a:t>
             </a:r>
             <a:endParaRPr lang="en-US" sz="1300" dirty="0"/>
           </a:p>
@@ -8646,13 +11208,27 @@
             <a:r>
               <a:rPr lang="en-US" sz="1300" dirty="0">
                 <a:solidFill>
-                  <a:srgbClr val="EAECEE"/>
-                </a:solidFill>
-                <a:latin typeface="Courier New" pitchFamily="34" charset="0"/>
-                <a:ea typeface="Courier New" pitchFamily="34" charset="-122"/>
-                <a:cs typeface="Courier New" pitchFamily="34" charset="-120"/>
-              </a:rPr>
-              <a:t>  ]</a:t>
+                  <a:srgbClr val="CCCCCC"/>
+                </a:solidFill>
+                <a:latin typeface="Courier New" pitchFamily="34" charset="0"/>
+                <a:ea typeface="Courier New" pitchFamily="34" charset="-122"/>
+                <a:cs typeface="Courier New" pitchFamily="34" charset="-120"/>
+              </a:rPr>
+              <a:t>  </a:t>
+            </a:r>
+            <a:pPr indent="0" marL="0">
+              <a:buNone/>
+            </a:pPr>
+            <a:r>
+              <a:rPr lang="en-US" sz="1300" dirty="0">
+                <a:solidFill>
+                  <a:srgbClr val="DA70D6"/>
+                </a:solidFill>
+                <a:latin typeface="Courier New" pitchFamily="34" charset="0"/>
+                <a:ea typeface="Courier New" pitchFamily="34" charset="-122"/>
+                <a:cs typeface="Courier New" pitchFamily="34" charset="-120"/>
+              </a:rPr>
+              <a:t>]</a:t>
             </a:r>
             <a:endParaRPr lang="en-US" sz="1300" dirty="0"/>
           </a:p>
@@ -8663,13 +11239,27 @@
             <a:r>
               <a:rPr lang="en-US" sz="1300" dirty="0">
                 <a:solidFill>
-                  <a:srgbClr val="EAECEE"/>
-                </a:solidFill>
-                <a:latin typeface="Courier New" pitchFamily="34" charset="0"/>
-                <a:ea typeface="Courier New" pitchFamily="34" charset="-122"/>
-                <a:cs typeface="Courier New" pitchFamily="34" charset="-120"/>
-              </a:rPr>
-              <a:t>);</a:t>
+                  <a:srgbClr val="FFD700"/>
+                </a:solidFill>
+                <a:latin typeface="Courier New" pitchFamily="34" charset="0"/>
+                <a:ea typeface="Courier New" pitchFamily="34" charset="-122"/>
+                <a:cs typeface="Courier New" pitchFamily="34" charset="-120"/>
+              </a:rPr>
+              <a:t>)</a:t>
+            </a:r>
+            <a:pPr indent="0" marL="0">
+              <a:buNone/>
+            </a:pPr>
+            <a:r>
+              <a:rPr lang="en-US" sz="1300" dirty="0">
+                <a:solidFill>
+                  <a:srgbClr val="CCCCCC"/>
+                </a:solidFill>
+                <a:latin typeface="Courier New" pitchFamily="34" charset="0"/>
+                <a:ea typeface="Courier New" pitchFamily="34" charset="-122"/>
+                <a:cs typeface="Courier New" pitchFamily="34" charset="-120"/>
+              </a:rPr>
+              <a:t>;</a:t>
             </a:r>
             <a:endParaRPr lang="en-US" sz="1300" dirty="0"/>
           </a:p>
@@ -9072,9 +11662,14 @@
             </a:avLst>
           </a:prstGeom>
           <a:solidFill>
-            <a:srgbClr val="1D2D3E"/>
+            <a:srgbClr val="1F1F1F"/>
           </a:solidFill>
-          <a:ln/>
+          <a:ln w="9525">
+            <a:solidFill>
+              <a:srgbClr val="2B2B2B"/>
+            </a:solidFill>
+            <a:prstDash val="solid"/>
+          </a:ln>
           <a:effectLst>
             <a:outerShdw sx="100000" sy="100000" kx="0" ky="0" algn="bl" rotWithShape="0" blurRad="101600" dist="25400" dir="5400000">
               <a:srgbClr val="223649">
@@ -9111,13 +11706,83 @@
             <a:r>
               <a:rPr lang="en-US" sz="1200" dirty="0">
                 <a:solidFill>
-                  <a:srgbClr val="EAECEE"/>
-                </a:solidFill>
-                <a:latin typeface="Courier New" pitchFamily="34" charset="0"/>
-                <a:ea typeface="Courier New" pitchFamily="34" charset="-122"/>
-                <a:cs typeface="Courier New" pitchFamily="34" charset="-120"/>
-              </a:rPr>
-              <a:t>{ $Type : 'UI.ReferenceFacet',</a:t>
+                  <a:srgbClr val="FFD700"/>
+                </a:solidFill>
+                <a:latin typeface="Courier New" pitchFamily="34" charset="0"/>
+                <a:ea typeface="Courier New" pitchFamily="34" charset="-122"/>
+                <a:cs typeface="Courier New" pitchFamily="34" charset="-120"/>
+              </a:rPr>
+              <a:t>{</a:t>
+            </a:r>
+            <a:pPr indent="0" marL="0">
+              <a:buNone/>
+            </a:pPr>
+            <a:r>
+              <a:rPr lang="en-US" sz="1200" dirty="0">
+                <a:solidFill>
+                  <a:srgbClr val="CCCCCC"/>
+                </a:solidFill>
+                <a:latin typeface="Courier New" pitchFamily="34" charset="0"/>
+                <a:ea typeface="Courier New" pitchFamily="34" charset="-122"/>
+                <a:cs typeface="Courier New" pitchFamily="34" charset="-120"/>
+              </a:rPr>
+              <a:t> </a:t>
+            </a:r>
+            <a:pPr indent="0" marL="0">
+              <a:buNone/>
+            </a:pPr>
+            <a:r>
+              <a:rPr lang="en-US" sz="1200" dirty="0">
+                <a:solidFill>
+                  <a:srgbClr val="569CD6"/>
+                </a:solidFill>
+                <a:latin typeface="Courier New" pitchFamily="34" charset="0"/>
+                <a:ea typeface="Courier New" pitchFamily="34" charset="-122"/>
+                <a:cs typeface="Courier New" pitchFamily="34" charset="-120"/>
+              </a:rPr>
+              <a:t>$Type</a:t>
+            </a:r>
+            <a:pPr indent="0" marL="0">
+              <a:buNone/>
+            </a:pPr>
+            <a:r>
+              <a:rPr lang="en-US" sz="1200" dirty="0">
+                <a:solidFill>
+                  <a:srgbClr val="CCCCCC"/>
+                </a:solidFill>
+                <a:latin typeface="Courier New" pitchFamily="34" charset="0"/>
+                <a:ea typeface="Courier New" pitchFamily="34" charset="-122"/>
+                <a:cs typeface="Courier New" pitchFamily="34" charset="-120"/>
+              </a:rPr>
+              <a:t> : </a:t>
+            </a:r>
+            <a:pPr indent="0" marL="0">
+              <a:buNone/>
+            </a:pPr>
+            <a:r>
+              <a:rPr lang="en-US" sz="1200" dirty="0">
+                <a:solidFill>
+                  <a:srgbClr val="CE9178"/>
+                </a:solidFill>
+                <a:latin typeface="Courier New" pitchFamily="34" charset="0"/>
+                <a:ea typeface="Courier New" pitchFamily="34" charset="-122"/>
+                <a:cs typeface="Courier New" pitchFamily="34" charset="-120"/>
+              </a:rPr>
+              <a:t>'UI.ReferenceFacet'</a:t>
+            </a:r>
+            <a:pPr indent="0" marL="0">
+              <a:buNone/>
+            </a:pPr>
+            <a:r>
+              <a:rPr lang="en-US" sz="1200" dirty="0">
+                <a:solidFill>
+                  <a:srgbClr val="CCCCCC"/>
+                </a:solidFill>
+                <a:latin typeface="Courier New" pitchFamily="34" charset="0"/>
+                <a:ea typeface="Courier New" pitchFamily="34" charset="-122"/>
+                <a:cs typeface="Courier New" pitchFamily="34" charset="-120"/>
+              </a:rPr>
+              <a:t>,</a:t>
             </a:r>
             <a:endParaRPr lang="en-US" sz="1200" dirty="0"/>
           </a:p>
@@ -9128,13 +11793,69 @@
             <a:r>
               <a:rPr lang="en-US" sz="1200" dirty="0">
                 <a:solidFill>
-                  <a:srgbClr val="EAECEE"/>
-                </a:solidFill>
-                <a:latin typeface="Courier New" pitchFamily="34" charset="0"/>
-                <a:ea typeface="Courier New" pitchFamily="34" charset="-122"/>
-                <a:cs typeface="Courier New" pitchFamily="34" charset="-120"/>
-              </a:rPr>
-              <a:t>  Label : 'Itens',</a:t>
+                  <a:srgbClr val="CCCCCC"/>
+                </a:solidFill>
+                <a:latin typeface="Courier New" pitchFamily="34" charset="0"/>
+                <a:ea typeface="Courier New" pitchFamily="34" charset="-122"/>
+                <a:cs typeface="Courier New" pitchFamily="34" charset="-120"/>
+              </a:rPr>
+              <a:t>  </a:t>
+            </a:r>
+            <a:pPr indent="0" marL="0">
+              <a:buNone/>
+            </a:pPr>
+            <a:r>
+              <a:rPr lang="en-US" sz="1200" dirty="0">
+                <a:solidFill>
+                  <a:srgbClr val="4EC9B0"/>
+                </a:solidFill>
+                <a:latin typeface="Courier New" pitchFamily="34" charset="0"/>
+                <a:ea typeface="Courier New" pitchFamily="34" charset="-122"/>
+                <a:cs typeface="Courier New" pitchFamily="34" charset="-120"/>
+              </a:rPr>
+              <a:t>Label</a:t>
+            </a:r>
+            <a:pPr indent="0" marL="0">
+              <a:buNone/>
+            </a:pPr>
+            <a:r>
+              <a:rPr lang="en-US" sz="1200" dirty="0">
+                <a:solidFill>
+                  <a:srgbClr val="CCCCCC"/>
+                </a:solidFill>
+                <a:latin typeface="Courier New" pitchFamily="34" charset="0"/>
+                <a:ea typeface="Courier New" pitchFamily="34" charset="-122"/>
+                <a:cs typeface="Courier New" pitchFamily="34" charset="-120"/>
+              </a:rPr>
+              <a:t> : </a:t>
+            </a:r>
+            <a:pPr indent="0" marL="0">
+              <a:buNone/>
+            </a:pPr>
+            <a:r>
+              <a:rPr lang="en-US" sz="1200" dirty="0">
+                <a:solidFill>
+                  <a:srgbClr val="CE9178"/>
+                </a:solidFill>
+                <a:latin typeface="Courier New" pitchFamily="34" charset="0"/>
+                <a:ea typeface="Courier New" pitchFamily="34" charset="-122"/>
+                <a:cs typeface="Courier New" pitchFamily="34" charset="-120"/>
+              </a:rPr>
+              <a:t>'Itens'</a:t>
+            </a:r>
+            <a:pPr indent="0" marL="0">
+              <a:buNone/>
+            </a:pPr>
+            <a:r>
+              <a:rPr lang="en-US" sz="1200" dirty="0">
+                <a:solidFill>
+                  <a:srgbClr val="CCCCCC"/>
+                </a:solidFill>
+                <a:latin typeface="Courier New" pitchFamily="34" charset="0"/>
+                <a:ea typeface="Courier New" pitchFamily="34" charset="-122"/>
+                <a:cs typeface="Courier New" pitchFamily="34" charset="-120"/>
+              </a:rPr>
+              <a:t>,</a:t>
             </a:r>
             <a:endParaRPr lang="en-US" sz="1200" dirty="0"/>
           </a:p>
@@ -9145,13 +11866,69 @@
             <a:r>
               <a:rPr lang="en-US" sz="1200" dirty="0">
                 <a:solidFill>
-                  <a:srgbClr val="EAECEE"/>
-                </a:solidFill>
-                <a:latin typeface="Courier New" pitchFamily="34" charset="0"/>
-                <a:ea typeface="Courier New" pitchFamily="34" charset="-122"/>
-                <a:cs typeface="Courier New" pitchFamily="34" charset="-120"/>
-              </a:rPr>
-              <a:t>  Target: 'itens/@UI.LineItem',</a:t>
+                  <a:srgbClr val="CCCCCC"/>
+                </a:solidFill>
+                <a:latin typeface="Courier New" pitchFamily="34" charset="0"/>
+                <a:ea typeface="Courier New" pitchFamily="34" charset="-122"/>
+                <a:cs typeface="Courier New" pitchFamily="34" charset="-120"/>
+              </a:rPr>
+              <a:t>  </a:t>
+            </a:r>
+            <a:pPr indent="0" marL="0">
+              <a:buNone/>
+            </a:pPr>
+            <a:r>
+              <a:rPr lang="en-US" sz="1200" dirty="0">
+                <a:solidFill>
+                  <a:srgbClr val="4EC9B0"/>
+                </a:solidFill>
+                <a:latin typeface="Courier New" pitchFamily="34" charset="0"/>
+                <a:ea typeface="Courier New" pitchFamily="34" charset="-122"/>
+                <a:cs typeface="Courier New" pitchFamily="34" charset="-120"/>
+              </a:rPr>
+              <a:t>Target</a:t>
+            </a:r>
+            <a:pPr indent="0" marL="0">
+              <a:buNone/>
+            </a:pPr>
+            <a:r>
+              <a:rPr lang="en-US" sz="1200" dirty="0">
+                <a:solidFill>
+                  <a:srgbClr val="CCCCCC"/>
+                </a:solidFill>
+                <a:latin typeface="Courier New" pitchFamily="34" charset="0"/>
+                <a:ea typeface="Courier New" pitchFamily="34" charset="-122"/>
+                <a:cs typeface="Courier New" pitchFamily="34" charset="-120"/>
+              </a:rPr>
+              <a:t>: </a:t>
+            </a:r>
+            <a:pPr indent="0" marL="0">
+              <a:buNone/>
+            </a:pPr>
+            <a:r>
+              <a:rPr lang="en-US" sz="1200" dirty="0">
+                <a:solidFill>
+                  <a:srgbClr val="CE9178"/>
+                </a:solidFill>
+                <a:latin typeface="Courier New" pitchFamily="34" charset="0"/>
+                <a:ea typeface="Courier New" pitchFamily="34" charset="-122"/>
+                <a:cs typeface="Courier New" pitchFamily="34" charset="-120"/>
+              </a:rPr>
+              <a:t>'itens/@UI.LineItem'</a:t>
+            </a:r>
+            <a:pPr indent="0" marL="0">
+              <a:buNone/>
+            </a:pPr>
+            <a:r>
+              <a:rPr lang="en-US" sz="1200" dirty="0">
+                <a:solidFill>
+                  <a:srgbClr val="CCCCCC"/>
+                </a:solidFill>
+                <a:latin typeface="Courier New" pitchFamily="34" charset="0"/>
+                <a:ea typeface="Courier New" pitchFamily="34" charset="-122"/>
+                <a:cs typeface="Courier New" pitchFamily="34" charset="-120"/>
+              </a:rPr>
+              <a:t>,</a:t>
             </a:r>
             <a:endParaRPr lang="en-US" sz="1200" dirty="0"/>
           </a:p>
@@ -9162,13 +11939,97 @@
             <a:r>
               <a:rPr lang="en-US" sz="1200" dirty="0">
                 <a:solidFill>
-                  <a:srgbClr val="EAECEE"/>
-                </a:solidFill>
-                <a:latin typeface="Courier New" pitchFamily="34" charset="0"/>
-                <a:ea typeface="Courier New" pitchFamily="34" charset="-122"/>
-                <a:cs typeface="Courier New" pitchFamily="34" charset="-120"/>
-              </a:rPr>
-              <a:t>  ![@UI.Hidden]: encerrado },</a:t>
+                  <a:srgbClr val="CCCCCC"/>
+                </a:solidFill>
+                <a:latin typeface="Courier New" pitchFamily="34" charset="0"/>
+                <a:ea typeface="Courier New" pitchFamily="34" charset="-122"/>
+                <a:cs typeface="Courier New" pitchFamily="34" charset="-120"/>
+              </a:rPr>
+              <a:t>  </a:t>
+            </a:r>
+            <a:pPr indent="0" marL="0">
+              <a:buNone/>
+            </a:pPr>
+            <a:r>
+              <a:rPr lang="en-US" sz="1200" dirty="0">
+                <a:solidFill>
+                  <a:srgbClr val="DCDCAA"/>
+                </a:solidFill>
+                <a:latin typeface="Courier New" pitchFamily="34" charset="0"/>
+                <a:ea typeface="Courier New" pitchFamily="34" charset="-122"/>
+                <a:cs typeface="Courier New" pitchFamily="34" charset="-120"/>
+              </a:rPr>
+              <a:t>![@UI.Hidden]</a:t>
+            </a:r>
+            <a:pPr indent="0" marL="0">
+              <a:buNone/>
+            </a:pPr>
+            <a:r>
+              <a:rPr lang="en-US" sz="1200" dirty="0">
+                <a:solidFill>
+                  <a:srgbClr val="CCCCCC"/>
+                </a:solidFill>
+                <a:latin typeface="Courier New" pitchFamily="34" charset="0"/>
+                <a:ea typeface="Courier New" pitchFamily="34" charset="-122"/>
+                <a:cs typeface="Courier New" pitchFamily="34" charset="-120"/>
+              </a:rPr>
+              <a:t>: </a:t>
+            </a:r>
+            <a:pPr indent="0" marL="0">
+              <a:buNone/>
+            </a:pPr>
+            <a:r>
+              <a:rPr lang="en-US" sz="1200" dirty="0">
+                <a:solidFill>
+                  <a:srgbClr val="9CDCFE"/>
+                </a:solidFill>
+                <a:latin typeface="Courier New" pitchFamily="34" charset="0"/>
+                <a:ea typeface="Courier New" pitchFamily="34" charset="-122"/>
+                <a:cs typeface="Courier New" pitchFamily="34" charset="-120"/>
+              </a:rPr>
+              <a:t>encerrado</a:t>
+            </a:r>
+            <a:pPr indent="0" marL="0">
+              <a:buNone/>
+            </a:pPr>
+            <a:r>
+              <a:rPr lang="en-US" sz="1200" dirty="0">
+                <a:solidFill>
+                  <a:srgbClr val="CCCCCC"/>
+                </a:solidFill>
+                <a:latin typeface="Courier New" pitchFamily="34" charset="0"/>
+                <a:ea typeface="Courier New" pitchFamily="34" charset="-122"/>
+                <a:cs typeface="Courier New" pitchFamily="34" charset="-120"/>
+              </a:rPr>
+              <a:t> </a:t>
+            </a:r>
+            <a:pPr indent="0" marL="0">
+              <a:buNone/>
+            </a:pPr>
+            <a:r>
+              <a:rPr lang="en-US" sz="1200" dirty="0">
+                <a:solidFill>
+                  <a:srgbClr val="FFD700"/>
+                </a:solidFill>
+                <a:latin typeface="Courier New" pitchFamily="34" charset="0"/>
+                <a:ea typeface="Courier New" pitchFamily="34" charset="-122"/>
+                <a:cs typeface="Courier New" pitchFamily="34" charset="-120"/>
+              </a:rPr>
+              <a:t>}</a:t>
+            </a:r>
+            <a:pPr indent="0" marL="0">
+              <a:buNone/>
+            </a:pPr>
+            <a:r>
+              <a:rPr lang="en-US" sz="1200" dirty="0">
+                <a:solidFill>
+                  <a:srgbClr val="CCCCCC"/>
+                </a:solidFill>
+                <a:latin typeface="Courier New" pitchFamily="34" charset="0"/>
+                <a:ea typeface="Courier New" pitchFamily="34" charset="-122"/>
+                <a:cs typeface="Courier New" pitchFamily="34" charset="-120"/>
+              </a:rPr>
+              <a:t>,</a:t>
             </a:r>
             <a:endParaRPr lang="en-US" sz="1200" dirty="0"/>
           </a:p>
@@ -9179,13 +12040,83 @@
             <a:r>
               <a:rPr lang="en-US" sz="1200" dirty="0">
                 <a:solidFill>
-                  <a:srgbClr val="EAECEE"/>
-                </a:solidFill>
-                <a:latin typeface="Courier New" pitchFamily="34" charset="0"/>
-                <a:ea typeface="Courier New" pitchFamily="34" charset="-122"/>
-                <a:cs typeface="Courier New" pitchFamily="34" charset="-120"/>
-              </a:rPr>
-              <a:t>{ $Type : 'UI.ReferenceFacet',</a:t>
+                  <a:srgbClr val="FFD700"/>
+                </a:solidFill>
+                <a:latin typeface="Courier New" pitchFamily="34" charset="0"/>
+                <a:ea typeface="Courier New" pitchFamily="34" charset="-122"/>
+                <a:cs typeface="Courier New" pitchFamily="34" charset="-120"/>
+              </a:rPr>
+              <a:t>{</a:t>
+            </a:r>
+            <a:pPr indent="0" marL="0">
+              <a:buNone/>
+            </a:pPr>
+            <a:r>
+              <a:rPr lang="en-US" sz="1200" dirty="0">
+                <a:solidFill>
+                  <a:srgbClr val="CCCCCC"/>
+                </a:solidFill>
+                <a:latin typeface="Courier New" pitchFamily="34" charset="0"/>
+                <a:ea typeface="Courier New" pitchFamily="34" charset="-122"/>
+                <a:cs typeface="Courier New" pitchFamily="34" charset="-120"/>
+              </a:rPr>
+              <a:t> </a:t>
+            </a:r>
+            <a:pPr indent="0" marL="0">
+              <a:buNone/>
+            </a:pPr>
+            <a:r>
+              <a:rPr lang="en-US" sz="1200" dirty="0">
+                <a:solidFill>
+                  <a:srgbClr val="569CD6"/>
+                </a:solidFill>
+                <a:latin typeface="Courier New" pitchFamily="34" charset="0"/>
+                <a:ea typeface="Courier New" pitchFamily="34" charset="-122"/>
+                <a:cs typeface="Courier New" pitchFamily="34" charset="-120"/>
+              </a:rPr>
+              <a:t>$Type</a:t>
+            </a:r>
+            <a:pPr indent="0" marL="0">
+              <a:buNone/>
+            </a:pPr>
+            <a:r>
+              <a:rPr lang="en-US" sz="1200" dirty="0">
+                <a:solidFill>
+                  <a:srgbClr val="CCCCCC"/>
+                </a:solidFill>
+                <a:latin typeface="Courier New" pitchFamily="34" charset="0"/>
+                <a:ea typeface="Courier New" pitchFamily="34" charset="-122"/>
+                <a:cs typeface="Courier New" pitchFamily="34" charset="-120"/>
+              </a:rPr>
+              <a:t> : </a:t>
+            </a:r>
+            <a:pPr indent="0" marL="0">
+              <a:buNone/>
+            </a:pPr>
+            <a:r>
+              <a:rPr lang="en-US" sz="1200" dirty="0">
+                <a:solidFill>
+                  <a:srgbClr val="CE9178"/>
+                </a:solidFill>
+                <a:latin typeface="Courier New" pitchFamily="34" charset="0"/>
+                <a:ea typeface="Courier New" pitchFamily="34" charset="-122"/>
+                <a:cs typeface="Courier New" pitchFamily="34" charset="-120"/>
+              </a:rPr>
+              <a:t>'UI.ReferenceFacet'</a:t>
+            </a:r>
+            <a:pPr indent="0" marL="0">
+              <a:buNone/>
+            </a:pPr>
+            <a:r>
+              <a:rPr lang="en-US" sz="1200" dirty="0">
+                <a:solidFill>
+                  <a:srgbClr val="CCCCCC"/>
+                </a:solidFill>
+                <a:latin typeface="Courier New" pitchFamily="34" charset="0"/>
+                <a:ea typeface="Courier New" pitchFamily="34" charset="-122"/>
+                <a:cs typeface="Courier New" pitchFamily="34" charset="-120"/>
+              </a:rPr>
+              <a:t>,</a:t>
             </a:r>
             <a:endParaRPr lang="en-US" sz="1200" dirty="0"/>
           </a:p>
@@ -9196,13 +12127,69 @@
             <a:r>
               <a:rPr lang="en-US" sz="1200" dirty="0">
                 <a:solidFill>
-                  <a:srgbClr val="EAECEE"/>
-                </a:solidFill>
-                <a:latin typeface="Courier New" pitchFamily="34" charset="0"/>
-                <a:ea typeface="Courier New" pitchFamily="34" charset="-122"/>
-                <a:cs typeface="Courier New" pitchFamily="34" charset="-120"/>
-              </a:rPr>
-              <a:t>  Label : 'Itens',</a:t>
+                  <a:srgbClr val="CCCCCC"/>
+                </a:solidFill>
+                <a:latin typeface="Courier New" pitchFamily="34" charset="0"/>
+                <a:ea typeface="Courier New" pitchFamily="34" charset="-122"/>
+                <a:cs typeface="Courier New" pitchFamily="34" charset="-120"/>
+              </a:rPr>
+              <a:t>  </a:t>
+            </a:r>
+            <a:pPr indent="0" marL="0">
+              <a:buNone/>
+            </a:pPr>
+            <a:r>
+              <a:rPr lang="en-US" sz="1200" dirty="0">
+                <a:solidFill>
+                  <a:srgbClr val="4EC9B0"/>
+                </a:solidFill>
+                <a:latin typeface="Courier New" pitchFamily="34" charset="0"/>
+                <a:ea typeface="Courier New" pitchFamily="34" charset="-122"/>
+                <a:cs typeface="Courier New" pitchFamily="34" charset="-120"/>
+              </a:rPr>
+              <a:t>Label</a:t>
+            </a:r>
+            <a:pPr indent="0" marL="0">
+              <a:buNone/>
+            </a:pPr>
+            <a:r>
+              <a:rPr lang="en-US" sz="1200" dirty="0">
+                <a:solidFill>
+                  <a:srgbClr val="CCCCCC"/>
+                </a:solidFill>
+                <a:latin typeface="Courier New" pitchFamily="34" charset="0"/>
+                <a:ea typeface="Courier New" pitchFamily="34" charset="-122"/>
+                <a:cs typeface="Courier New" pitchFamily="34" charset="-120"/>
+              </a:rPr>
+              <a:t> : </a:t>
+            </a:r>
+            <a:pPr indent="0" marL="0">
+              <a:buNone/>
+            </a:pPr>
+            <a:r>
+              <a:rPr lang="en-US" sz="1200" dirty="0">
+                <a:solidFill>
+                  <a:srgbClr val="CE9178"/>
+                </a:solidFill>
+                <a:latin typeface="Courier New" pitchFamily="34" charset="0"/>
+                <a:ea typeface="Courier New" pitchFamily="34" charset="-122"/>
+                <a:cs typeface="Courier New" pitchFamily="34" charset="-120"/>
+              </a:rPr>
+              <a:t>'Itens'</a:t>
+            </a:r>
+            <a:pPr indent="0" marL="0">
+              <a:buNone/>
+            </a:pPr>
+            <a:r>
+              <a:rPr lang="en-US" sz="1200" dirty="0">
+                <a:solidFill>
+                  <a:srgbClr val="CCCCCC"/>
+                </a:solidFill>
+                <a:latin typeface="Courier New" pitchFamily="34" charset="0"/>
+                <a:ea typeface="Courier New" pitchFamily="34" charset="-122"/>
+                <a:cs typeface="Courier New" pitchFamily="34" charset="-120"/>
+              </a:rPr>
+              <a:t>,</a:t>
             </a:r>
             <a:endParaRPr lang="en-US" sz="1200" dirty="0"/>
           </a:p>
@@ -9213,13 +12200,69 @@
             <a:r>
               <a:rPr lang="en-US" sz="1200" dirty="0">
                 <a:solidFill>
-                  <a:srgbClr val="EAECEE"/>
-                </a:solidFill>
-                <a:latin typeface="Courier New" pitchFamily="34" charset="0"/>
-                <a:ea typeface="Courier New" pitchFamily="34" charset="-122"/>
-                <a:cs typeface="Courier New" pitchFamily="34" charset="-120"/>
-              </a:rPr>
-              <a:t>  Target: 'itensSnapshot/@UI.LineItem',</a:t>
+                  <a:srgbClr val="CCCCCC"/>
+                </a:solidFill>
+                <a:latin typeface="Courier New" pitchFamily="34" charset="0"/>
+                <a:ea typeface="Courier New" pitchFamily="34" charset="-122"/>
+                <a:cs typeface="Courier New" pitchFamily="34" charset="-120"/>
+              </a:rPr>
+              <a:t>  </a:t>
+            </a:r>
+            <a:pPr indent="0" marL="0">
+              <a:buNone/>
+            </a:pPr>
+            <a:r>
+              <a:rPr lang="en-US" sz="1200" dirty="0">
+                <a:solidFill>
+                  <a:srgbClr val="4EC9B0"/>
+                </a:solidFill>
+                <a:latin typeface="Courier New" pitchFamily="34" charset="0"/>
+                <a:ea typeface="Courier New" pitchFamily="34" charset="-122"/>
+                <a:cs typeface="Courier New" pitchFamily="34" charset="-120"/>
+              </a:rPr>
+              <a:t>Target</a:t>
+            </a:r>
+            <a:pPr indent="0" marL="0">
+              <a:buNone/>
+            </a:pPr>
+            <a:r>
+              <a:rPr lang="en-US" sz="1200" dirty="0">
+                <a:solidFill>
+                  <a:srgbClr val="CCCCCC"/>
+                </a:solidFill>
+                <a:latin typeface="Courier New" pitchFamily="34" charset="0"/>
+                <a:ea typeface="Courier New" pitchFamily="34" charset="-122"/>
+                <a:cs typeface="Courier New" pitchFamily="34" charset="-120"/>
+              </a:rPr>
+              <a:t>: </a:t>
+            </a:r>
+            <a:pPr indent="0" marL="0">
+              <a:buNone/>
+            </a:pPr>
+            <a:r>
+              <a:rPr lang="en-US" sz="1200" dirty="0">
+                <a:solidFill>
+                  <a:srgbClr val="CE9178"/>
+                </a:solidFill>
+                <a:latin typeface="Courier New" pitchFamily="34" charset="0"/>
+                <a:ea typeface="Courier New" pitchFamily="34" charset="-122"/>
+                <a:cs typeface="Courier New" pitchFamily="34" charset="-120"/>
+              </a:rPr>
+              <a:t>'itensSnapshot/@UI.LineItem'</a:t>
+            </a:r>
+            <a:pPr indent="0" marL="0">
+              <a:buNone/>
+            </a:pPr>
+            <a:r>
+              <a:rPr lang="en-US" sz="1200" dirty="0">
+                <a:solidFill>
+                  <a:srgbClr val="CCCCCC"/>
+                </a:solidFill>
+                <a:latin typeface="Courier New" pitchFamily="34" charset="0"/>
+                <a:ea typeface="Courier New" pitchFamily="34" charset="-122"/>
+                <a:cs typeface="Courier New" pitchFamily="34" charset="-120"/>
+              </a:rPr>
+              <a:t>,</a:t>
             </a:r>
             <a:endParaRPr lang="en-US" sz="1200" dirty="0"/>
           </a:p>
@@ -9230,13 +12273,83 @@
             <a:r>
               <a:rPr lang="en-US" sz="1200" dirty="0">
                 <a:solidFill>
-                  <a:srgbClr val="EAECEE"/>
-                </a:solidFill>
-                <a:latin typeface="Courier New" pitchFamily="34" charset="0"/>
-                <a:ea typeface="Courier New" pitchFamily="34" charset="-122"/>
-                <a:cs typeface="Courier New" pitchFamily="34" charset="-120"/>
-              </a:rPr>
-              <a:t>  ![@UI.Hidden]: naoEncerrado }</a:t>
+                  <a:srgbClr val="CCCCCC"/>
+                </a:solidFill>
+                <a:latin typeface="Courier New" pitchFamily="34" charset="0"/>
+                <a:ea typeface="Courier New" pitchFamily="34" charset="-122"/>
+                <a:cs typeface="Courier New" pitchFamily="34" charset="-120"/>
+              </a:rPr>
+              <a:t>  </a:t>
+            </a:r>
+            <a:pPr indent="0" marL="0">
+              <a:buNone/>
+            </a:pPr>
+            <a:r>
+              <a:rPr lang="en-US" sz="1200" dirty="0">
+                <a:solidFill>
+                  <a:srgbClr val="DCDCAA"/>
+                </a:solidFill>
+                <a:latin typeface="Courier New" pitchFamily="34" charset="0"/>
+                <a:ea typeface="Courier New" pitchFamily="34" charset="-122"/>
+                <a:cs typeface="Courier New" pitchFamily="34" charset="-120"/>
+              </a:rPr>
+              <a:t>![@UI.Hidden]</a:t>
+            </a:r>
+            <a:pPr indent="0" marL="0">
+              <a:buNone/>
+            </a:pPr>
+            <a:r>
+              <a:rPr lang="en-US" sz="1200" dirty="0">
+                <a:solidFill>
+                  <a:srgbClr val="CCCCCC"/>
+                </a:solidFill>
+                <a:latin typeface="Courier New" pitchFamily="34" charset="0"/>
+                <a:ea typeface="Courier New" pitchFamily="34" charset="-122"/>
+                <a:cs typeface="Courier New" pitchFamily="34" charset="-120"/>
+              </a:rPr>
+              <a:t>: </a:t>
+            </a:r>
+            <a:pPr indent="0" marL="0">
+              <a:buNone/>
+            </a:pPr>
+            <a:r>
+              <a:rPr lang="en-US" sz="1200" dirty="0">
+                <a:solidFill>
+                  <a:srgbClr val="9CDCFE"/>
+                </a:solidFill>
+                <a:latin typeface="Courier New" pitchFamily="34" charset="0"/>
+                <a:ea typeface="Courier New" pitchFamily="34" charset="-122"/>
+                <a:cs typeface="Courier New" pitchFamily="34" charset="-120"/>
+              </a:rPr>
+              <a:t>naoEncerrado</a:t>
+            </a:r>
+            <a:pPr indent="0" marL="0">
+              <a:buNone/>
+            </a:pPr>
+            <a:r>
+              <a:rPr lang="en-US" sz="1200" dirty="0">
+                <a:solidFill>
+                  <a:srgbClr val="CCCCCC"/>
+                </a:solidFill>
+                <a:latin typeface="Courier New" pitchFamily="34" charset="0"/>
+                <a:ea typeface="Courier New" pitchFamily="34" charset="-122"/>
+                <a:cs typeface="Courier New" pitchFamily="34" charset="-120"/>
+              </a:rPr>
+              <a:t> </a:t>
+            </a:r>
+            <a:pPr indent="0" marL="0">
+              <a:buNone/>
+            </a:pPr>
+            <a:r>
+              <a:rPr lang="en-US" sz="1200" dirty="0">
+                <a:solidFill>
+                  <a:srgbClr val="FFD700"/>
+                </a:solidFill>
+                <a:latin typeface="Courier New" pitchFamily="34" charset="0"/>
+                <a:ea typeface="Courier New" pitchFamily="34" charset="-122"/>
+                <a:cs typeface="Courier New" pitchFamily="34" charset="-120"/>
+              </a:rPr>
+              <a:t>}</a:t>
             </a:r>
             <a:endParaRPr lang="en-US" sz="1200" dirty="0"/>
           </a:p>
@@ -9757,9 +12870,14 @@
             </a:avLst>
           </a:prstGeom>
           <a:solidFill>
-            <a:srgbClr val="1D2D3E"/>
+            <a:srgbClr val="1F1F1F"/>
           </a:solidFill>
-          <a:ln/>
+          <a:ln w="9525">
+            <a:solidFill>
+              <a:srgbClr val="2B2B2B"/>
+            </a:solidFill>
+            <a:prstDash val="solid"/>
+          </a:ln>
           <a:effectLst>
             <a:outerShdw sx="100000" sy="100000" kx="0" ky="0" algn="bl" rotWithShape="0" blurRad="101600" dist="25400" dir="5400000">
               <a:srgbClr val="223649">
@@ -9796,13 +12914,97 @@
             <a:r>
               <a:rPr lang="en-US" sz="1100" dirty="0">
                 <a:solidFill>
-                  <a:srgbClr val="EAECEE"/>
-                </a:solidFill>
-                <a:latin typeface="Courier New" pitchFamily="34" charset="0"/>
-                <a:ea typeface="Courier New" pitchFamily="34" charset="-122"/>
-                <a:cs typeface="Courier New" pitchFamily="34" charset="-120"/>
-              </a:rPr>
-              <a:t>Common.SideEffects #Cliente: {</a:t>
+                  <a:srgbClr val="4EC9B0"/>
+                </a:solidFill>
+                <a:latin typeface="Courier New" pitchFamily="34" charset="0"/>
+                <a:ea typeface="Courier New" pitchFamily="34" charset="-122"/>
+                <a:cs typeface="Courier New" pitchFamily="34" charset="-120"/>
+              </a:rPr>
+              <a:t>Common</a:t>
+            </a:r>
+            <a:pPr indent="0" marL="0">
+              <a:buNone/>
+            </a:pPr>
+            <a:r>
+              <a:rPr lang="en-US" sz="1100" dirty="0">
+                <a:solidFill>
+                  <a:srgbClr val="CCCCCC"/>
+                </a:solidFill>
+                <a:latin typeface="Courier New" pitchFamily="34" charset="0"/>
+                <a:ea typeface="Courier New" pitchFamily="34" charset="-122"/>
+                <a:cs typeface="Courier New" pitchFamily="34" charset="-120"/>
+              </a:rPr>
+              <a:t>.</a:t>
+            </a:r>
+            <a:pPr indent="0" marL="0">
+              <a:buNone/>
+            </a:pPr>
+            <a:r>
+              <a:rPr lang="en-US" sz="1100" dirty="0">
+                <a:solidFill>
+                  <a:srgbClr val="4EC9B0"/>
+                </a:solidFill>
+                <a:latin typeface="Courier New" pitchFamily="34" charset="0"/>
+                <a:ea typeface="Courier New" pitchFamily="34" charset="-122"/>
+                <a:cs typeface="Courier New" pitchFamily="34" charset="-120"/>
+              </a:rPr>
+              <a:t>SideEffects</a:t>
+            </a:r>
+            <a:pPr indent="0" marL="0">
+              <a:buNone/>
+            </a:pPr>
+            <a:r>
+              <a:rPr lang="en-US" sz="1100" dirty="0">
+                <a:solidFill>
+                  <a:srgbClr val="CCCCCC"/>
+                </a:solidFill>
+                <a:latin typeface="Courier New" pitchFamily="34" charset="0"/>
+                <a:ea typeface="Courier New" pitchFamily="34" charset="-122"/>
+                <a:cs typeface="Courier New" pitchFamily="34" charset="-120"/>
+              </a:rPr>
+              <a:t> </a:t>
+            </a:r>
+            <a:pPr indent="0" marL="0">
+              <a:buNone/>
+            </a:pPr>
+            <a:r>
+              <a:rPr lang="en-US" sz="1100" dirty="0">
+                <a:solidFill>
+                  <a:srgbClr val="4FC1FF"/>
+                </a:solidFill>
+                <a:latin typeface="Courier New" pitchFamily="34" charset="0"/>
+                <a:ea typeface="Courier New" pitchFamily="34" charset="-122"/>
+                <a:cs typeface="Courier New" pitchFamily="34" charset="-120"/>
+              </a:rPr>
+              <a:t>#Cliente</a:t>
+            </a:r>
+            <a:pPr indent="0" marL="0">
+              <a:buNone/>
+            </a:pPr>
+            <a:r>
+              <a:rPr lang="en-US" sz="1100" dirty="0">
+                <a:solidFill>
+                  <a:srgbClr val="CCCCCC"/>
+                </a:solidFill>
+                <a:latin typeface="Courier New" pitchFamily="34" charset="0"/>
+                <a:ea typeface="Courier New" pitchFamily="34" charset="-122"/>
+                <a:cs typeface="Courier New" pitchFamily="34" charset="-120"/>
+              </a:rPr>
+              <a:t>: </a:t>
+            </a:r>
+            <a:pPr indent="0" marL="0">
+              <a:buNone/>
+            </a:pPr>
+            <a:r>
+              <a:rPr lang="en-US" sz="1100" dirty="0">
+                <a:solidFill>
+                  <a:srgbClr val="FFD700"/>
+                </a:solidFill>
+                <a:latin typeface="Courier New" pitchFamily="34" charset="0"/>
+                <a:ea typeface="Courier New" pitchFamily="34" charset="-122"/>
+                <a:cs typeface="Courier New" pitchFamily="34" charset="-120"/>
+              </a:rPr>
+              <a:t>{</a:t>
             </a:r>
             <a:endParaRPr lang="en-US" sz="1100" dirty="0"/>
           </a:p>
@@ -9813,13 +13015,41 @@
             <a:r>
               <a:rPr lang="en-US" sz="1100" dirty="0">
                 <a:solidFill>
-                  <a:srgbClr val="EAECEE"/>
-                </a:solidFill>
-                <a:latin typeface="Courier New" pitchFamily="34" charset="0"/>
-                <a:ea typeface="Courier New" pitchFamily="34" charset="-122"/>
-                <a:cs typeface="Courier New" pitchFamily="34" charset="-120"/>
-              </a:rPr>
-              <a:t>  SourceProperties:</a:t>
+                  <a:srgbClr val="CCCCCC"/>
+                </a:solidFill>
+                <a:latin typeface="Courier New" pitchFamily="34" charset="0"/>
+                <a:ea typeface="Courier New" pitchFamily="34" charset="-122"/>
+                <a:cs typeface="Courier New" pitchFamily="34" charset="-120"/>
+              </a:rPr>
+              <a:t>  </a:t>
+            </a:r>
+            <a:pPr indent="0" marL="0">
+              <a:buNone/>
+            </a:pPr>
+            <a:r>
+              <a:rPr lang="en-US" sz="1100" dirty="0">
+                <a:solidFill>
+                  <a:srgbClr val="4EC9B0"/>
+                </a:solidFill>
+                <a:latin typeface="Courier New" pitchFamily="34" charset="0"/>
+                <a:ea typeface="Courier New" pitchFamily="34" charset="-122"/>
+                <a:cs typeface="Courier New" pitchFamily="34" charset="-120"/>
+              </a:rPr>
+              <a:t>SourceProperties</a:t>
+            </a:r>
+            <a:pPr indent="0" marL="0">
+              <a:buNone/>
+            </a:pPr>
+            <a:r>
+              <a:rPr lang="en-US" sz="1100" dirty="0">
+                <a:solidFill>
+                  <a:srgbClr val="CCCCCC"/>
+                </a:solidFill>
+                <a:latin typeface="Courier New" pitchFamily="34" charset="0"/>
+                <a:ea typeface="Courier New" pitchFamily="34" charset="-122"/>
+                <a:cs typeface="Courier New" pitchFamily="34" charset="-120"/>
+              </a:rPr>
+              <a:t>:</a:t>
             </a:r>
             <a:endParaRPr lang="en-US" sz="1100" dirty="0"/>
           </a:p>
@@ -9830,13 +13060,69 @@
             <a:r>
               <a:rPr lang="en-US" sz="1100" dirty="0">
                 <a:solidFill>
-                  <a:srgbClr val="EAECEE"/>
-                </a:solidFill>
-                <a:latin typeface="Courier New" pitchFamily="34" charset="0"/>
-                <a:ea typeface="Courier New" pitchFamily="34" charset="-122"/>
-                <a:cs typeface="Courier New" pitchFamily="34" charset="-120"/>
-              </a:rPr>
-              <a:t>    [cliente_ID],</a:t>
+                  <a:srgbClr val="CCCCCC"/>
+                </a:solidFill>
+                <a:latin typeface="Courier New" pitchFamily="34" charset="0"/>
+                <a:ea typeface="Courier New" pitchFamily="34" charset="-122"/>
+                <a:cs typeface="Courier New" pitchFamily="34" charset="-120"/>
+              </a:rPr>
+              <a:t>    </a:t>
+            </a:r>
+            <a:pPr indent="0" marL="0">
+              <a:buNone/>
+            </a:pPr>
+            <a:r>
+              <a:rPr lang="en-US" sz="1100" dirty="0">
+                <a:solidFill>
+                  <a:srgbClr val="DA70D6"/>
+                </a:solidFill>
+                <a:latin typeface="Courier New" pitchFamily="34" charset="0"/>
+                <a:ea typeface="Courier New" pitchFamily="34" charset="-122"/>
+                <a:cs typeface="Courier New" pitchFamily="34" charset="-120"/>
+              </a:rPr>
+              <a:t>[</a:t>
+            </a:r>
+            <a:pPr indent="0" marL="0">
+              <a:buNone/>
+            </a:pPr>
+            <a:r>
+              <a:rPr lang="en-US" sz="1100" dirty="0">
+                <a:solidFill>
+                  <a:srgbClr val="9CDCFE"/>
+                </a:solidFill>
+                <a:latin typeface="Courier New" pitchFamily="34" charset="0"/>
+                <a:ea typeface="Courier New" pitchFamily="34" charset="-122"/>
+                <a:cs typeface="Courier New" pitchFamily="34" charset="-120"/>
+              </a:rPr>
+              <a:t>cliente_ID</a:t>
+            </a:r>
+            <a:pPr indent="0" marL="0">
+              <a:buNone/>
+            </a:pPr>
+            <a:r>
+              <a:rPr lang="en-US" sz="1100" dirty="0">
+                <a:solidFill>
+                  <a:srgbClr val="DA70D6"/>
+                </a:solidFill>
+                <a:latin typeface="Courier New" pitchFamily="34" charset="0"/>
+                <a:ea typeface="Courier New" pitchFamily="34" charset="-122"/>
+                <a:cs typeface="Courier New" pitchFamily="34" charset="-120"/>
+              </a:rPr>
+              <a:t>]</a:t>
+            </a:r>
+            <a:pPr indent="0" marL="0">
+              <a:buNone/>
+            </a:pPr>
+            <a:r>
+              <a:rPr lang="en-US" sz="1100" dirty="0">
+                <a:solidFill>
+                  <a:srgbClr val="CCCCCC"/>
+                </a:solidFill>
+                <a:latin typeface="Courier New" pitchFamily="34" charset="0"/>
+                <a:ea typeface="Courier New" pitchFamily="34" charset="-122"/>
+                <a:cs typeface="Courier New" pitchFamily="34" charset="-120"/>
+              </a:rPr>
+              <a:t>,</a:t>
             </a:r>
             <a:endParaRPr lang="en-US" sz="1100" dirty="0"/>
           </a:p>
@@ -9847,13 +13133,55 @@
             <a:r>
               <a:rPr lang="en-US" sz="1100" dirty="0">
                 <a:solidFill>
-                  <a:srgbClr val="EAECEE"/>
-                </a:solidFill>
-                <a:latin typeface="Courier New" pitchFamily="34" charset="0"/>
-                <a:ea typeface="Courier New" pitchFamily="34" charset="-122"/>
-                <a:cs typeface="Courier New" pitchFamily="34" charset="-120"/>
-              </a:rPr>
-              <a:t>  TargetProperties: [</a:t>
+                  <a:srgbClr val="CCCCCC"/>
+                </a:solidFill>
+                <a:latin typeface="Courier New" pitchFamily="34" charset="0"/>
+                <a:ea typeface="Courier New" pitchFamily="34" charset="-122"/>
+                <a:cs typeface="Courier New" pitchFamily="34" charset="-120"/>
+              </a:rPr>
+              <a:t>  </a:t>
+            </a:r>
+            <a:pPr indent="0" marL="0">
+              <a:buNone/>
+            </a:pPr>
+            <a:r>
+              <a:rPr lang="en-US" sz="1100" dirty="0">
+                <a:solidFill>
+                  <a:srgbClr val="4EC9B0"/>
+                </a:solidFill>
+                <a:latin typeface="Courier New" pitchFamily="34" charset="0"/>
+                <a:ea typeface="Courier New" pitchFamily="34" charset="-122"/>
+                <a:cs typeface="Courier New" pitchFamily="34" charset="-120"/>
+              </a:rPr>
+              <a:t>TargetProperties</a:t>
+            </a:r>
+            <a:pPr indent="0" marL="0">
+              <a:buNone/>
+            </a:pPr>
+            <a:r>
+              <a:rPr lang="en-US" sz="1100" dirty="0">
+                <a:solidFill>
+                  <a:srgbClr val="CCCCCC"/>
+                </a:solidFill>
+                <a:latin typeface="Courier New" pitchFamily="34" charset="0"/>
+                <a:ea typeface="Courier New" pitchFamily="34" charset="-122"/>
+                <a:cs typeface="Courier New" pitchFamily="34" charset="-120"/>
+              </a:rPr>
+              <a:t>: </a:t>
+            </a:r>
+            <a:pPr indent="0" marL="0">
+              <a:buNone/>
+            </a:pPr>
+            <a:r>
+              <a:rPr lang="en-US" sz="1100" dirty="0">
+                <a:solidFill>
+                  <a:srgbClr val="DA70D6"/>
+                </a:solidFill>
+                <a:latin typeface="Courier New" pitchFamily="34" charset="0"/>
+                <a:ea typeface="Courier New" pitchFamily="34" charset="-122"/>
+                <a:cs typeface="Courier New" pitchFamily="34" charset="-120"/>
+              </a:rPr>
+              <a:t>[</a:t>
             </a:r>
             <a:endParaRPr lang="en-US" sz="1100" dirty="0"/>
           </a:p>
@@ -9864,13 +13192,41 @@
             <a:r>
               <a:rPr lang="en-US" sz="1100" dirty="0">
                 <a:solidFill>
-                  <a:srgbClr val="EAECEE"/>
-                </a:solidFill>
-                <a:latin typeface="Courier New" pitchFamily="34" charset="0"/>
-                <a:ea typeface="Courier New" pitchFamily="34" charset="-122"/>
-                <a:cs typeface="Courier New" pitchFamily="34" charset="-120"/>
-              </a:rPr>
-              <a:t>    'endereco_ID',</a:t>
+                  <a:srgbClr val="CCCCCC"/>
+                </a:solidFill>
+                <a:latin typeface="Courier New" pitchFamily="34" charset="0"/>
+                <a:ea typeface="Courier New" pitchFamily="34" charset="-122"/>
+                <a:cs typeface="Courier New" pitchFamily="34" charset="-120"/>
+              </a:rPr>
+              <a:t>    </a:t>
+            </a:r>
+            <a:pPr indent="0" marL="0">
+              <a:buNone/>
+            </a:pPr>
+            <a:r>
+              <a:rPr lang="en-US" sz="1100" dirty="0">
+                <a:solidFill>
+                  <a:srgbClr val="CE9178"/>
+                </a:solidFill>
+                <a:latin typeface="Courier New" pitchFamily="34" charset="0"/>
+                <a:ea typeface="Courier New" pitchFamily="34" charset="-122"/>
+                <a:cs typeface="Courier New" pitchFamily="34" charset="-120"/>
+              </a:rPr>
+              <a:t>'endereco_ID'</a:t>
+            </a:r>
+            <a:pPr indent="0" marL="0">
+              <a:buNone/>
+            </a:pPr>
+            <a:r>
+              <a:rPr lang="en-US" sz="1100" dirty="0">
+                <a:solidFill>
+                  <a:srgbClr val="CCCCCC"/>
+                </a:solidFill>
+                <a:latin typeface="Courier New" pitchFamily="34" charset="0"/>
+                <a:ea typeface="Courier New" pitchFamily="34" charset="-122"/>
+                <a:cs typeface="Courier New" pitchFamily="34" charset="-120"/>
+              </a:rPr>
+              <a:t>,</a:t>
             </a:r>
             <a:endParaRPr lang="en-US" sz="1100" dirty="0"/>
           </a:p>
@@ -9881,13 +13237,27 @@
             <a:r>
               <a:rPr lang="en-US" sz="1100" dirty="0">
                 <a:solidFill>
-                  <a:srgbClr val="EAECEE"/>
-                </a:solidFill>
-                <a:latin typeface="Courier New" pitchFamily="34" charset="0"/>
-                <a:ea typeface="Courier New" pitchFamily="34" charset="-122"/>
-                <a:cs typeface="Courier New" pitchFamily="34" charset="-120"/>
-              </a:rPr>
-              <a:t>    'enderecoPrincipal</a:t>
+                  <a:srgbClr val="CCCCCC"/>
+                </a:solidFill>
+                <a:latin typeface="Courier New" pitchFamily="34" charset="0"/>
+                <a:ea typeface="Courier New" pitchFamily="34" charset="-122"/>
+                <a:cs typeface="Courier New" pitchFamily="34" charset="-120"/>
+              </a:rPr>
+              <a:t>    </a:t>
+            </a:r>
+            <a:pPr indent="0" marL="0">
+              <a:buNone/>
+            </a:pPr>
+            <a:r>
+              <a:rPr lang="en-US" sz="1100" dirty="0">
+                <a:solidFill>
+                  <a:srgbClr val="CE9178"/>
+                </a:solidFill>
+                <a:latin typeface="Courier New" pitchFamily="34" charset="0"/>
+                <a:ea typeface="Courier New" pitchFamily="34" charset="-122"/>
+                <a:cs typeface="Courier New" pitchFamily="34" charset="-120"/>
+              </a:rPr>
+              <a:t>'enderecoPrincipal</a:t>
             </a:r>
             <a:endParaRPr lang="en-US" sz="1100" dirty="0"/>
           </a:p>
@@ -9898,13 +13268,41 @@
             <a:r>
               <a:rPr lang="en-US" sz="1100" dirty="0">
                 <a:solidFill>
-                  <a:srgbClr val="EAECEE"/>
-                </a:solidFill>
-                <a:latin typeface="Courier New" pitchFamily="34" charset="0"/>
-                <a:ea typeface="Courier New" pitchFamily="34" charset="-122"/>
-                <a:cs typeface="Courier New" pitchFamily="34" charset="-120"/>
-              </a:rPr>
-              <a:t>      Completo',</a:t>
+                  <a:srgbClr val="CCCCCC"/>
+                </a:solidFill>
+                <a:latin typeface="Courier New" pitchFamily="34" charset="0"/>
+                <a:ea typeface="Courier New" pitchFamily="34" charset="-122"/>
+                <a:cs typeface="Courier New" pitchFamily="34" charset="-120"/>
+              </a:rPr>
+              <a:t>      </a:t>
+            </a:r>
+            <a:pPr indent="0" marL="0">
+              <a:buNone/>
+            </a:pPr>
+            <a:r>
+              <a:rPr lang="en-US" sz="1100" dirty="0">
+                <a:solidFill>
+                  <a:srgbClr val="4EC9B0"/>
+                </a:solidFill>
+                <a:latin typeface="Courier New" pitchFamily="34" charset="0"/>
+                <a:ea typeface="Courier New" pitchFamily="34" charset="-122"/>
+                <a:cs typeface="Courier New" pitchFamily="34" charset="-120"/>
+              </a:rPr>
+              <a:t>Completo</a:t>
+            </a:r>
+            <a:pPr indent="0" marL="0">
+              <a:buNone/>
+            </a:pPr>
+            <a:r>
+              <a:rPr lang="en-US" sz="1100" dirty="0">
+                <a:solidFill>
+                  <a:srgbClr val="CE9178"/>
+                </a:solidFill>
+                <a:latin typeface="Courier New" pitchFamily="34" charset="0"/>
+                <a:ea typeface="Courier New" pitchFamily="34" charset="-122"/>
+                <a:cs typeface="Courier New" pitchFamily="34" charset="-120"/>
+              </a:rPr>
+              <a:t>',</a:t>
             </a:r>
             <a:endParaRPr lang="en-US" sz="1100" dirty="0"/>
           </a:p>
@@ -9915,13 +13313,69 @@
             <a:r>
               <a:rPr lang="en-US" sz="1100" dirty="0">
                 <a:solidFill>
-                  <a:srgbClr val="EAECEE"/>
-                </a:solidFill>
-                <a:latin typeface="Courier New" pitchFamily="34" charset="0"/>
-                <a:ea typeface="Courier New" pitchFamily="34" charset="-122"/>
-                <a:cs typeface="Courier New" pitchFamily="34" charset="-120"/>
-              </a:rPr>
-              <a:t>    'cpfCliente' ],</a:t>
+                  <a:srgbClr val="CCCCCC"/>
+                </a:solidFill>
+                <a:latin typeface="Courier New" pitchFamily="34" charset="0"/>
+                <a:ea typeface="Courier New" pitchFamily="34" charset="-122"/>
+                <a:cs typeface="Courier New" pitchFamily="34" charset="-120"/>
+              </a:rPr>
+              <a:t>    </a:t>
+            </a:r>
+            <a:pPr indent="0" marL="0">
+              <a:buNone/>
+            </a:pPr>
+            <a:r>
+              <a:rPr lang="en-US" sz="1100" dirty="0">
+                <a:solidFill>
+                  <a:srgbClr val="CE9178"/>
+                </a:solidFill>
+                <a:latin typeface="Courier New" pitchFamily="34" charset="0"/>
+                <a:ea typeface="Courier New" pitchFamily="34" charset="-122"/>
+                <a:cs typeface="Courier New" pitchFamily="34" charset="-120"/>
+              </a:rPr>
+              <a:t>'cpfCliente'</a:t>
+            </a:r>
+            <a:pPr indent="0" marL="0">
+              <a:buNone/>
+            </a:pPr>
+            <a:r>
+              <a:rPr lang="en-US" sz="1100" dirty="0">
+                <a:solidFill>
+                  <a:srgbClr val="CCCCCC"/>
+                </a:solidFill>
+                <a:latin typeface="Courier New" pitchFamily="34" charset="0"/>
+                <a:ea typeface="Courier New" pitchFamily="34" charset="-122"/>
+                <a:cs typeface="Courier New" pitchFamily="34" charset="-120"/>
+              </a:rPr>
+              <a:t> </a:t>
+            </a:r>
+            <a:pPr indent="0" marL="0">
+              <a:buNone/>
+            </a:pPr>
+            <a:r>
+              <a:rPr lang="en-US" sz="1100" dirty="0">
+                <a:solidFill>
+                  <a:srgbClr val="DA70D6"/>
+                </a:solidFill>
+                <a:latin typeface="Courier New" pitchFamily="34" charset="0"/>
+                <a:ea typeface="Courier New" pitchFamily="34" charset="-122"/>
+                <a:cs typeface="Courier New" pitchFamily="34" charset="-120"/>
+              </a:rPr>
+              <a:t>]</a:t>
+            </a:r>
+            <a:pPr indent="0" marL="0">
+              <a:buNone/>
+            </a:pPr>
+            <a:r>
+              <a:rPr lang="en-US" sz="1100" dirty="0">
+                <a:solidFill>
+                  <a:srgbClr val="CCCCCC"/>
+                </a:solidFill>
+                <a:latin typeface="Courier New" pitchFamily="34" charset="0"/>
+                <a:ea typeface="Courier New" pitchFamily="34" charset="-122"/>
+                <a:cs typeface="Courier New" pitchFamily="34" charset="-120"/>
+              </a:rPr>
+              <a:t>,</a:t>
             </a:r>
             <a:endParaRPr lang="en-US" sz="1100" dirty="0"/>
           </a:p>
@@ -9932,13 +13386,41 @@
             <a:r>
               <a:rPr lang="en-US" sz="1100" dirty="0">
                 <a:solidFill>
-                  <a:srgbClr val="EAECEE"/>
-                </a:solidFill>
-                <a:latin typeface="Courier New" pitchFamily="34" charset="0"/>
-                <a:ea typeface="Courier New" pitchFamily="34" charset="-122"/>
-                <a:cs typeface="Courier New" pitchFamily="34" charset="-120"/>
-              </a:rPr>
-              <a:t>  TargetEntities:</a:t>
+                  <a:srgbClr val="CCCCCC"/>
+                </a:solidFill>
+                <a:latin typeface="Courier New" pitchFamily="34" charset="0"/>
+                <a:ea typeface="Courier New" pitchFamily="34" charset="-122"/>
+                <a:cs typeface="Courier New" pitchFamily="34" charset="-120"/>
+              </a:rPr>
+              <a:t>  </a:t>
+            </a:r>
+            <a:pPr indent="0" marL="0">
+              <a:buNone/>
+            </a:pPr>
+            <a:r>
+              <a:rPr lang="en-US" sz="1100" dirty="0">
+                <a:solidFill>
+                  <a:srgbClr val="4EC9B0"/>
+                </a:solidFill>
+                <a:latin typeface="Courier New" pitchFamily="34" charset="0"/>
+                <a:ea typeface="Courier New" pitchFamily="34" charset="-122"/>
+                <a:cs typeface="Courier New" pitchFamily="34" charset="-120"/>
+              </a:rPr>
+              <a:t>TargetEntities</a:t>
+            </a:r>
+            <a:pPr indent="0" marL="0">
+              <a:buNone/>
+            </a:pPr>
+            <a:r>
+              <a:rPr lang="en-US" sz="1100" dirty="0">
+                <a:solidFill>
+                  <a:srgbClr val="CCCCCC"/>
+                </a:solidFill>
+                <a:latin typeface="Courier New" pitchFamily="34" charset="0"/>
+                <a:ea typeface="Courier New" pitchFamily="34" charset="-122"/>
+                <a:cs typeface="Courier New" pitchFamily="34" charset="-120"/>
+              </a:rPr>
+              <a:t>:</a:t>
             </a:r>
             <a:endParaRPr lang="en-US" sz="1100" dirty="0"/>
           </a:p>
@@ -9949,13 +13431,83 @@
             <a:r>
               <a:rPr lang="en-US" sz="1100" dirty="0">
                 <a:solidFill>
-                  <a:srgbClr val="EAECEE"/>
-                </a:solidFill>
-                <a:latin typeface="Courier New" pitchFamily="34" charset="0"/>
-                <a:ea typeface="Courier New" pitchFamily="34" charset="-122"/>
-                <a:cs typeface="Courier New" pitchFamily="34" charset="-120"/>
-              </a:rPr>
-              <a:t>    [cliente] }</a:t>
+                  <a:srgbClr val="CCCCCC"/>
+                </a:solidFill>
+                <a:latin typeface="Courier New" pitchFamily="34" charset="0"/>
+                <a:ea typeface="Courier New" pitchFamily="34" charset="-122"/>
+                <a:cs typeface="Courier New" pitchFamily="34" charset="-120"/>
+              </a:rPr>
+              <a:t>    </a:t>
+            </a:r>
+            <a:pPr indent="0" marL="0">
+              <a:buNone/>
+            </a:pPr>
+            <a:r>
+              <a:rPr lang="en-US" sz="1100" dirty="0">
+                <a:solidFill>
+                  <a:srgbClr val="DA70D6"/>
+                </a:solidFill>
+                <a:latin typeface="Courier New" pitchFamily="34" charset="0"/>
+                <a:ea typeface="Courier New" pitchFamily="34" charset="-122"/>
+                <a:cs typeface="Courier New" pitchFamily="34" charset="-120"/>
+              </a:rPr>
+              <a:t>[</a:t>
+            </a:r>
+            <a:pPr indent="0" marL="0">
+              <a:buNone/>
+            </a:pPr>
+            <a:r>
+              <a:rPr lang="en-US" sz="1100" dirty="0">
+                <a:solidFill>
+                  <a:srgbClr val="9CDCFE"/>
+                </a:solidFill>
+                <a:latin typeface="Courier New" pitchFamily="34" charset="0"/>
+                <a:ea typeface="Courier New" pitchFamily="34" charset="-122"/>
+                <a:cs typeface="Courier New" pitchFamily="34" charset="-120"/>
+              </a:rPr>
+              <a:t>cliente</a:t>
+            </a:r>
+            <a:pPr indent="0" marL="0">
+              <a:buNone/>
+            </a:pPr>
+            <a:r>
+              <a:rPr lang="en-US" sz="1100" dirty="0">
+                <a:solidFill>
+                  <a:srgbClr val="DA70D6"/>
+                </a:solidFill>
+                <a:latin typeface="Courier New" pitchFamily="34" charset="0"/>
+                <a:ea typeface="Courier New" pitchFamily="34" charset="-122"/>
+                <a:cs typeface="Courier New" pitchFamily="34" charset="-120"/>
+              </a:rPr>
+              <a:t>]</a:t>
+            </a:r>
+            <a:pPr indent="0" marL="0">
+              <a:buNone/>
+            </a:pPr>
+            <a:r>
+              <a:rPr lang="en-US" sz="1100" dirty="0">
+                <a:solidFill>
+                  <a:srgbClr val="CCCCCC"/>
+                </a:solidFill>
+                <a:latin typeface="Courier New" pitchFamily="34" charset="0"/>
+                <a:ea typeface="Courier New" pitchFamily="34" charset="-122"/>
+                <a:cs typeface="Courier New" pitchFamily="34" charset="-120"/>
+              </a:rPr>
+              <a:t> </a:t>
+            </a:r>
+            <a:pPr indent="0" marL="0">
+              <a:buNone/>
+            </a:pPr>
+            <a:r>
+              <a:rPr lang="en-US" sz="1100" dirty="0">
+                <a:solidFill>
+                  <a:srgbClr val="FFD700"/>
+                </a:solidFill>
+                <a:latin typeface="Courier New" pitchFamily="34" charset="0"/>
+                <a:ea typeface="Courier New" pitchFamily="34" charset="-122"/>
+                <a:cs typeface="Courier New" pitchFamily="34" charset="-120"/>
+              </a:rPr>
+              <a:t>}</a:t>
             </a:r>
             <a:endParaRPr lang="en-US" sz="1100" dirty="0"/>
           </a:p>
@@ -10130,9 +13682,14 @@
             </a:avLst>
           </a:prstGeom>
           <a:solidFill>
-            <a:srgbClr val="1D2D3E"/>
+            <a:srgbClr val="1F1F1F"/>
           </a:solidFill>
-          <a:ln/>
+          <a:ln w="9525">
+            <a:solidFill>
+              <a:srgbClr val="2B2B2B"/>
+            </a:solidFill>
+            <a:prstDash val="solid"/>
+          </a:ln>
           <a:effectLst>
             <a:outerShdw sx="100000" sy="100000" kx="0" ky="0" algn="bl" rotWithShape="0" blurRad="101600" dist="25400" dir="5400000">
               <a:srgbClr val="223649">
@@ -10169,7 +13726,7 @@
             <a:r>
               <a:rPr lang="en-US" sz="1100" dirty="0">
                 <a:solidFill>
-                  <a:srgbClr val="EAECEE"/>
+                  <a:srgbClr val="9CDCFE"/>
                 </a:solidFill>
                 <a:latin typeface="Courier New" pitchFamily="34" charset="0"/>
                 <a:ea typeface="Courier New" pitchFamily="34" charset="-122"/>
@@ -10186,13 +13743,55 @@
             <a:r>
               <a:rPr lang="en-US" sz="1100" dirty="0">
                 <a:solidFill>
-                  <a:srgbClr val="89D1FF"/>
-                </a:solidFill>
-                <a:latin typeface="Courier New" pitchFamily="34" charset="0"/>
-                <a:ea typeface="Courier New" pitchFamily="34" charset="-122"/>
-                <a:cs typeface="Courier New" pitchFamily="34" charset="-120"/>
-              </a:rPr>
-              <a:t>  @Common.FieldControl: (</a:t>
+                  <a:srgbClr val="CCCCCC"/>
+                </a:solidFill>
+                <a:latin typeface="Courier New" pitchFamily="34" charset="0"/>
+                <a:ea typeface="Courier New" pitchFamily="34" charset="-122"/>
+                <a:cs typeface="Courier New" pitchFamily="34" charset="-120"/>
+              </a:rPr>
+              <a:t>  </a:t>
+            </a:r>
+            <a:pPr indent="0" marL="0">
+              <a:buNone/>
+            </a:pPr>
+            <a:r>
+              <a:rPr lang="en-US" sz="1100" dirty="0">
+                <a:solidFill>
+                  <a:srgbClr val="DCDCAA"/>
+                </a:solidFill>
+                <a:latin typeface="Courier New" pitchFamily="34" charset="0"/>
+                <a:ea typeface="Courier New" pitchFamily="34" charset="-122"/>
+                <a:cs typeface="Courier New" pitchFamily="34" charset="-120"/>
+              </a:rPr>
+              <a:t>@Common.FieldControl</a:t>
+            </a:r>
+            <a:pPr indent="0" marL="0">
+              <a:buNone/>
+            </a:pPr>
+            <a:r>
+              <a:rPr lang="en-US" sz="1100" dirty="0">
+                <a:solidFill>
+                  <a:srgbClr val="CCCCCC"/>
+                </a:solidFill>
+                <a:latin typeface="Courier New" pitchFamily="34" charset="0"/>
+                <a:ea typeface="Courier New" pitchFamily="34" charset="-122"/>
+                <a:cs typeface="Courier New" pitchFamily="34" charset="-120"/>
+              </a:rPr>
+              <a:t>: </a:t>
+            </a:r>
+            <a:pPr indent="0" marL="0">
+              <a:buNone/>
+            </a:pPr>
+            <a:r>
+              <a:rPr lang="en-US" sz="1100" dirty="0">
+                <a:solidFill>
+                  <a:srgbClr val="FFD700"/>
+                </a:solidFill>
+                <a:latin typeface="Courier New" pitchFamily="34" charset="0"/>
+                <a:ea typeface="Courier New" pitchFamily="34" charset="-122"/>
+                <a:cs typeface="Courier New" pitchFamily="34" charset="-120"/>
+              </a:rPr>
+              <a:t>(</a:t>
             </a:r>
             <a:endParaRPr lang="en-US" sz="1100" dirty="0"/>
           </a:p>
@@ -10203,13 +13802,83 @@
             <a:r>
               <a:rPr lang="en-US" sz="1100" dirty="0">
                 <a:solidFill>
-                  <a:srgbClr val="EAECEE"/>
-                </a:solidFill>
-                <a:latin typeface="Courier New" pitchFamily="34" charset="0"/>
-                <a:ea typeface="Courier New" pitchFamily="34" charset="-122"/>
-                <a:cs typeface="Courier New" pitchFamily="34" charset="-120"/>
-              </a:rPr>
-              <a:t>    case when numeroPedido</a:t>
+                  <a:srgbClr val="CCCCCC"/>
+                </a:solidFill>
+                <a:latin typeface="Courier New" pitchFamily="34" charset="0"/>
+                <a:ea typeface="Courier New" pitchFamily="34" charset="-122"/>
+                <a:cs typeface="Courier New" pitchFamily="34" charset="-120"/>
+              </a:rPr>
+              <a:t>    </a:t>
+            </a:r>
+            <a:pPr indent="0" marL="0">
+              <a:buNone/>
+            </a:pPr>
+            <a:r>
+              <a:rPr lang="en-US" sz="1100" dirty="0">
+                <a:solidFill>
+                  <a:srgbClr val="C586C0"/>
+                </a:solidFill>
+                <a:latin typeface="Courier New" pitchFamily="34" charset="0"/>
+                <a:ea typeface="Courier New" pitchFamily="34" charset="-122"/>
+                <a:cs typeface="Courier New" pitchFamily="34" charset="-120"/>
+              </a:rPr>
+              <a:t>case</a:t>
+            </a:r>
+            <a:pPr indent="0" marL="0">
+              <a:buNone/>
+            </a:pPr>
+            <a:r>
+              <a:rPr lang="en-US" sz="1100" dirty="0">
+                <a:solidFill>
+                  <a:srgbClr val="CCCCCC"/>
+                </a:solidFill>
+                <a:latin typeface="Courier New" pitchFamily="34" charset="0"/>
+                <a:ea typeface="Courier New" pitchFamily="34" charset="-122"/>
+                <a:cs typeface="Courier New" pitchFamily="34" charset="-120"/>
+              </a:rPr>
+              <a:t> </a:t>
+            </a:r>
+            <a:pPr indent="0" marL="0">
+              <a:buNone/>
+            </a:pPr>
+            <a:r>
+              <a:rPr lang="en-US" sz="1100" dirty="0">
+                <a:solidFill>
+                  <a:srgbClr val="C586C0"/>
+                </a:solidFill>
+                <a:latin typeface="Courier New" pitchFamily="34" charset="0"/>
+                <a:ea typeface="Courier New" pitchFamily="34" charset="-122"/>
+                <a:cs typeface="Courier New" pitchFamily="34" charset="-120"/>
+              </a:rPr>
+              <a:t>when</a:t>
+            </a:r>
+            <a:pPr indent="0" marL="0">
+              <a:buNone/>
+            </a:pPr>
+            <a:r>
+              <a:rPr lang="en-US" sz="1100" dirty="0">
+                <a:solidFill>
+                  <a:srgbClr val="CCCCCC"/>
+                </a:solidFill>
+                <a:latin typeface="Courier New" pitchFamily="34" charset="0"/>
+                <a:ea typeface="Courier New" pitchFamily="34" charset="-122"/>
+                <a:cs typeface="Courier New" pitchFamily="34" charset="-120"/>
+              </a:rPr>
+              <a:t> </a:t>
+            </a:r>
+            <a:pPr indent="0" marL="0">
+              <a:buNone/>
+            </a:pPr>
+            <a:r>
+              <a:rPr lang="en-US" sz="1100" dirty="0">
+                <a:solidFill>
+                  <a:srgbClr val="9CDCFE"/>
+                </a:solidFill>
+                <a:latin typeface="Courier New" pitchFamily="34" charset="0"/>
+                <a:ea typeface="Courier New" pitchFamily="34" charset="-122"/>
+                <a:cs typeface="Courier New" pitchFamily="34" charset="-120"/>
+              </a:rPr>
+              <a:t>numeroPedido</a:t>
             </a:r>
             <a:endParaRPr lang="en-US" sz="1100" dirty="0"/>
           </a:p>
@@ -10220,13 +13889,111 @@
             <a:r>
               <a:rPr lang="en-US" sz="1100" dirty="0">
                 <a:solidFill>
-                  <a:srgbClr val="EAECEE"/>
-                </a:solidFill>
-                <a:latin typeface="Courier New" pitchFamily="34" charset="0"/>
-                <a:ea typeface="Courier New" pitchFamily="34" charset="-122"/>
-                <a:cs typeface="Courier New" pitchFamily="34" charset="-120"/>
-              </a:rPr>
-              <a:t>      is null then 7</a:t>
+                  <a:srgbClr val="CCCCCC"/>
+                </a:solidFill>
+                <a:latin typeface="Courier New" pitchFamily="34" charset="0"/>
+                <a:ea typeface="Courier New" pitchFamily="34" charset="-122"/>
+                <a:cs typeface="Courier New" pitchFamily="34" charset="-120"/>
+              </a:rPr>
+              <a:t>      </a:t>
+            </a:r>
+            <a:pPr indent="0" marL="0">
+              <a:buNone/>
+            </a:pPr>
+            <a:r>
+              <a:rPr lang="en-US" sz="1100" dirty="0">
+                <a:solidFill>
+                  <a:srgbClr val="569CD6"/>
+                </a:solidFill>
+                <a:latin typeface="Courier New" pitchFamily="34" charset="0"/>
+                <a:ea typeface="Courier New" pitchFamily="34" charset="-122"/>
+                <a:cs typeface="Courier New" pitchFamily="34" charset="-120"/>
+              </a:rPr>
+              <a:t>is</a:t>
+            </a:r>
+            <a:pPr indent="0" marL="0">
+              <a:buNone/>
+            </a:pPr>
+            <a:r>
+              <a:rPr lang="en-US" sz="1100" dirty="0">
+                <a:solidFill>
+                  <a:srgbClr val="CCCCCC"/>
+                </a:solidFill>
+                <a:latin typeface="Courier New" pitchFamily="34" charset="0"/>
+                <a:ea typeface="Courier New" pitchFamily="34" charset="-122"/>
+                <a:cs typeface="Courier New" pitchFamily="34" charset="-120"/>
+              </a:rPr>
+              <a:t> </a:t>
+            </a:r>
+            <a:pPr indent="0" marL="0">
+              <a:buNone/>
+            </a:pPr>
+            <a:r>
+              <a:rPr lang="en-US" sz="1100" dirty="0">
+                <a:solidFill>
+                  <a:srgbClr val="569CD6"/>
+                </a:solidFill>
+                <a:latin typeface="Courier New" pitchFamily="34" charset="0"/>
+                <a:ea typeface="Courier New" pitchFamily="34" charset="-122"/>
+                <a:cs typeface="Courier New" pitchFamily="34" charset="-120"/>
+              </a:rPr>
+              <a:t>null</a:t>
+            </a:r>
+            <a:pPr indent="0" marL="0">
+              <a:buNone/>
+            </a:pPr>
+            <a:r>
+              <a:rPr lang="en-US" sz="1100" dirty="0">
+                <a:solidFill>
+                  <a:srgbClr val="CCCCCC"/>
+                </a:solidFill>
+                <a:latin typeface="Courier New" pitchFamily="34" charset="0"/>
+                <a:ea typeface="Courier New" pitchFamily="34" charset="-122"/>
+                <a:cs typeface="Courier New" pitchFamily="34" charset="-120"/>
+              </a:rPr>
+              <a:t> </a:t>
+            </a:r>
+            <a:pPr indent="0" marL="0">
+              <a:buNone/>
+            </a:pPr>
+            <a:r>
+              <a:rPr lang="en-US" sz="1100" dirty="0">
+                <a:solidFill>
+                  <a:srgbClr val="C586C0"/>
+                </a:solidFill>
+                <a:latin typeface="Courier New" pitchFamily="34" charset="0"/>
+                <a:ea typeface="Courier New" pitchFamily="34" charset="-122"/>
+                <a:cs typeface="Courier New" pitchFamily="34" charset="-120"/>
+              </a:rPr>
+              <a:t>then</a:t>
+            </a:r>
+            <a:pPr indent="0" marL="0">
+              <a:buNone/>
+            </a:pPr>
+            <a:r>
+              <a:rPr lang="en-US" sz="1100" dirty="0">
+                <a:solidFill>
+                  <a:srgbClr val="CCCCCC"/>
+                </a:solidFill>
+                <a:latin typeface="Courier New" pitchFamily="34" charset="0"/>
+                <a:ea typeface="Courier New" pitchFamily="34" charset="-122"/>
+                <a:cs typeface="Courier New" pitchFamily="34" charset="-120"/>
+              </a:rPr>
+              <a:t> </a:t>
+            </a:r>
+            <a:pPr indent="0" marL="0">
+              <a:buNone/>
+            </a:pPr>
+            <a:r>
+              <a:rPr lang="en-US" sz="1100" dirty="0">
+                <a:solidFill>
+                  <a:srgbClr val="B5CEA8"/>
+                </a:solidFill>
+                <a:latin typeface="Courier New" pitchFamily="34" charset="0"/>
+                <a:ea typeface="Courier New" pitchFamily="34" charset="-122"/>
+                <a:cs typeface="Courier New" pitchFamily="34" charset="-120"/>
+              </a:rPr>
+              <a:t>7</a:t>
             </a:r>
             <a:endParaRPr lang="en-US" sz="1100" dirty="0"/>
           </a:p>
@@ -10237,13 +14004,111 @@
             <a:r>
               <a:rPr lang="en-US" sz="1100" dirty="0">
                 <a:solidFill>
-                  <a:srgbClr val="EAECEE"/>
-                </a:solidFill>
-                <a:latin typeface="Courier New" pitchFamily="34" charset="0"/>
-                <a:ea typeface="Courier New" pitchFamily="34" charset="-122"/>
-                <a:cs typeface="Courier New" pitchFamily="34" charset="-120"/>
-              </a:rPr>
-              <a:t>    else 1 end);</a:t>
+                  <a:srgbClr val="CCCCCC"/>
+                </a:solidFill>
+                <a:latin typeface="Courier New" pitchFamily="34" charset="0"/>
+                <a:ea typeface="Courier New" pitchFamily="34" charset="-122"/>
+                <a:cs typeface="Courier New" pitchFamily="34" charset="-120"/>
+              </a:rPr>
+              <a:t>    </a:t>
+            </a:r>
+            <a:pPr indent="0" marL="0">
+              <a:buNone/>
+            </a:pPr>
+            <a:r>
+              <a:rPr lang="en-US" sz="1100" dirty="0">
+                <a:solidFill>
+                  <a:srgbClr val="C586C0"/>
+                </a:solidFill>
+                <a:latin typeface="Courier New" pitchFamily="34" charset="0"/>
+                <a:ea typeface="Courier New" pitchFamily="34" charset="-122"/>
+                <a:cs typeface="Courier New" pitchFamily="34" charset="-120"/>
+              </a:rPr>
+              <a:t>else</a:t>
+            </a:r>
+            <a:pPr indent="0" marL="0">
+              <a:buNone/>
+            </a:pPr>
+            <a:r>
+              <a:rPr lang="en-US" sz="1100" dirty="0">
+                <a:solidFill>
+                  <a:srgbClr val="CCCCCC"/>
+                </a:solidFill>
+                <a:latin typeface="Courier New" pitchFamily="34" charset="0"/>
+                <a:ea typeface="Courier New" pitchFamily="34" charset="-122"/>
+                <a:cs typeface="Courier New" pitchFamily="34" charset="-120"/>
+              </a:rPr>
+              <a:t> </a:t>
+            </a:r>
+            <a:pPr indent="0" marL="0">
+              <a:buNone/>
+            </a:pPr>
+            <a:r>
+              <a:rPr lang="en-US" sz="1100" dirty="0">
+                <a:solidFill>
+                  <a:srgbClr val="B5CEA8"/>
+                </a:solidFill>
+                <a:latin typeface="Courier New" pitchFamily="34" charset="0"/>
+                <a:ea typeface="Courier New" pitchFamily="34" charset="-122"/>
+                <a:cs typeface="Courier New" pitchFamily="34" charset="-120"/>
+              </a:rPr>
+              <a:t>1</a:t>
+            </a:r>
+            <a:pPr indent="0" marL="0">
+              <a:buNone/>
+            </a:pPr>
+            <a:r>
+              <a:rPr lang="en-US" sz="1100" dirty="0">
+                <a:solidFill>
+                  <a:srgbClr val="CCCCCC"/>
+                </a:solidFill>
+                <a:latin typeface="Courier New" pitchFamily="34" charset="0"/>
+                <a:ea typeface="Courier New" pitchFamily="34" charset="-122"/>
+                <a:cs typeface="Courier New" pitchFamily="34" charset="-120"/>
+              </a:rPr>
+              <a:t> </a:t>
+            </a:r>
+            <a:pPr indent="0" marL="0">
+              <a:buNone/>
+            </a:pPr>
+            <a:r>
+              <a:rPr lang="en-US" sz="1100" dirty="0">
+                <a:solidFill>
+                  <a:srgbClr val="C586C0"/>
+                </a:solidFill>
+                <a:latin typeface="Courier New" pitchFamily="34" charset="0"/>
+                <a:ea typeface="Courier New" pitchFamily="34" charset="-122"/>
+                <a:cs typeface="Courier New" pitchFamily="34" charset="-120"/>
+              </a:rPr>
+              <a:t>end</a:t>
+            </a:r>
+            <a:pPr indent="0" marL="0">
+              <a:buNone/>
+            </a:pPr>
+            <a:r>
+              <a:rPr lang="en-US" sz="1100" dirty="0">
+                <a:solidFill>
+                  <a:srgbClr val="FFD700"/>
+                </a:solidFill>
+                <a:latin typeface="Courier New" pitchFamily="34" charset="0"/>
+                <a:ea typeface="Courier New" pitchFamily="34" charset="-122"/>
+                <a:cs typeface="Courier New" pitchFamily="34" charset="-120"/>
+              </a:rPr>
+              <a:t>)</a:t>
+            </a:r>
+            <a:pPr indent="0" marL="0">
+              <a:buNone/>
+            </a:pPr>
+            <a:r>
+              <a:rPr lang="en-US" sz="1100" dirty="0">
+                <a:solidFill>
+                  <a:srgbClr val="CCCCCC"/>
+                </a:solidFill>
+                <a:latin typeface="Courier New" pitchFamily="34" charset="0"/>
+                <a:ea typeface="Courier New" pitchFamily="34" charset="-122"/>
+                <a:cs typeface="Courier New" pitchFamily="34" charset="-120"/>
+              </a:rPr>
+              <a:t>;</a:t>
             </a:r>
             <a:endParaRPr lang="en-US" sz="1100" dirty="0"/>
           </a:p>
@@ -10254,7 +14119,7 @@
             <a:r>
               <a:rPr lang="en-US" sz="1100" dirty="0">
                 <a:solidFill>
-                  <a:srgbClr val="EAECEE"/>
+                  <a:srgbClr val="CCCCCC"/>
                 </a:solidFill>
                 <a:latin typeface="Courier New" pitchFamily="34" charset="0"/>
                 <a:ea typeface="Courier New" pitchFamily="34" charset="-122"/>
@@ -10271,13 +14136,69 @@
             <a:r>
               <a:rPr lang="en-US" sz="1100" dirty="0">
                 <a:solidFill>
-                  <a:srgbClr val="EAECEE"/>
-                </a:solidFill>
-                <a:latin typeface="Courier New" pitchFamily="34" charset="0"/>
-                <a:ea typeface="Courier New" pitchFamily="34" charset="-122"/>
-                <a:cs typeface="Courier New" pitchFamily="34" charset="-120"/>
-              </a:rPr>
-              <a:t>UI.UpdateHidden: (</a:t>
+                  <a:srgbClr val="4FC1FF"/>
+                </a:solidFill>
+                <a:latin typeface="Courier New" pitchFamily="34" charset="0"/>
+                <a:ea typeface="Courier New" pitchFamily="34" charset="-122"/>
+                <a:cs typeface="Courier New" pitchFamily="34" charset="-120"/>
+              </a:rPr>
+              <a:t>UI</a:t>
+            </a:r>
+            <a:pPr indent="0" marL="0">
+              <a:buNone/>
+            </a:pPr>
+            <a:r>
+              <a:rPr lang="en-US" sz="1100" dirty="0">
+                <a:solidFill>
+                  <a:srgbClr val="CCCCCC"/>
+                </a:solidFill>
+                <a:latin typeface="Courier New" pitchFamily="34" charset="0"/>
+                <a:ea typeface="Courier New" pitchFamily="34" charset="-122"/>
+                <a:cs typeface="Courier New" pitchFamily="34" charset="-120"/>
+              </a:rPr>
+              <a:t>.</a:t>
+            </a:r>
+            <a:pPr indent="0" marL="0">
+              <a:buNone/>
+            </a:pPr>
+            <a:r>
+              <a:rPr lang="en-US" sz="1100" dirty="0">
+                <a:solidFill>
+                  <a:srgbClr val="4EC9B0"/>
+                </a:solidFill>
+                <a:latin typeface="Courier New" pitchFamily="34" charset="0"/>
+                <a:ea typeface="Courier New" pitchFamily="34" charset="-122"/>
+                <a:cs typeface="Courier New" pitchFamily="34" charset="-120"/>
+              </a:rPr>
+              <a:t>UpdateHidden</a:t>
+            </a:r>
+            <a:pPr indent="0" marL="0">
+              <a:buNone/>
+            </a:pPr>
+            <a:r>
+              <a:rPr lang="en-US" sz="1100" dirty="0">
+                <a:solidFill>
+                  <a:srgbClr val="CCCCCC"/>
+                </a:solidFill>
+                <a:latin typeface="Courier New" pitchFamily="34" charset="0"/>
+                <a:ea typeface="Courier New" pitchFamily="34" charset="-122"/>
+                <a:cs typeface="Courier New" pitchFamily="34" charset="-120"/>
+              </a:rPr>
+              <a:t>: </a:t>
+            </a:r>
+            <a:pPr indent="0" marL="0">
+              <a:buNone/>
+            </a:pPr>
+            <a:r>
+              <a:rPr lang="en-US" sz="1100" dirty="0">
+                <a:solidFill>
+                  <a:srgbClr val="FFD700"/>
+                </a:solidFill>
+                <a:latin typeface="Courier New" pitchFamily="34" charset="0"/>
+                <a:ea typeface="Courier New" pitchFamily="34" charset="-122"/>
+                <a:cs typeface="Courier New" pitchFamily="34" charset="-120"/>
+              </a:rPr>
+              <a:t>(</a:t>
             </a:r>
             <a:endParaRPr lang="en-US" sz="1100" dirty="0"/>
           </a:p>
@@ -10288,13 +14209,55 @@
             <a:r>
               <a:rPr lang="en-US" sz="1100" dirty="0">
                 <a:solidFill>
-                  <a:srgbClr val="EAECEE"/>
-                </a:solidFill>
-                <a:latin typeface="Courier New" pitchFamily="34" charset="0"/>
-                <a:ea typeface="Courier New" pitchFamily="34" charset="-122"/>
-                <a:cs typeface="Courier New" pitchFamily="34" charset="-120"/>
-              </a:rPr>
-              <a:t>  statusPedido.code</a:t>
+                  <a:srgbClr val="CCCCCC"/>
+                </a:solidFill>
+                <a:latin typeface="Courier New" pitchFamily="34" charset="0"/>
+                <a:ea typeface="Courier New" pitchFamily="34" charset="-122"/>
+                <a:cs typeface="Courier New" pitchFamily="34" charset="-120"/>
+              </a:rPr>
+              <a:t>  </a:t>
+            </a:r>
+            <a:pPr indent="0" marL="0">
+              <a:buNone/>
+            </a:pPr>
+            <a:r>
+              <a:rPr lang="en-US" sz="1100" dirty="0">
+                <a:solidFill>
+                  <a:srgbClr val="9CDCFE"/>
+                </a:solidFill>
+                <a:latin typeface="Courier New" pitchFamily="34" charset="0"/>
+                <a:ea typeface="Courier New" pitchFamily="34" charset="-122"/>
+                <a:cs typeface="Courier New" pitchFamily="34" charset="-120"/>
+              </a:rPr>
+              <a:t>statusPedido</a:t>
+            </a:r>
+            <a:pPr indent="0" marL="0">
+              <a:buNone/>
+            </a:pPr>
+            <a:r>
+              <a:rPr lang="en-US" sz="1100" dirty="0">
+                <a:solidFill>
+                  <a:srgbClr val="CCCCCC"/>
+                </a:solidFill>
+                <a:latin typeface="Courier New" pitchFamily="34" charset="0"/>
+                <a:ea typeface="Courier New" pitchFamily="34" charset="-122"/>
+                <a:cs typeface="Courier New" pitchFamily="34" charset="-120"/>
+              </a:rPr>
+              <a:t>.</a:t>
+            </a:r>
+            <a:pPr indent="0" marL="0">
+              <a:buNone/>
+            </a:pPr>
+            <a:r>
+              <a:rPr lang="en-US" sz="1100" dirty="0">
+                <a:solidFill>
+                  <a:srgbClr val="9CDCFE"/>
+                </a:solidFill>
+                <a:latin typeface="Courier New" pitchFamily="34" charset="0"/>
+                <a:ea typeface="Courier New" pitchFamily="34" charset="-122"/>
+                <a:cs typeface="Courier New" pitchFamily="34" charset="-120"/>
+              </a:rPr>
+              <a:t>code</a:t>
             </a:r>
             <a:endParaRPr lang="en-US" sz="1100" dirty="0"/>
           </a:p>
@@ -10305,13 +14268,55 @@
             <a:r>
               <a:rPr lang="en-US" sz="1100" dirty="0">
                 <a:solidFill>
-                  <a:srgbClr val="EAECEE"/>
-                </a:solidFill>
-                <a:latin typeface="Courier New" pitchFamily="34" charset="0"/>
-                <a:ea typeface="Courier New" pitchFamily="34" charset="-122"/>
-                <a:cs typeface="Courier New" pitchFamily="34" charset="-120"/>
-              </a:rPr>
-              <a:t>    &lt;&gt; 'ABERTO'),</a:t>
+                  <a:srgbClr val="CCCCCC"/>
+                </a:solidFill>
+                <a:latin typeface="Courier New" pitchFamily="34" charset="0"/>
+                <a:ea typeface="Courier New" pitchFamily="34" charset="-122"/>
+                <a:cs typeface="Courier New" pitchFamily="34" charset="-120"/>
+              </a:rPr>
+              <a:t>    &lt;&gt; </a:t>
+            </a:r>
+            <a:pPr indent="0" marL="0">
+              <a:buNone/>
+            </a:pPr>
+            <a:r>
+              <a:rPr lang="en-US" sz="1100" dirty="0">
+                <a:solidFill>
+                  <a:srgbClr val="CE9178"/>
+                </a:solidFill>
+                <a:latin typeface="Courier New" pitchFamily="34" charset="0"/>
+                <a:ea typeface="Courier New" pitchFamily="34" charset="-122"/>
+                <a:cs typeface="Courier New" pitchFamily="34" charset="-120"/>
+              </a:rPr>
+              <a:t>'ABERTO'</a:t>
+            </a:r>
+            <a:pPr indent="0" marL="0">
+              <a:buNone/>
+            </a:pPr>
+            <a:r>
+              <a:rPr lang="en-US" sz="1100" dirty="0">
+                <a:solidFill>
+                  <a:srgbClr val="FFD700"/>
+                </a:solidFill>
+                <a:latin typeface="Courier New" pitchFamily="34" charset="0"/>
+                <a:ea typeface="Courier New" pitchFamily="34" charset="-122"/>
+                <a:cs typeface="Courier New" pitchFamily="34" charset="-120"/>
+              </a:rPr>
+              <a:t>)</a:t>
+            </a:r>
+            <a:pPr indent="0" marL="0">
+              <a:buNone/>
+            </a:pPr>
+            <a:r>
+              <a:rPr lang="en-US" sz="1100" dirty="0">
+                <a:solidFill>
+                  <a:srgbClr val="CCCCCC"/>
+                </a:solidFill>
+                <a:latin typeface="Courier New" pitchFamily="34" charset="0"/>
+                <a:ea typeface="Courier New" pitchFamily="34" charset="-122"/>
+                <a:cs typeface="Courier New" pitchFamily="34" charset="-120"/>
+              </a:rPr>
+              <a:t>,</a:t>
             </a:r>
             <a:endParaRPr lang="en-US" sz="1100" dirty="0"/>
           </a:p>
@@ -10322,13 +14327,69 @@
             <a:r>
               <a:rPr lang="en-US" sz="1100" dirty="0">
                 <a:solidFill>
-                  <a:srgbClr val="EAECEE"/>
-                </a:solidFill>
-                <a:latin typeface="Courier New" pitchFamily="34" charset="0"/>
-                <a:ea typeface="Courier New" pitchFamily="34" charset="-122"/>
-                <a:cs typeface="Courier New" pitchFamily="34" charset="-120"/>
-              </a:rPr>
-              <a:t>UI.DeleteHidden: true</a:t>
+                  <a:srgbClr val="4FC1FF"/>
+                </a:solidFill>
+                <a:latin typeface="Courier New" pitchFamily="34" charset="0"/>
+                <a:ea typeface="Courier New" pitchFamily="34" charset="-122"/>
+                <a:cs typeface="Courier New" pitchFamily="34" charset="-120"/>
+              </a:rPr>
+              <a:t>UI</a:t>
+            </a:r>
+            <a:pPr indent="0" marL="0">
+              <a:buNone/>
+            </a:pPr>
+            <a:r>
+              <a:rPr lang="en-US" sz="1100" dirty="0">
+                <a:solidFill>
+                  <a:srgbClr val="CCCCCC"/>
+                </a:solidFill>
+                <a:latin typeface="Courier New" pitchFamily="34" charset="0"/>
+                <a:ea typeface="Courier New" pitchFamily="34" charset="-122"/>
+                <a:cs typeface="Courier New" pitchFamily="34" charset="-120"/>
+              </a:rPr>
+              <a:t>.</a:t>
+            </a:r>
+            <a:pPr indent="0" marL="0">
+              <a:buNone/>
+            </a:pPr>
+            <a:r>
+              <a:rPr lang="en-US" sz="1100" dirty="0">
+                <a:solidFill>
+                  <a:srgbClr val="4EC9B0"/>
+                </a:solidFill>
+                <a:latin typeface="Courier New" pitchFamily="34" charset="0"/>
+                <a:ea typeface="Courier New" pitchFamily="34" charset="-122"/>
+                <a:cs typeface="Courier New" pitchFamily="34" charset="-120"/>
+              </a:rPr>
+              <a:t>DeleteHidden</a:t>
+            </a:r>
+            <a:pPr indent="0" marL="0">
+              <a:buNone/>
+            </a:pPr>
+            <a:r>
+              <a:rPr lang="en-US" sz="1100" dirty="0">
+                <a:solidFill>
+                  <a:srgbClr val="CCCCCC"/>
+                </a:solidFill>
+                <a:latin typeface="Courier New" pitchFamily="34" charset="0"/>
+                <a:ea typeface="Courier New" pitchFamily="34" charset="-122"/>
+                <a:cs typeface="Courier New" pitchFamily="34" charset="-120"/>
+              </a:rPr>
+              <a:t>: </a:t>
+            </a:r>
+            <a:pPr indent="0" marL="0">
+              <a:buNone/>
+            </a:pPr>
+            <a:r>
+              <a:rPr lang="en-US" sz="1100" dirty="0">
+                <a:solidFill>
+                  <a:srgbClr val="569CD6"/>
+                </a:solidFill>
+                <a:latin typeface="Courier New" pitchFamily="34" charset="0"/>
+                <a:ea typeface="Courier New" pitchFamily="34" charset="-122"/>
+                <a:cs typeface="Courier New" pitchFamily="34" charset="-120"/>
+              </a:rPr>
+              <a:t>true</a:t>
             </a:r>
             <a:endParaRPr lang="en-US" sz="1100" dirty="0"/>
           </a:p>
@@ -10503,9 +14564,14 @@
             </a:avLst>
           </a:prstGeom>
           <a:solidFill>
-            <a:srgbClr val="1D2D3E"/>
+            <a:srgbClr val="1F1F1F"/>
           </a:solidFill>
-          <a:ln/>
+          <a:ln w="9525">
+            <a:solidFill>
+              <a:srgbClr val="2B2B2B"/>
+            </a:solidFill>
+            <a:prstDash val="solid"/>
+          </a:ln>
           <a:effectLst>
             <a:outerShdw sx="100000" sy="100000" kx="0" ky="0" algn="bl" rotWithShape="0" blurRad="101600" dist="25400" dir="5400000">
               <a:srgbClr val="223649">
@@ -10542,13 +14608,69 @@
             <a:r>
               <a:rPr lang="en-US" sz="1100" dirty="0">
                 <a:solidFill>
-                  <a:srgbClr val="EAECEE"/>
-                </a:solidFill>
-                <a:latin typeface="Courier New" pitchFamily="34" charset="0"/>
-                <a:ea typeface="Courier New" pitchFamily="34" charset="-122"/>
-                <a:cs typeface="Courier New" pitchFamily="34" charset="-120"/>
-              </a:rPr>
-              <a:t>UI.CreateHidden: {</a:t>
+                  <a:srgbClr val="4FC1FF"/>
+                </a:solidFill>
+                <a:latin typeface="Courier New" pitchFamily="34" charset="0"/>
+                <a:ea typeface="Courier New" pitchFamily="34" charset="-122"/>
+                <a:cs typeface="Courier New" pitchFamily="34" charset="-120"/>
+              </a:rPr>
+              <a:t>UI</a:t>
+            </a:r>
+            <a:pPr indent="0" marL="0">
+              <a:buNone/>
+            </a:pPr>
+            <a:r>
+              <a:rPr lang="en-US" sz="1100" dirty="0">
+                <a:solidFill>
+                  <a:srgbClr val="CCCCCC"/>
+                </a:solidFill>
+                <a:latin typeface="Courier New" pitchFamily="34" charset="0"/>
+                <a:ea typeface="Courier New" pitchFamily="34" charset="-122"/>
+                <a:cs typeface="Courier New" pitchFamily="34" charset="-120"/>
+              </a:rPr>
+              <a:t>.</a:t>
+            </a:r>
+            <a:pPr indent="0" marL="0">
+              <a:buNone/>
+            </a:pPr>
+            <a:r>
+              <a:rPr lang="en-US" sz="1100" dirty="0">
+                <a:solidFill>
+                  <a:srgbClr val="4EC9B0"/>
+                </a:solidFill>
+                <a:latin typeface="Courier New" pitchFamily="34" charset="0"/>
+                <a:ea typeface="Courier New" pitchFamily="34" charset="-122"/>
+                <a:cs typeface="Courier New" pitchFamily="34" charset="-120"/>
+              </a:rPr>
+              <a:t>CreateHidden</a:t>
+            </a:r>
+            <a:pPr indent="0" marL="0">
+              <a:buNone/>
+            </a:pPr>
+            <a:r>
+              <a:rPr lang="en-US" sz="1100" dirty="0">
+                <a:solidFill>
+                  <a:srgbClr val="CCCCCC"/>
+                </a:solidFill>
+                <a:latin typeface="Courier New" pitchFamily="34" charset="0"/>
+                <a:ea typeface="Courier New" pitchFamily="34" charset="-122"/>
+                <a:cs typeface="Courier New" pitchFamily="34" charset="-120"/>
+              </a:rPr>
+              <a:t>: </a:t>
+            </a:r>
+            <a:pPr indent="0" marL="0">
+              <a:buNone/>
+            </a:pPr>
+            <a:r>
+              <a:rPr lang="en-US" sz="1100" dirty="0">
+                <a:solidFill>
+                  <a:srgbClr val="FFD700"/>
+                </a:solidFill>
+                <a:latin typeface="Courier New" pitchFamily="34" charset="0"/>
+                <a:ea typeface="Courier New" pitchFamily="34" charset="-122"/>
+                <a:cs typeface="Courier New" pitchFamily="34" charset="-120"/>
+              </a:rPr>
+              <a:t>{</a:t>
             </a:r>
             <a:endParaRPr lang="en-US" sz="1100" dirty="0"/>
           </a:p>
@@ -10559,13 +14681,97 @@
             <a:r>
               <a:rPr lang="en-US" sz="1100" dirty="0">
                 <a:solidFill>
-                  <a:srgbClr val="EAECEE"/>
-                </a:solidFill>
-                <a:latin typeface="Courier New" pitchFamily="34" charset="0"/>
-                <a:ea typeface="Courier New" pitchFamily="34" charset="-122"/>
-                <a:cs typeface="Courier New" pitchFamily="34" charset="-120"/>
-              </a:rPr>
-              <a:t>  $edmJson: { $Path:</a:t>
+                  <a:srgbClr val="CCCCCC"/>
+                </a:solidFill>
+                <a:latin typeface="Courier New" pitchFamily="34" charset="0"/>
+                <a:ea typeface="Courier New" pitchFamily="34" charset="-122"/>
+                <a:cs typeface="Courier New" pitchFamily="34" charset="-120"/>
+              </a:rPr>
+              <a:t>  </a:t>
+            </a:r>
+            <a:pPr indent="0" marL="0">
+              <a:buNone/>
+            </a:pPr>
+            <a:r>
+              <a:rPr lang="en-US" sz="1100" dirty="0">
+                <a:solidFill>
+                  <a:srgbClr val="569CD6"/>
+                </a:solidFill>
+                <a:latin typeface="Courier New" pitchFamily="34" charset="0"/>
+                <a:ea typeface="Courier New" pitchFamily="34" charset="-122"/>
+                <a:cs typeface="Courier New" pitchFamily="34" charset="-120"/>
+              </a:rPr>
+              <a:t>$edmJson</a:t>
+            </a:r>
+            <a:pPr indent="0" marL="0">
+              <a:buNone/>
+            </a:pPr>
+            <a:r>
+              <a:rPr lang="en-US" sz="1100" dirty="0">
+                <a:solidFill>
+                  <a:srgbClr val="CCCCCC"/>
+                </a:solidFill>
+                <a:latin typeface="Courier New" pitchFamily="34" charset="0"/>
+                <a:ea typeface="Courier New" pitchFamily="34" charset="-122"/>
+                <a:cs typeface="Courier New" pitchFamily="34" charset="-120"/>
+              </a:rPr>
+              <a:t>: </a:t>
+            </a:r>
+            <a:pPr indent="0" marL="0">
+              <a:buNone/>
+            </a:pPr>
+            <a:r>
+              <a:rPr lang="en-US" sz="1100" dirty="0">
+                <a:solidFill>
+                  <a:srgbClr val="DA70D6"/>
+                </a:solidFill>
+                <a:latin typeface="Courier New" pitchFamily="34" charset="0"/>
+                <a:ea typeface="Courier New" pitchFamily="34" charset="-122"/>
+                <a:cs typeface="Courier New" pitchFamily="34" charset="-120"/>
+              </a:rPr>
+              <a:t>{</a:t>
+            </a:r>
+            <a:pPr indent="0" marL="0">
+              <a:buNone/>
+            </a:pPr>
+            <a:r>
+              <a:rPr lang="en-US" sz="1100" dirty="0">
+                <a:solidFill>
+                  <a:srgbClr val="CCCCCC"/>
+                </a:solidFill>
+                <a:latin typeface="Courier New" pitchFamily="34" charset="0"/>
+                <a:ea typeface="Courier New" pitchFamily="34" charset="-122"/>
+                <a:cs typeface="Courier New" pitchFamily="34" charset="-120"/>
+              </a:rPr>
+              <a:t> </a:t>
+            </a:r>
+            <a:pPr indent="0" marL="0">
+              <a:buNone/>
+            </a:pPr>
+            <a:r>
+              <a:rPr lang="en-US" sz="1100" dirty="0">
+                <a:solidFill>
+                  <a:srgbClr val="569CD6"/>
+                </a:solidFill>
+                <a:latin typeface="Courier New" pitchFamily="34" charset="0"/>
+                <a:ea typeface="Courier New" pitchFamily="34" charset="-122"/>
+                <a:cs typeface="Courier New" pitchFamily="34" charset="-120"/>
+              </a:rPr>
+              <a:t>$Path</a:t>
+            </a:r>
+            <a:pPr indent="0" marL="0">
+              <a:buNone/>
+            </a:pPr>
+            <a:r>
+              <a:rPr lang="en-US" sz="1100" dirty="0">
+                <a:solidFill>
+                  <a:srgbClr val="CCCCCC"/>
+                </a:solidFill>
+                <a:latin typeface="Courier New" pitchFamily="34" charset="0"/>
+                <a:ea typeface="Courier New" pitchFamily="34" charset="-122"/>
+                <a:cs typeface="Courier New" pitchFamily="34" charset="-120"/>
+              </a:rPr>
+              <a:t>:</a:t>
             </a:r>
             <a:endParaRPr lang="en-US" sz="1100" dirty="0"/>
           </a:p>
@@ -10576,13 +14782,27 @@
             <a:r>
               <a:rPr lang="en-US" sz="1100" dirty="0">
                 <a:solidFill>
-                  <a:srgbClr val="EAECEE"/>
-                </a:solidFill>
-                <a:latin typeface="Courier New" pitchFamily="34" charset="0"/>
-                <a:ea typeface="Courier New" pitchFamily="34" charset="-122"/>
-                <a:cs typeface="Courier New" pitchFamily="34" charset="-120"/>
-              </a:rPr>
-              <a:t>    '/ClientesService</a:t>
+                  <a:srgbClr val="CCCCCC"/>
+                </a:solidFill>
+                <a:latin typeface="Courier New" pitchFamily="34" charset="0"/>
+                <a:ea typeface="Courier New" pitchFamily="34" charset="-122"/>
+                <a:cs typeface="Courier New" pitchFamily="34" charset="-120"/>
+              </a:rPr>
+              <a:t>    </a:t>
+            </a:r>
+            <a:pPr indent="0" marL="0">
+              <a:buNone/>
+            </a:pPr>
+            <a:r>
+              <a:rPr lang="en-US" sz="1100" dirty="0">
+                <a:solidFill>
+                  <a:srgbClr val="CE9178"/>
+                </a:solidFill>
+                <a:latin typeface="Courier New" pitchFamily="34" charset="0"/>
+                <a:ea typeface="Courier New" pitchFamily="34" charset="-122"/>
+                <a:cs typeface="Courier New" pitchFamily="34" charset="-120"/>
+              </a:rPr>
+              <a:t>'/ClientesService</a:t>
             </a:r>
             <a:endParaRPr lang="en-US" sz="1100" dirty="0"/>
           </a:p>
@@ -10593,13 +14813,27 @@
             <a:r>
               <a:rPr lang="en-US" sz="1100" dirty="0">
                 <a:solidFill>
-                  <a:srgbClr val="EAECEE"/>
-                </a:solidFill>
-                <a:latin typeface="Courier New" pitchFamily="34" charset="0"/>
-                <a:ea typeface="Courier New" pitchFamily="34" charset="-122"/>
-                <a:cs typeface="Courier New" pitchFamily="34" charset="-120"/>
-              </a:rPr>
-              <a:t>     .EntityContainer</a:t>
+                  <a:srgbClr val="CCCCCC"/>
+                </a:solidFill>
+                <a:latin typeface="Courier New" pitchFamily="34" charset="0"/>
+                <a:ea typeface="Courier New" pitchFamily="34" charset="-122"/>
+                <a:cs typeface="Courier New" pitchFamily="34" charset="-120"/>
+              </a:rPr>
+              <a:t>     .</a:t>
+            </a:r>
+            <a:pPr indent="0" marL="0">
+              <a:buNone/>
+            </a:pPr>
+            <a:r>
+              <a:rPr lang="en-US" sz="1100" dirty="0">
+                <a:solidFill>
+                  <a:srgbClr val="4EC9B0"/>
+                </a:solidFill>
+                <a:latin typeface="Courier New" pitchFamily="34" charset="0"/>
+                <a:ea typeface="Courier New" pitchFamily="34" charset="-122"/>
+                <a:cs typeface="Courier New" pitchFamily="34" charset="-120"/>
+              </a:rPr>
+              <a:t>EntityContainer</a:t>
             </a:r>
             <a:endParaRPr lang="en-US" sz="1100" dirty="0"/>
           </a:p>
@@ -10610,13 +14844,27 @@
             <a:r>
               <a:rPr lang="en-US" sz="1100" dirty="0">
                 <a:solidFill>
-                  <a:srgbClr val="EAECEE"/>
-                </a:solidFill>
-                <a:latin typeface="Courier New" pitchFamily="34" charset="0"/>
-                <a:ea typeface="Courier New" pitchFamily="34" charset="-122"/>
-                <a:cs typeface="Courier New" pitchFamily="34" charset="-120"/>
-              </a:rPr>
-              <a:t>     /Permissoes</a:t>
+                  <a:srgbClr val="CCCCCC"/>
+                </a:solidFill>
+                <a:latin typeface="Courier New" pitchFamily="34" charset="0"/>
+                <a:ea typeface="Courier New" pitchFamily="34" charset="-122"/>
+                <a:cs typeface="Courier New" pitchFamily="34" charset="-120"/>
+              </a:rPr>
+              <a:t>     /</a:t>
+            </a:r>
+            <a:pPr indent="0" marL="0">
+              <a:buNone/>
+            </a:pPr>
+            <a:r>
+              <a:rPr lang="en-US" sz="1100" dirty="0">
+                <a:solidFill>
+                  <a:srgbClr val="4EC9B0"/>
+                </a:solidFill>
+                <a:latin typeface="Courier New" pitchFamily="34" charset="0"/>
+                <a:ea typeface="Courier New" pitchFamily="34" charset="-122"/>
+                <a:cs typeface="Courier New" pitchFamily="34" charset="-120"/>
+              </a:rPr>
+              <a:t>Permissoes</a:t>
             </a:r>
             <a:endParaRPr lang="en-US" sz="1100" dirty="0"/>
           </a:p>
@@ -10627,13 +14875,41 @@
             <a:r>
               <a:rPr lang="en-US" sz="1100" dirty="0">
                 <a:solidFill>
-                  <a:srgbClr val="EAECEE"/>
-                </a:solidFill>
-                <a:latin typeface="Courier New" pitchFamily="34" charset="0"/>
-                <a:ea typeface="Courier New" pitchFamily="34" charset="-122"/>
-                <a:cs typeface="Courier New" pitchFamily="34" charset="-120"/>
-              </a:rPr>
-              <a:t>     /somenteLeitura' }</a:t>
+                  <a:srgbClr val="CCCCCC"/>
+                </a:solidFill>
+                <a:latin typeface="Courier New" pitchFamily="34" charset="0"/>
+                <a:ea typeface="Courier New" pitchFamily="34" charset="-122"/>
+                <a:cs typeface="Courier New" pitchFamily="34" charset="-120"/>
+              </a:rPr>
+              <a:t>     /</a:t>
+            </a:r>
+            <a:pPr indent="0" marL="0">
+              <a:buNone/>
+            </a:pPr>
+            <a:r>
+              <a:rPr lang="en-US" sz="1100" dirty="0">
+                <a:solidFill>
+                  <a:srgbClr val="9CDCFE"/>
+                </a:solidFill>
+                <a:latin typeface="Courier New" pitchFamily="34" charset="0"/>
+                <a:ea typeface="Courier New" pitchFamily="34" charset="-122"/>
+                <a:cs typeface="Courier New" pitchFamily="34" charset="-120"/>
+              </a:rPr>
+              <a:t>somenteLeitura</a:t>
+            </a:r>
+            <a:pPr indent="0" marL="0">
+              <a:buNone/>
+            </a:pPr>
+            <a:r>
+              <a:rPr lang="en-US" sz="1100" dirty="0">
+                <a:solidFill>
+                  <a:srgbClr val="CE9178"/>
+                </a:solidFill>
+                <a:latin typeface="Courier New" pitchFamily="34" charset="0"/>
+                <a:ea typeface="Courier New" pitchFamily="34" charset="-122"/>
+                <a:cs typeface="Courier New" pitchFamily="34" charset="-120"/>
+              </a:rPr>
+              <a:t>' }</a:t>
             </a:r>
             <a:endParaRPr lang="en-US" sz="1100" dirty="0"/>
           </a:p>
@@ -10644,13 +14920,27 @@
             <a:r>
               <a:rPr lang="en-US" sz="1100" dirty="0">
                 <a:solidFill>
-                  <a:srgbClr val="EAECEE"/>
-                </a:solidFill>
-                <a:latin typeface="Courier New" pitchFamily="34" charset="0"/>
-                <a:ea typeface="Courier New" pitchFamily="34" charset="-122"/>
-                <a:cs typeface="Courier New" pitchFamily="34" charset="-120"/>
-              </a:rPr>
-              <a:t>},</a:t>
+                  <a:srgbClr val="DA70D6"/>
+                </a:solidFill>
+                <a:latin typeface="Courier New" pitchFamily="34" charset="0"/>
+                <a:ea typeface="Courier New" pitchFamily="34" charset="-122"/>
+                <a:cs typeface="Courier New" pitchFamily="34" charset="-120"/>
+              </a:rPr>
+              <a:t>}</a:t>
+            </a:r>
+            <a:pPr indent="0" marL="0">
+              <a:buNone/>
+            </a:pPr>
+            <a:r>
+              <a:rPr lang="en-US" sz="1100" dirty="0">
+                <a:solidFill>
+                  <a:srgbClr val="CCCCCC"/>
+                </a:solidFill>
+                <a:latin typeface="Courier New" pitchFamily="34" charset="0"/>
+                <a:ea typeface="Courier New" pitchFamily="34" charset="-122"/>
+                <a:cs typeface="Courier New" pitchFamily="34" charset="-120"/>
+              </a:rPr>
+              <a:t>,</a:t>
             </a:r>
             <a:endParaRPr lang="en-US" sz="1100" dirty="0"/>
           </a:p>
@@ -10661,13 +14951,111 @@
             <a:r>
               <a:rPr lang="en-US" sz="1100" dirty="0">
                 <a:solidFill>
-                  <a:srgbClr val="EAECEE"/>
-                </a:solidFill>
-                <a:latin typeface="Courier New" pitchFamily="34" charset="0"/>
-                <a:ea typeface="Courier New" pitchFamily="34" charset="-122"/>
-                <a:cs typeface="Courier New" pitchFamily="34" charset="-120"/>
-              </a:rPr>
-              <a:t>UI.UpdateHidden: { ... },</a:t>
+                  <a:srgbClr val="4FC1FF"/>
+                </a:solidFill>
+                <a:latin typeface="Courier New" pitchFamily="34" charset="0"/>
+                <a:ea typeface="Courier New" pitchFamily="34" charset="-122"/>
+                <a:cs typeface="Courier New" pitchFamily="34" charset="-120"/>
+              </a:rPr>
+              <a:t>UI</a:t>
+            </a:r>
+            <a:pPr indent="0" marL="0">
+              <a:buNone/>
+            </a:pPr>
+            <a:r>
+              <a:rPr lang="en-US" sz="1100" dirty="0">
+                <a:solidFill>
+                  <a:srgbClr val="CCCCCC"/>
+                </a:solidFill>
+                <a:latin typeface="Courier New" pitchFamily="34" charset="0"/>
+                <a:ea typeface="Courier New" pitchFamily="34" charset="-122"/>
+                <a:cs typeface="Courier New" pitchFamily="34" charset="-120"/>
+              </a:rPr>
+              <a:t>.</a:t>
+            </a:r>
+            <a:pPr indent="0" marL="0">
+              <a:buNone/>
+            </a:pPr>
+            <a:r>
+              <a:rPr lang="en-US" sz="1100" dirty="0">
+                <a:solidFill>
+                  <a:srgbClr val="4EC9B0"/>
+                </a:solidFill>
+                <a:latin typeface="Courier New" pitchFamily="34" charset="0"/>
+                <a:ea typeface="Courier New" pitchFamily="34" charset="-122"/>
+                <a:cs typeface="Courier New" pitchFamily="34" charset="-120"/>
+              </a:rPr>
+              <a:t>UpdateHidden</a:t>
+            </a:r>
+            <a:pPr indent="0" marL="0">
+              <a:buNone/>
+            </a:pPr>
+            <a:r>
+              <a:rPr lang="en-US" sz="1100" dirty="0">
+                <a:solidFill>
+                  <a:srgbClr val="CCCCCC"/>
+                </a:solidFill>
+                <a:latin typeface="Courier New" pitchFamily="34" charset="0"/>
+                <a:ea typeface="Courier New" pitchFamily="34" charset="-122"/>
+                <a:cs typeface="Courier New" pitchFamily="34" charset="-120"/>
+              </a:rPr>
+              <a:t>: </a:t>
+            </a:r>
+            <a:pPr indent="0" marL="0">
+              <a:buNone/>
+            </a:pPr>
+            <a:r>
+              <a:rPr lang="en-US" sz="1100" dirty="0">
+                <a:solidFill>
+                  <a:srgbClr val="DA70D6"/>
+                </a:solidFill>
+                <a:latin typeface="Courier New" pitchFamily="34" charset="0"/>
+                <a:ea typeface="Courier New" pitchFamily="34" charset="-122"/>
+                <a:cs typeface="Courier New" pitchFamily="34" charset="-120"/>
+              </a:rPr>
+              <a:t>{</a:t>
+            </a:r>
+            <a:pPr indent="0" marL="0">
+              <a:buNone/>
+            </a:pPr>
+            <a:r>
+              <a:rPr lang="en-US" sz="1100" dirty="0">
+                <a:solidFill>
+                  <a:srgbClr val="CCCCCC"/>
+                </a:solidFill>
+                <a:latin typeface="Courier New" pitchFamily="34" charset="0"/>
+                <a:ea typeface="Courier New" pitchFamily="34" charset="-122"/>
+                <a:cs typeface="Courier New" pitchFamily="34" charset="-120"/>
+              </a:rPr>
+              <a:t> ... </a:t>
+            </a:r>
+            <a:pPr indent="0" marL="0">
+              <a:buNone/>
+            </a:pPr>
+            <a:r>
+              <a:rPr lang="en-US" sz="1100" dirty="0">
+                <a:solidFill>
+                  <a:srgbClr val="DA70D6"/>
+                </a:solidFill>
+                <a:latin typeface="Courier New" pitchFamily="34" charset="0"/>
+                <a:ea typeface="Courier New" pitchFamily="34" charset="-122"/>
+                <a:cs typeface="Courier New" pitchFamily="34" charset="-120"/>
+              </a:rPr>
+              <a:t>}</a:t>
+            </a:r>
+            <a:pPr indent="0" marL="0">
+              <a:buNone/>
+            </a:pPr>
+            <a:r>
+              <a:rPr lang="en-US" sz="1100" dirty="0">
+                <a:solidFill>
+                  <a:srgbClr val="CCCCCC"/>
+                </a:solidFill>
+                <a:latin typeface="Courier New" pitchFamily="34" charset="0"/>
+                <a:ea typeface="Courier New" pitchFamily="34" charset="-122"/>
+                <a:cs typeface="Courier New" pitchFamily="34" charset="-120"/>
+              </a:rPr>
+              <a:t>,</a:t>
             </a:r>
             <a:endParaRPr lang="en-US" sz="1100" dirty="0"/>
           </a:p>
@@ -10678,13 +15066,97 @@
             <a:r>
               <a:rPr lang="en-US" sz="1100" dirty="0">
                 <a:solidFill>
-                  <a:srgbClr val="EAECEE"/>
-                </a:solidFill>
-                <a:latin typeface="Courier New" pitchFamily="34" charset="0"/>
-                <a:ea typeface="Courier New" pitchFamily="34" charset="-122"/>
-                <a:cs typeface="Courier New" pitchFamily="34" charset="-120"/>
-              </a:rPr>
-              <a:t>UI.DeleteHidden: { ... }</a:t>
+                  <a:srgbClr val="4FC1FF"/>
+                </a:solidFill>
+                <a:latin typeface="Courier New" pitchFamily="34" charset="0"/>
+                <a:ea typeface="Courier New" pitchFamily="34" charset="-122"/>
+                <a:cs typeface="Courier New" pitchFamily="34" charset="-120"/>
+              </a:rPr>
+              <a:t>UI</a:t>
+            </a:r>
+            <a:pPr indent="0" marL="0">
+              <a:buNone/>
+            </a:pPr>
+            <a:r>
+              <a:rPr lang="en-US" sz="1100" dirty="0">
+                <a:solidFill>
+                  <a:srgbClr val="CCCCCC"/>
+                </a:solidFill>
+                <a:latin typeface="Courier New" pitchFamily="34" charset="0"/>
+                <a:ea typeface="Courier New" pitchFamily="34" charset="-122"/>
+                <a:cs typeface="Courier New" pitchFamily="34" charset="-120"/>
+              </a:rPr>
+              <a:t>.</a:t>
+            </a:r>
+            <a:pPr indent="0" marL="0">
+              <a:buNone/>
+            </a:pPr>
+            <a:r>
+              <a:rPr lang="en-US" sz="1100" dirty="0">
+                <a:solidFill>
+                  <a:srgbClr val="4EC9B0"/>
+                </a:solidFill>
+                <a:latin typeface="Courier New" pitchFamily="34" charset="0"/>
+                <a:ea typeface="Courier New" pitchFamily="34" charset="-122"/>
+                <a:cs typeface="Courier New" pitchFamily="34" charset="-120"/>
+              </a:rPr>
+              <a:t>DeleteHidden</a:t>
+            </a:r>
+            <a:pPr indent="0" marL="0">
+              <a:buNone/>
+            </a:pPr>
+            <a:r>
+              <a:rPr lang="en-US" sz="1100" dirty="0">
+                <a:solidFill>
+                  <a:srgbClr val="CCCCCC"/>
+                </a:solidFill>
+                <a:latin typeface="Courier New" pitchFamily="34" charset="0"/>
+                <a:ea typeface="Courier New" pitchFamily="34" charset="-122"/>
+                <a:cs typeface="Courier New" pitchFamily="34" charset="-120"/>
+              </a:rPr>
+              <a:t>: </a:t>
+            </a:r>
+            <a:pPr indent="0" marL="0">
+              <a:buNone/>
+            </a:pPr>
+            <a:r>
+              <a:rPr lang="en-US" sz="1100" dirty="0">
+                <a:solidFill>
+                  <a:srgbClr val="DA70D6"/>
+                </a:solidFill>
+                <a:latin typeface="Courier New" pitchFamily="34" charset="0"/>
+                <a:ea typeface="Courier New" pitchFamily="34" charset="-122"/>
+                <a:cs typeface="Courier New" pitchFamily="34" charset="-120"/>
+              </a:rPr>
+              <a:t>{</a:t>
+            </a:r>
+            <a:pPr indent="0" marL="0">
+              <a:buNone/>
+            </a:pPr>
+            <a:r>
+              <a:rPr lang="en-US" sz="1100" dirty="0">
+                <a:solidFill>
+                  <a:srgbClr val="CCCCCC"/>
+                </a:solidFill>
+                <a:latin typeface="Courier New" pitchFamily="34" charset="0"/>
+                <a:ea typeface="Courier New" pitchFamily="34" charset="-122"/>
+                <a:cs typeface="Courier New" pitchFamily="34" charset="-120"/>
+              </a:rPr>
+              <a:t> ... </a:t>
+            </a:r>
+            <a:pPr indent="0" marL="0">
+              <a:buNone/>
+            </a:pPr>
+            <a:r>
+              <a:rPr lang="en-US" sz="1100" dirty="0">
+                <a:solidFill>
+                  <a:srgbClr val="DA70D6"/>
+                </a:solidFill>
+                <a:latin typeface="Courier New" pitchFamily="34" charset="0"/>
+                <a:ea typeface="Courier New" pitchFamily="34" charset="-122"/>
+                <a:cs typeface="Courier New" pitchFamily="34" charset="-120"/>
+              </a:rPr>
+              <a:t>}</a:t>
             </a:r>
             <a:endParaRPr lang="en-US" sz="1100" dirty="0"/>
           </a:p>
@@ -12625,9 +17097,14 @@
             </a:avLst>
           </a:prstGeom>
           <a:solidFill>
-            <a:srgbClr val="1D2D3E"/>
+            <a:srgbClr val="1F1F1F"/>
           </a:solidFill>
-          <a:ln/>
+          <a:ln w="9525">
+            <a:solidFill>
+              <a:srgbClr val="2B2B2B"/>
+            </a:solidFill>
+            <a:prstDash val="solid"/>
+          </a:ln>
           <a:effectLst>
             <a:outerShdw sx="100000" sy="100000" kx="0" ky="0" algn="bl" rotWithShape="0" blurRad="101600" dist="25400" dir="5400000">
               <a:srgbClr val="223649">
@@ -12664,13 +17141,69 @@
             <a:r>
               <a:rPr lang="en-US" sz="1300" dirty="0">
                 <a:solidFill>
-                  <a:srgbClr val="EAECEE"/>
-                </a:solidFill>
-                <a:latin typeface="Courier New" pitchFamily="34" charset="0"/>
-                <a:ea typeface="Courier New" pitchFamily="34" charset="-122"/>
-                <a:cs typeface="Courier New" pitchFamily="34" charset="-120"/>
-              </a:rPr>
-              <a:t>cliente @Common: {</a:t>
+                  <a:srgbClr val="9CDCFE"/>
+                </a:solidFill>
+                <a:latin typeface="Courier New" pitchFamily="34" charset="0"/>
+                <a:ea typeface="Courier New" pitchFamily="34" charset="-122"/>
+                <a:cs typeface="Courier New" pitchFamily="34" charset="-120"/>
+              </a:rPr>
+              <a:t>cliente</a:t>
+            </a:r>
+            <a:pPr indent="0" marL="0">
+              <a:buNone/>
+            </a:pPr>
+            <a:r>
+              <a:rPr lang="en-US" sz="1300" dirty="0">
+                <a:solidFill>
+                  <a:srgbClr val="CCCCCC"/>
+                </a:solidFill>
+                <a:latin typeface="Courier New" pitchFamily="34" charset="0"/>
+                <a:ea typeface="Courier New" pitchFamily="34" charset="-122"/>
+                <a:cs typeface="Courier New" pitchFamily="34" charset="-120"/>
+              </a:rPr>
+              <a:t> </a:t>
+            </a:r>
+            <a:pPr indent="0" marL="0">
+              <a:buNone/>
+            </a:pPr>
+            <a:r>
+              <a:rPr lang="en-US" sz="1300" dirty="0">
+                <a:solidFill>
+                  <a:srgbClr val="DCDCAA"/>
+                </a:solidFill>
+                <a:latin typeface="Courier New" pitchFamily="34" charset="0"/>
+                <a:ea typeface="Courier New" pitchFamily="34" charset="-122"/>
+                <a:cs typeface="Courier New" pitchFamily="34" charset="-120"/>
+              </a:rPr>
+              <a:t>@Common</a:t>
+            </a:r>
+            <a:pPr indent="0" marL="0">
+              <a:buNone/>
+            </a:pPr>
+            <a:r>
+              <a:rPr lang="en-US" sz="1300" dirty="0">
+                <a:solidFill>
+                  <a:srgbClr val="CCCCCC"/>
+                </a:solidFill>
+                <a:latin typeface="Courier New" pitchFamily="34" charset="0"/>
+                <a:ea typeface="Courier New" pitchFamily="34" charset="-122"/>
+                <a:cs typeface="Courier New" pitchFamily="34" charset="-120"/>
+              </a:rPr>
+              <a:t>: </a:t>
+            </a:r>
+            <a:pPr indent="0" marL="0">
+              <a:buNone/>
+            </a:pPr>
+            <a:r>
+              <a:rPr lang="en-US" sz="1300" dirty="0">
+                <a:solidFill>
+                  <a:srgbClr val="FFD700"/>
+                </a:solidFill>
+                <a:latin typeface="Courier New" pitchFamily="34" charset="0"/>
+                <a:ea typeface="Courier New" pitchFamily="34" charset="-122"/>
+                <a:cs typeface="Courier New" pitchFamily="34" charset="-120"/>
+              </a:rPr>
+              <a:t>{</a:t>
             </a:r>
             <a:endParaRPr lang="en-US" sz="1300" dirty="0"/>
           </a:p>
@@ -12681,13 +17214,69 @@
             <a:r>
               <a:rPr lang="en-US" sz="1300" dirty="0">
                 <a:solidFill>
-                  <a:srgbClr val="EAECEE"/>
-                </a:solidFill>
-                <a:latin typeface="Courier New" pitchFamily="34" charset="0"/>
-                <a:ea typeface="Courier New" pitchFamily="34" charset="-122"/>
-                <a:cs typeface="Courier New" pitchFamily="34" charset="-120"/>
-              </a:rPr>
-              <a:t>  SemanticObject: 'Cliente',</a:t>
+                  <a:srgbClr val="CCCCCC"/>
+                </a:solidFill>
+                <a:latin typeface="Courier New" pitchFamily="34" charset="0"/>
+                <a:ea typeface="Courier New" pitchFamily="34" charset="-122"/>
+                <a:cs typeface="Courier New" pitchFamily="34" charset="-120"/>
+              </a:rPr>
+              <a:t>  </a:t>
+            </a:r>
+            <a:pPr indent="0" marL="0">
+              <a:buNone/>
+            </a:pPr>
+            <a:r>
+              <a:rPr lang="en-US" sz="1300" dirty="0">
+                <a:solidFill>
+                  <a:srgbClr val="4EC9B0"/>
+                </a:solidFill>
+                <a:latin typeface="Courier New" pitchFamily="34" charset="0"/>
+                <a:ea typeface="Courier New" pitchFamily="34" charset="-122"/>
+                <a:cs typeface="Courier New" pitchFamily="34" charset="-120"/>
+              </a:rPr>
+              <a:t>SemanticObject</a:t>
+            </a:r>
+            <a:pPr indent="0" marL="0">
+              <a:buNone/>
+            </a:pPr>
+            <a:r>
+              <a:rPr lang="en-US" sz="1300" dirty="0">
+                <a:solidFill>
+                  <a:srgbClr val="CCCCCC"/>
+                </a:solidFill>
+                <a:latin typeface="Courier New" pitchFamily="34" charset="0"/>
+                <a:ea typeface="Courier New" pitchFamily="34" charset="-122"/>
+                <a:cs typeface="Courier New" pitchFamily="34" charset="-120"/>
+              </a:rPr>
+              <a:t>: </a:t>
+            </a:r>
+            <a:pPr indent="0" marL="0">
+              <a:buNone/>
+            </a:pPr>
+            <a:r>
+              <a:rPr lang="en-US" sz="1300" dirty="0">
+                <a:solidFill>
+                  <a:srgbClr val="CE9178"/>
+                </a:solidFill>
+                <a:latin typeface="Courier New" pitchFamily="34" charset="0"/>
+                <a:ea typeface="Courier New" pitchFamily="34" charset="-122"/>
+                <a:cs typeface="Courier New" pitchFamily="34" charset="-120"/>
+              </a:rPr>
+              <a:t>'Cliente'</a:t>
+            </a:r>
+            <a:pPr indent="0" marL="0">
+              <a:buNone/>
+            </a:pPr>
+            <a:r>
+              <a:rPr lang="en-US" sz="1300" dirty="0">
+                <a:solidFill>
+                  <a:srgbClr val="CCCCCC"/>
+                </a:solidFill>
+                <a:latin typeface="Courier New" pitchFamily="34" charset="0"/>
+                <a:ea typeface="Courier New" pitchFamily="34" charset="-122"/>
+                <a:cs typeface="Courier New" pitchFamily="34" charset="-120"/>
+              </a:rPr>
+              <a:t>,</a:t>
             </a:r>
             <a:endParaRPr lang="en-US" sz="1300" dirty="0"/>
           </a:p>
@@ -12698,13 +17287,69 @@
             <a:r>
               <a:rPr lang="en-US" sz="1300" dirty="0">
                 <a:solidFill>
-                  <a:srgbClr val="EAECEE"/>
-                </a:solidFill>
-                <a:latin typeface="Courier New" pitchFamily="34" charset="0"/>
-                <a:ea typeface="Courier New" pitchFamily="34" charset="-122"/>
-                <a:cs typeface="Courier New" pitchFamily="34" charset="-120"/>
-              </a:rPr>
-              <a:t>  SemanticObjectMapping: [{</a:t>
+                  <a:srgbClr val="CCCCCC"/>
+                </a:solidFill>
+                <a:latin typeface="Courier New" pitchFamily="34" charset="0"/>
+                <a:ea typeface="Courier New" pitchFamily="34" charset="-122"/>
+                <a:cs typeface="Courier New" pitchFamily="34" charset="-120"/>
+              </a:rPr>
+              <a:t>  </a:t>
+            </a:r>
+            <a:pPr indent="0" marL="0">
+              <a:buNone/>
+            </a:pPr>
+            <a:r>
+              <a:rPr lang="en-US" sz="1300" dirty="0">
+                <a:solidFill>
+                  <a:srgbClr val="4EC9B0"/>
+                </a:solidFill>
+                <a:latin typeface="Courier New" pitchFamily="34" charset="0"/>
+                <a:ea typeface="Courier New" pitchFamily="34" charset="-122"/>
+                <a:cs typeface="Courier New" pitchFamily="34" charset="-120"/>
+              </a:rPr>
+              <a:t>SemanticObjectMapping</a:t>
+            </a:r>
+            <a:pPr indent="0" marL="0">
+              <a:buNone/>
+            </a:pPr>
+            <a:r>
+              <a:rPr lang="en-US" sz="1300" dirty="0">
+                <a:solidFill>
+                  <a:srgbClr val="CCCCCC"/>
+                </a:solidFill>
+                <a:latin typeface="Courier New" pitchFamily="34" charset="0"/>
+                <a:ea typeface="Courier New" pitchFamily="34" charset="-122"/>
+                <a:cs typeface="Courier New" pitchFamily="34" charset="-120"/>
+              </a:rPr>
+              <a:t>: </a:t>
+            </a:r>
+            <a:pPr indent="0" marL="0">
+              <a:buNone/>
+            </a:pPr>
+            <a:r>
+              <a:rPr lang="en-US" sz="1300" dirty="0">
+                <a:solidFill>
+                  <a:srgbClr val="DA70D6"/>
+                </a:solidFill>
+                <a:latin typeface="Courier New" pitchFamily="34" charset="0"/>
+                <a:ea typeface="Courier New" pitchFamily="34" charset="-122"/>
+                <a:cs typeface="Courier New" pitchFamily="34" charset="-120"/>
+              </a:rPr>
+              <a:t>[</a:t>
+            </a:r>
+            <a:pPr indent="0" marL="0">
+              <a:buNone/>
+            </a:pPr>
+            <a:r>
+              <a:rPr lang="en-US" sz="1300" dirty="0">
+                <a:solidFill>
+                  <a:srgbClr val="179FFF"/>
+                </a:solidFill>
+                <a:latin typeface="Courier New" pitchFamily="34" charset="0"/>
+                <a:ea typeface="Courier New" pitchFamily="34" charset="-122"/>
+                <a:cs typeface="Courier New" pitchFamily="34" charset="-120"/>
+              </a:rPr>
+              <a:t>{</a:t>
             </a:r>
             <a:endParaRPr lang="en-US" sz="1300" dirty="0"/>
           </a:p>
@@ -12715,13 +17360,41 @@
             <a:r>
               <a:rPr lang="en-US" sz="1300" dirty="0">
                 <a:solidFill>
-                  <a:srgbClr val="EAECEE"/>
-                </a:solidFill>
-                <a:latin typeface="Courier New" pitchFamily="34" charset="0"/>
-                <a:ea typeface="Courier New" pitchFamily="34" charset="-122"/>
-                <a:cs typeface="Courier New" pitchFamily="34" charset="-120"/>
-              </a:rPr>
-              <a:t>    LocalProperty:</a:t>
+                  <a:srgbClr val="CCCCCC"/>
+                </a:solidFill>
+                <a:latin typeface="Courier New" pitchFamily="34" charset="0"/>
+                <a:ea typeface="Courier New" pitchFamily="34" charset="-122"/>
+                <a:cs typeface="Courier New" pitchFamily="34" charset="-120"/>
+              </a:rPr>
+              <a:t>    </a:t>
+            </a:r>
+            <a:pPr indent="0" marL="0">
+              <a:buNone/>
+            </a:pPr>
+            <a:r>
+              <a:rPr lang="en-US" sz="1300" dirty="0">
+                <a:solidFill>
+                  <a:srgbClr val="4EC9B0"/>
+                </a:solidFill>
+                <a:latin typeface="Courier New" pitchFamily="34" charset="0"/>
+                <a:ea typeface="Courier New" pitchFamily="34" charset="-122"/>
+                <a:cs typeface="Courier New" pitchFamily="34" charset="-120"/>
+              </a:rPr>
+              <a:t>LocalProperty</a:t>
+            </a:r>
+            <a:pPr indent="0" marL="0">
+              <a:buNone/>
+            </a:pPr>
+            <a:r>
+              <a:rPr lang="en-US" sz="1300" dirty="0">
+                <a:solidFill>
+                  <a:srgbClr val="CCCCCC"/>
+                </a:solidFill>
+                <a:latin typeface="Courier New" pitchFamily="34" charset="0"/>
+                <a:ea typeface="Courier New" pitchFamily="34" charset="-122"/>
+                <a:cs typeface="Courier New" pitchFamily="34" charset="-120"/>
+              </a:rPr>
+              <a:t>:</a:t>
             </a:r>
             <a:endParaRPr lang="en-US" sz="1300" dirty="0"/>
           </a:p>
@@ -12732,13 +17405,41 @@
             <a:r>
               <a:rPr lang="en-US" sz="1300" dirty="0">
                 <a:solidFill>
-                  <a:srgbClr val="EAECEE"/>
-                </a:solidFill>
-                <a:latin typeface="Courier New" pitchFamily="34" charset="0"/>
-                <a:ea typeface="Courier New" pitchFamily="34" charset="-122"/>
-                <a:cs typeface="Courier New" pitchFamily="34" charset="-120"/>
-              </a:rPr>
-              <a:t>      cpfCliente,</a:t>
+                  <a:srgbClr val="CCCCCC"/>
+                </a:solidFill>
+                <a:latin typeface="Courier New" pitchFamily="34" charset="0"/>
+                <a:ea typeface="Courier New" pitchFamily="34" charset="-122"/>
+                <a:cs typeface="Courier New" pitchFamily="34" charset="-120"/>
+              </a:rPr>
+              <a:t>      </a:t>
+            </a:r>
+            <a:pPr indent="0" marL="0">
+              <a:buNone/>
+            </a:pPr>
+            <a:r>
+              <a:rPr lang="en-US" sz="1300" dirty="0">
+                <a:solidFill>
+                  <a:srgbClr val="9CDCFE"/>
+                </a:solidFill>
+                <a:latin typeface="Courier New" pitchFamily="34" charset="0"/>
+                <a:ea typeface="Courier New" pitchFamily="34" charset="-122"/>
+                <a:cs typeface="Courier New" pitchFamily="34" charset="-120"/>
+              </a:rPr>
+              <a:t>cpfCliente</a:t>
+            </a:r>
+            <a:pPr indent="0" marL="0">
+              <a:buNone/>
+            </a:pPr>
+            <a:r>
+              <a:rPr lang="en-US" sz="1300" dirty="0">
+                <a:solidFill>
+                  <a:srgbClr val="CCCCCC"/>
+                </a:solidFill>
+                <a:latin typeface="Courier New" pitchFamily="34" charset="0"/>
+                <a:ea typeface="Courier New" pitchFamily="34" charset="-122"/>
+                <a:cs typeface="Courier New" pitchFamily="34" charset="-120"/>
+              </a:rPr>
+              <a:t>,</a:t>
             </a:r>
             <a:endParaRPr lang="en-US" sz="1300" dirty="0"/>
           </a:p>
@@ -12749,13 +17450,41 @@
             <a:r>
               <a:rPr lang="en-US" sz="1300" dirty="0">
                 <a:solidFill>
-                  <a:srgbClr val="EAECEE"/>
-                </a:solidFill>
-                <a:latin typeface="Courier New" pitchFamily="34" charset="0"/>
-                <a:ea typeface="Courier New" pitchFamily="34" charset="-122"/>
-                <a:cs typeface="Courier New" pitchFamily="34" charset="-120"/>
-              </a:rPr>
-              <a:t>    SemanticObjectProperty:</a:t>
+                  <a:srgbClr val="CCCCCC"/>
+                </a:solidFill>
+                <a:latin typeface="Courier New" pitchFamily="34" charset="0"/>
+                <a:ea typeface="Courier New" pitchFamily="34" charset="-122"/>
+                <a:cs typeface="Courier New" pitchFamily="34" charset="-120"/>
+              </a:rPr>
+              <a:t>    </a:t>
+            </a:r>
+            <a:pPr indent="0" marL="0">
+              <a:buNone/>
+            </a:pPr>
+            <a:r>
+              <a:rPr lang="en-US" sz="1300" dirty="0">
+                <a:solidFill>
+                  <a:srgbClr val="4EC9B0"/>
+                </a:solidFill>
+                <a:latin typeface="Courier New" pitchFamily="34" charset="0"/>
+                <a:ea typeface="Courier New" pitchFamily="34" charset="-122"/>
+                <a:cs typeface="Courier New" pitchFamily="34" charset="-120"/>
+              </a:rPr>
+              <a:t>SemanticObjectProperty</a:t>
+            </a:r>
+            <a:pPr indent="0" marL="0">
+              <a:buNone/>
+            </a:pPr>
+            <a:r>
+              <a:rPr lang="en-US" sz="1300" dirty="0">
+                <a:solidFill>
+                  <a:srgbClr val="CCCCCC"/>
+                </a:solidFill>
+                <a:latin typeface="Courier New" pitchFamily="34" charset="0"/>
+                <a:ea typeface="Courier New" pitchFamily="34" charset="-122"/>
+                <a:cs typeface="Courier New" pitchFamily="34" charset="-120"/>
+              </a:rPr>
+              <a:t>:</a:t>
             </a:r>
             <a:endParaRPr lang="en-US" sz="1300" dirty="0"/>
           </a:p>
@@ -12766,13 +17495,69 @@
             <a:r>
               <a:rPr lang="en-US" sz="1300" dirty="0">
                 <a:solidFill>
-                  <a:srgbClr val="EAECEE"/>
-                </a:solidFill>
-                <a:latin typeface="Courier New" pitchFamily="34" charset="0"/>
-                <a:ea typeface="Courier New" pitchFamily="34" charset="-122"/>
-                <a:cs typeface="Courier New" pitchFamily="34" charset="-120"/>
-              </a:rPr>
-              <a:t>      'cpf' }]</a:t>
+                  <a:srgbClr val="CCCCCC"/>
+                </a:solidFill>
+                <a:latin typeface="Courier New" pitchFamily="34" charset="0"/>
+                <a:ea typeface="Courier New" pitchFamily="34" charset="-122"/>
+                <a:cs typeface="Courier New" pitchFamily="34" charset="-120"/>
+              </a:rPr>
+              <a:t>      </a:t>
+            </a:r>
+            <a:pPr indent="0" marL="0">
+              <a:buNone/>
+            </a:pPr>
+            <a:r>
+              <a:rPr lang="en-US" sz="1300" dirty="0">
+                <a:solidFill>
+                  <a:srgbClr val="CE9178"/>
+                </a:solidFill>
+                <a:latin typeface="Courier New" pitchFamily="34" charset="0"/>
+                <a:ea typeface="Courier New" pitchFamily="34" charset="-122"/>
+                <a:cs typeface="Courier New" pitchFamily="34" charset="-120"/>
+              </a:rPr>
+              <a:t>'cpf'</a:t>
+            </a:r>
+            <a:pPr indent="0" marL="0">
+              <a:buNone/>
+            </a:pPr>
+            <a:r>
+              <a:rPr lang="en-US" sz="1300" dirty="0">
+                <a:solidFill>
+                  <a:srgbClr val="CCCCCC"/>
+                </a:solidFill>
+                <a:latin typeface="Courier New" pitchFamily="34" charset="0"/>
+                <a:ea typeface="Courier New" pitchFamily="34" charset="-122"/>
+                <a:cs typeface="Courier New" pitchFamily="34" charset="-120"/>
+              </a:rPr>
+              <a:t> </a:t>
+            </a:r>
+            <a:pPr indent="0" marL="0">
+              <a:buNone/>
+            </a:pPr>
+            <a:r>
+              <a:rPr lang="en-US" sz="1300" dirty="0">
+                <a:solidFill>
+                  <a:srgbClr val="179FFF"/>
+                </a:solidFill>
+                <a:latin typeface="Courier New" pitchFamily="34" charset="0"/>
+                <a:ea typeface="Courier New" pitchFamily="34" charset="-122"/>
+                <a:cs typeface="Courier New" pitchFamily="34" charset="-120"/>
+              </a:rPr>
+              <a:t>}</a:t>
+            </a:r>
+            <a:pPr indent="0" marL="0">
+              <a:buNone/>
+            </a:pPr>
+            <a:r>
+              <a:rPr lang="en-US" sz="1300" dirty="0">
+                <a:solidFill>
+                  <a:srgbClr val="DA70D6"/>
+                </a:solidFill>
+                <a:latin typeface="Courier New" pitchFamily="34" charset="0"/>
+                <a:ea typeface="Courier New" pitchFamily="34" charset="-122"/>
+                <a:cs typeface="Courier New" pitchFamily="34" charset="-120"/>
+              </a:rPr>
+              <a:t>]</a:t>
             </a:r>
             <a:endParaRPr lang="en-US" sz="1300" dirty="0"/>
           </a:p>
@@ -12783,13 +17568,27 @@
             <a:r>
               <a:rPr lang="en-US" sz="1300" dirty="0">
                 <a:solidFill>
-                  <a:srgbClr val="EAECEE"/>
-                </a:solidFill>
-                <a:latin typeface="Courier New" pitchFamily="34" charset="0"/>
-                <a:ea typeface="Courier New" pitchFamily="34" charset="-122"/>
-                <a:cs typeface="Courier New" pitchFamily="34" charset="-120"/>
-              </a:rPr>
-              <a:t>};</a:t>
+                  <a:srgbClr val="FFD700"/>
+                </a:solidFill>
+                <a:latin typeface="Courier New" pitchFamily="34" charset="0"/>
+                <a:ea typeface="Courier New" pitchFamily="34" charset="-122"/>
+                <a:cs typeface="Courier New" pitchFamily="34" charset="-120"/>
+              </a:rPr>
+              <a:t>}</a:t>
+            </a:r>
+            <a:pPr indent="0" marL="0">
+              <a:buNone/>
+            </a:pPr>
+            <a:r>
+              <a:rPr lang="en-US" sz="1300" dirty="0">
+                <a:solidFill>
+                  <a:srgbClr val="CCCCCC"/>
+                </a:solidFill>
+                <a:latin typeface="Courier New" pitchFamily="34" charset="0"/>
+                <a:ea typeface="Courier New" pitchFamily="34" charset="-122"/>
+                <a:cs typeface="Courier New" pitchFamily="34" charset="-120"/>
+              </a:rPr>
+              <a:t>;</a:t>
             </a:r>
             <a:endParaRPr lang="en-US" sz="1300" dirty="0"/>
           </a:p>
